--- a/docs/plans/endless-phase-1.pptx
+++ b/docs/plans/endless-phase-1.pptx
@@ -18,6 +18,7 @@
     <p:sldId id="266" r:id="rId17"/>
     <p:sldId id="267" r:id="rId18"/>
     <p:sldId id="268" r:id="rId19"/>
+    <p:sldId id="269" r:id="rId20"/>
   </p:sldIdLst>
   <p:sldSz cx="12191695" cy="6858000" type="screen4x3"/>
   <p:notesSz cx="6858000" cy="9144000"/>
@@ -3461,6 +3462,827 @@
 </file>
 
 <file path=ppt/slides/slide10.xml><?xml version="1.0" encoding="utf-8"?>
+<p:sld xmlns:a="http://schemas.openxmlformats.org/drawingml/2006/main" xmlns:p="http://schemas.openxmlformats.org/presentationml/2006/main" xmlns:r="http://schemas.openxmlformats.org/officeDocument/2006/relationships">
+  <p:cSld>
+    <p:bg>
+      <p:bgPr>
+        <a:solidFill>
+          <a:srgbClr val="FFFFFF"/>
+        </a:solidFill>
+        <a:effectLst/>
+      </p:bgPr>
+    </p:bg>
+    <p:spTree>
+      <p:nvGrpSpPr>
+        <p:cNvPr id="1" name=""/>
+        <p:cNvGrpSpPr/>
+        <p:nvPr/>
+      </p:nvGrpSpPr>
+      <p:grpSpPr/>
+      <p:sp>
+        <p:nvSpPr>
+          <p:cNvPr id="2" name="TextBox 1"/>
+          <p:cNvSpPr txBox="1"/>
+          <p:nvPr/>
+        </p:nvSpPr>
+        <p:spPr>
+          <a:xfrm>
+            <a:off x="777240" y="502920"/>
+            <a:ext cx="10607040" cy="274320"/>
+          </a:xfrm>
+          <a:prstGeom prst="rect">
+            <a:avLst/>
+          </a:prstGeom>
+          <a:noFill/>
+        </p:spPr>
+        <p:txBody>
+          <a:bodyPr wrap="square" lIns="0" rIns="0" tIns="0" bIns="0">
+            <a:spAutoFit/>
+          </a:bodyPr>
+          <a:lstStyle/>
+          <a:p>
+            <a:pPr algn="l">
+              <a:lnSpc>
+                <a:spcPct val="100000"/>
+              </a:lnSpc>
+            </a:pPr>
+            <a:r>
+              <a:rPr sz="1100" b="1">
+                <a:solidFill>
+                  <a:srgbClr val="94A3B8"/>
+                </a:solidFill>
+                <a:latin typeface="Segoe UI"/>
+              </a:rPr>
+              <a:t>SEQUENCING</a:t>
+            </a:r>
+          </a:p>
+        </p:txBody>
+      </p:sp>
+      <p:sp>
+        <p:nvSpPr>
+          <p:cNvPr id="3" name="TextBox 2"/>
+          <p:cNvSpPr txBox="1"/>
+          <p:nvPr/>
+        </p:nvSpPr>
+        <p:spPr>
+          <a:xfrm>
+            <a:off x="777240" y="841248"/>
+            <a:ext cx="10607040" cy="640080"/>
+          </a:xfrm>
+          <a:prstGeom prst="rect">
+            <a:avLst/>
+          </a:prstGeom>
+          <a:noFill/>
+        </p:spPr>
+        <p:txBody>
+          <a:bodyPr wrap="square" lIns="0" rIns="0" tIns="0" bIns="0">
+            <a:spAutoFit/>
+          </a:bodyPr>
+          <a:lstStyle/>
+          <a:p>
+            <a:pPr algn="l">
+              <a:lnSpc>
+                <a:spcPct val="100000"/>
+              </a:lnSpc>
+            </a:pPr>
+            <a:r>
+              <a:rPr sz="3100" b="1">
+                <a:solidFill>
+                  <a:srgbClr val="0F172A"/>
+                </a:solidFill>
+                <a:latin typeface="Segoe UI"/>
+              </a:rPr>
+              <a:t>What blocks what</a:t>
+            </a:r>
+          </a:p>
+        </p:txBody>
+      </p:sp>
+      <p:sp>
+        <p:nvSpPr>
+          <p:cNvPr id="4" name="Rectangle 3"/>
+          <p:cNvSpPr/>
+          <p:nvPr/>
+        </p:nvSpPr>
+        <p:spPr>
+          <a:xfrm>
+            <a:off x="777240" y="1572768"/>
+            <a:ext cx="1005840" cy="41148"/>
+          </a:xfrm>
+          <a:prstGeom prst="rect">
+            <a:avLst/>
+          </a:prstGeom>
+          <a:solidFill>
+            <a:srgbClr val="ED7100"/>
+          </a:solidFill>
+          <a:ln>
+            <a:noFill/>
+          </a:ln>
+          <a:effectLst/>
+        </p:spPr>
+        <p:style>
+          <a:lnRef idx="1">
+            <a:schemeClr val="accent1"/>
+          </a:lnRef>
+          <a:fillRef idx="3">
+            <a:schemeClr val="accent1"/>
+          </a:fillRef>
+          <a:effectRef idx="2">
+            <a:schemeClr val="accent1"/>
+          </a:effectRef>
+          <a:fontRef idx="minor">
+            <a:schemeClr val="lt1"/>
+          </a:fontRef>
+        </p:style>
+        <p:txBody>
+          <a:bodyPr rtlCol="0" anchor="ctr"/>
+          <a:lstStyle/>
+          <a:p>
+            <a:pPr algn="ctr"/>
+          </a:p>
+        </p:txBody>
+      </p:sp>
+      <p:sp>
+        <p:nvSpPr>
+          <p:cNvPr id="5" name="Rounded Rectangle 4"/>
+          <p:cNvSpPr/>
+          <p:nvPr/>
+        </p:nvSpPr>
+        <p:spPr>
+          <a:xfrm>
+            <a:off x="777240" y="1783080"/>
+            <a:ext cx="1481328" cy="640080"/>
+          </a:xfrm>
+          <a:prstGeom prst="roundRect">
+            <a:avLst/>
+          </a:prstGeom>
+          <a:solidFill>
+            <a:srgbClr val="0F172A"/>
+          </a:solidFill>
+          <a:ln>
+            <a:noFill/>
+          </a:ln>
+          <a:effectLst/>
+        </p:spPr>
+        <p:style>
+          <a:lnRef idx="1">
+            <a:schemeClr val="accent1"/>
+          </a:lnRef>
+          <a:fillRef idx="3">
+            <a:schemeClr val="accent1"/>
+          </a:fillRef>
+          <a:effectRef idx="2">
+            <a:schemeClr val="accent1"/>
+          </a:effectRef>
+          <a:fontRef idx="minor">
+            <a:schemeClr val="lt1"/>
+          </a:fontRef>
+        </p:style>
+        <p:txBody>
+          <a:bodyPr rtlCol="0" anchor="ctr"/>
+          <a:lstStyle/>
+          <a:p>
+            <a:pPr algn="ctr"/>
+            <a:r>
+              <a:rPr sz="1100" b="1">
+                <a:solidFill>
+                  <a:srgbClr val="FFFFFF"/>
+                </a:solidFill>
+                <a:latin typeface="Segoe UI"/>
+              </a:rPr>
+              <a:t>#1 Identity</a:t>
+            </a:r>
+          </a:p>
+        </p:txBody>
+      </p:sp>
+      <p:sp>
+        <p:nvSpPr>
+          <p:cNvPr id="6" name="Right Arrow 5"/>
+          <p:cNvSpPr/>
+          <p:nvPr/>
+        </p:nvSpPr>
+        <p:spPr>
+          <a:xfrm>
+            <a:off x="2295144" y="1993392"/>
+            <a:ext cx="219456" cy="219456"/>
+          </a:xfrm>
+          <a:prstGeom prst="rightArrow">
+            <a:avLst/>
+          </a:prstGeom>
+          <a:solidFill>
+            <a:srgbClr val="94A3B8"/>
+          </a:solidFill>
+          <a:ln>
+            <a:noFill/>
+          </a:ln>
+          <a:effectLst/>
+        </p:spPr>
+        <p:style>
+          <a:lnRef idx="1">
+            <a:schemeClr val="accent1"/>
+          </a:lnRef>
+          <a:fillRef idx="3">
+            <a:schemeClr val="accent1"/>
+          </a:fillRef>
+          <a:effectRef idx="2">
+            <a:schemeClr val="accent1"/>
+          </a:effectRef>
+          <a:fontRef idx="minor">
+            <a:schemeClr val="lt1"/>
+          </a:fontRef>
+        </p:style>
+        <p:txBody>
+          <a:bodyPr rtlCol="0" anchor="ctr"/>
+          <a:lstStyle/>
+          <a:p>
+            <a:pPr algn="ctr"/>
+          </a:p>
+        </p:txBody>
+      </p:sp>
+      <p:sp>
+        <p:nvSpPr>
+          <p:cNvPr id="7" name="Rounded Rectangle 6"/>
+          <p:cNvSpPr/>
+          <p:nvPr/>
+        </p:nvSpPr>
+        <p:spPr>
+          <a:xfrm>
+            <a:off x="2551176" y="1783080"/>
+            <a:ext cx="1481328" cy="640080"/>
+          </a:xfrm>
+          <a:prstGeom prst="roundRect">
+            <a:avLst/>
+          </a:prstGeom>
+          <a:solidFill>
+            <a:srgbClr val="0F172A"/>
+          </a:solidFill>
+          <a:ln>
+            <a:noFill/>
+          </a:ln>
+          <a:effectLst/>
+        </p:spPr>
+        <p:style>
+          <a:lnRef idx="1">
+            <a:schemeClr val="accent1"/>
+          </a:lnRef>
+          <a:fillRef idx="3">
+            <a:schemeClr val="accent1"/>
+          </a:fillRef>
+          <a:effectRef idx="2">
+            <a:schemeClr val="accent1"/>
+          </a:effectRef>
+          <a:fontRef idx="minor">
+            <a:schemeClr val="lt1"/>
+          </a:fontRef>
+        </p:style>
+        <p:txBody>
+          <a:bodyPr rtlCol="0" anchor="ctr"/>
+          <a:lstStyle/>
+          <a:p>
+            <a:pPr algn="ctr"/>
+            <a:r>
+              <a:rPr sz="1100" b="1">
+                <a:solidFill>
+                  <a:srgbClr val="FFFFFF"/>
+                </a:solidFill>
+                <a:latin typeface="Segoe UI"/>
+              </a:rPr>
+              <a:t>#2 Package</a:t>
+            </a:r>
+          </a:p>
+        </p:txBody>
+      </p:sp>
+      <p:sp>
+        <p:nvSpPr>
+          <p:cNvPr id="8" name="Right Arrow 7"/>
+          <p:cNvSpPr/>
+          <p:nvPr/>
+        </p:nvSpPr>
+        <p:spPr>
+          <a:xfrm>
+            <a:off x="4069080" y="1993392"/>
+            <a:ext cx="219456" cy="219456"/>
+          </a:xfrm>
+          <a:prstGeom prst="rightArrow">
+            <a:avLst/>
+          </a:prstGeom>
+          <a:solidFill>
+            <a:srgbClr val="94A3B8"/>
+          </a:solidFill>
+          <a:ln>
+            <a:noFill/>
+          </a:ln>
+          <a:effectLst/>
+        </p:spPr>
+        <p:style>
+          <a:lnRef idx="1">
+            <a:schemeClr val="accent1"/>
+          </a:lnRef>
+          <a:fillRef idx="3">
+            <a:schemeClr val="accent1"/>
+          </a:fillRef>
+          <a:effectRef idx="2">
+            <a:schemeClr val="accent1"/>
+          </a:effectRef>
+          <a:fontRef idx="minor">
+            <a:schemeClr val="lt1"/>
+          </a:fontRef>
+        </p:style>
+        <p:txBody>
+          <a:bodyPr rtlCol="0" anchor="ctr"/>
+          <a:lstStyle/>
+          <a:p>
+            <a:pPr algn="ctr"/>
+          </a:p>
+        </p:txBody>
+      </p:sp>
+      <p:sp>
+        <p:nvSpPr>
+          <p:cNvPr id="9" name="Rounded Rectangle 8"/>
+          <p:cNvSpPr/>
+          <p:nvPr/>
+        </p:nvSpPr>
+        <p:spPr>
+          <a:xfrm>
+            <a:off x="4325112" y="1783080"/>
+            <a:ext cx="1481328" cy="640080"/>
+          </a:xfrm>
+          <a:prstGeom prst="roundRect">
+            <a:avLst/>
+          </a:prstGeom>
+          <a:solidFill>
+            <a:srgbClr val="0F172A"/>
+          </a:solidFill>
+          <a:ln>
+            <a:noFill/>
+          </a:ln>
+          <a:effectLst/>
+        </p:spPr>
+        <p:style>
+          <a:lnRef idx="1">
+            <a:schemeClr val="accent1"/>
+          </a:lnRef>
+          <a:fillRef idx="3">
+            <a:schemeClr val="accent1"/>
+          </a:fillRef>
+          <a:effectRef idx="2">
+            <a:schemeClr val="accent1"/>
+          </a:effectRef>
+          <a:fontRef idx="minor">
+            <a:schemeClr val="lt1"/>
+          </a:fontRef>
+        </p:style>
+        <p:txBody>
+          <a:bodyPr rtlCol="0" anchor="ctr"/>
+          <a:lstStyle/>
+          <a:p>
+            <a:pPr algn="ctr"/>
+            <a:r>
+              <a:rPr sz="1100" b="1">
+                <a:solidFill>
+                  <a:srgbClr val="FFFFFF"/>
+                </a:solidFill>
+                <a:latin typeface="Segoe UI"/>
+              </a:rPr>
+              <a:t>#3 Sandbox</a:t>
+            </a:r>
+          </a:p>
+        </p:txBody>
+      </p:sp>
+      <p:sp>
+        <p:nvSpPr>
+          <p:cNvPr id="10" name="Right Arrow 9"/>
+          <p:cNvSpPr/>
+          <p:nvPr/>
+        </p:nvSpPr>
+        <p:spPr>
+          <a:xfrm>
+            <a:off x="5843016" y="1993392"/>
+            <a:ext cx="219456" cy="219456"/>
+          </a:xfrm>
+          <a:prstGeom prst="rightArrow">
+            <a:avLst/>
+          </a:prstGeom>
+          <a:solidFill>
+            <a:srgbClr val="94A3B8"/>
+          </a:solidFill>
+          <a:ln>
+            <a:noFill/>
+          </a:ln>
+          <a:effectLst/>
+        </p:spPr>
+        <p:style>
+          <a:lnRef idx="1">
+            <a:schemeClr val="accent1"/>
+          </a:lnRef>
+          <a:fillRef idx="3">
+            <a:schemeClr val="accent1"/>
+          </a:fillRef>
+          <a:effectRef idx="2">
+            <a:schemeClr val="accent1"/>
+          </a:effectRef>
+          <a:fontRef idx="minor">
+            <a:schemeClr val="lt1"/>
+          </a:fontRef>
+        </p:style>
+        <p:txBody>
+          <a:bodyPr rtlCol="0" anchor="ctr"/>
+          <a:lstStyle/>
+          <a:p>
+            <a:pPr algn="ctr"/>
+          </a:p>
+        </p:txBody>
+      </p:sp>
+      <p:sp>
+        <p:nvSpPr>
+          <p:cNvPr id="11" name="Rounded Rectangle 10"/>
+          <p:cNvSpPr/>
+          <p:nvPr/>
+        </p:nvSpPr>
+        <p:spPr>
+          <a:xfrm>
+            <a:off x="6099048" y="1783080"/>
+            <a:ext cx="1481328" cy="640080"/>
+          </a:xfrm>
+          <a:prstGeom prst="roundRect">
+            <a:avLst/>
+          </a:prstGeom>
+          <a:solidFill>
+            <a:srgbClr val="0F172A"/>
+          </a:solidFill>
+          <a:ln>
+            <a:noFill/>
+          </a:ln>
+          <a:effectLst/>
+        </p:spPr>
+        <p:style>
+          <a:lnRef idx="1">
+            <a:schemeClr val="accent1"/>
+          </a:lnRef>
+          <a:fillRef idx="3">
+            <a:schemeClr val="accent1"/>
+          </a:fillRef>
+          <a:effectRef idx="2">
+            <a:schemeClr val="accent1"/>
+          </a:effectRef>
+          <a:fontRef idx="minor">
+            <a:schemeClr val="lt1"/>
+          </a:fontRef>
+        </p:style>
+        <p:txBody>
+          <a:bodyPr rtlCol="0" anchor="ctr"/>
+          <a:lstStyle/>
+          <a:p>
+            <a:pPr algn="ctr"/>
+            <a:r>
+              <a:rPr sz="1100" b="1">
+                <a:solidFill>
+                  <a:srgbClr val="FFFFFF"/>
+                </a:solidFill>
+                <a:latin typeface="Segoe UI"/>
+              </a:rPr>
+              <a:t>#4 Fetcher</a:t>
+            </a:r>
+          </a:p>
+        </p:txBody>
+      </p:sp>
+      <p:sp>
+        <p:nvSpPr>
+          <p:cNvPr id="12" name="Right Arrow 11"/>
+          <p:cNvSpPr/>
+          <p:nvPr/>
+        </p:nvSpPr>
+        <p:spPr>
+          <a:xfrm>
+            <a:off x="7616952" y="1993392"/>
+            <a:ext cx="219456" cy="219456"/>
+          </a:xfrm>
+          <a:prstGeom prst="rightArrow">
+            <a:avLst/>
+          </a:prstGeom>
+          <a:solidFill>
+            <a:srgbClr val="94A3B8"/>
+          </a:solidFill>
+          <a:ln>
+            <a:noFill/>
+          </a:ln>
+          <a:effectLst/>
+        </p:spPr>
+        <p:style>
+          <a:lnRef idx="1">
+            <a:schemeClr val="accent1"/>
+          </a:lnRef>
+          <a:fillRef idx="3">
+            <a:schemeClr val="accent1"/>
+          </a:fillRef>
+          <a:effectRef idx="2">
+            <a:schemeClr val="accent1"/>
+          </a:effectRef>
+          <a:fontRef idx="minor">
+            <a:schemeClr val="lt1"/>
+          </a:fontRef>
+        </p:style>
+        <p:txBody>
+          <a:bodyPr rtlCol="0" anchor="ctr"/>
+          <a:lstStyle/>
+          <a:p>
+            <a:pPr algn="ctr"/>
+          </a:p>
+        </p:txBody>
+      </p:sp>
+      <p:sp>
+        <p:nvSpPr>
+          <p:cNvPr id="13" name="Rounded Rectangle 12"/>
+          <p:cNvSpPr/>
+          <p:nvPr/>
+        </p:nvSpPr>
+        <p:spPr>
+          <a:xfrm>
+            <a:off x="7872984" y="1783080"/>
+            <a:ext cx="1481328" cy="640080"/>
+          </a:xfrm>
+          <a:prstGeom prst="roundRect">
+            <a:avLst/>
+          </a:prstGeom>
+          <a:solidFill>
+            <a:srgbClr val="0F172A"/>
+          </a:solidFill>
+          <a:ln>
+            <a:noFill/>
+          </a:ln>
+          <a:effectLst/>
+        </p:spPr>
+        <p:style>
+          <a:lnRef idx="1">
+            <a:schemeClr val="accent1"/>
+          </a:lnRef>
+          <a:fillRef idx="3">
+            <a:schemeClr val="accent1"/>
+          </a:fillRef>
+          <a:effectRef idx="2">
+            <a:schemeClr val="accent1"/>
+          </a:effectRef>
+          <a:fontRef idx="minor">
+            <a:schemeClr val="lt1"/>
+          </a:fontRef>
+        </p:style>
+        <p:txBody>
+          <a:bodyPr rtlCol="0" anchor="ctr"/>
+          <a:lstStyle/>
+          <a:p>
+            <a:pPr algn="ctr"/>
+            <a:r>
+              <a:rPr sz="1100" b="1">
+                <a:solidFill>
+                  <a:srgbClr val="FFFFFF"/>
+                </a:solidFill>
+                <a:latin typeface="Segoe UI"/>
+              </a:rPr>
+              <a:t>#5 Escape tests</a:t>
+            </a:r>
+          </a:p>
+        </p:txBody>
+      </p:sp>
+      <p:sp>
+        <p:nvSpPr>
+          <p:cNvPr id="14" name="Right Arrow 13"/>
+          <p:cNvSpPr/>
+          <p:nvPr/>
+        </p:nvSpPr>
+        <p:spPr>
+          <a:xfrm>
+            <a:off x="9390888" y="1993392"/>
+            <a:ext cx="219456" cy="219456"/>
+          </a:xfrm>
+          <a:prstGeom prst="rightArrow">
+            <a:avLst/>
+          </a:prstGeom>
+          <a:solidFill>
+            <a:srgbClr val="94A3B8"/>
+          </a:solidFill>
+          <a:ln>
+            <a:noFill/>
+          </a:ln>
+          <a:effectLst/>
+        </p:spPr>
+        <p:style>
+          <a:lnRef idx="1">
+            <a:schemeClr val="accent1"/>
+          </a:lnRef>
+          <a:fillRef idx="3">
+            <a:schemeClr val="accent1"/>
+          </a:fillRef>
+          <a:effectRef idx="2">
+            <a:schemeClr val="accent1"/>
+          </a:effectRef>
+          <a:fontRef idx="minor">
+            <a:schemeClr val="lt1"/>
+          </a:fontRef>
+        </p:style>
+        <p:txBody>
+          <a:bodyPr rtlCol="0" anchor="ctr"/>
+          <a:lstStyle/>
+          <a:p>
+            <a:pPr algn="ctr"/>
+          </a:p>
+        </p:txBody>
+      </p:sp>
+      <p:sp>
+        <p:nvSpPr>
+          <p:cNvPr id="15" name="Rounded Rectangle 14"/>
+          <p:cNvSpPr/>
+          <p:nvPr/>
+        </p:nvSpPr>
+        <p:spPr>
+          <a:xfrm>
+            <a:off x="9646920" y="1783080"/>
+            <a:ext cx="1481328" cy="640080"/>
+          </a:xfrm>
+          <a:prstGeom prst="roundRect">
+            <a:avLst/>
+          </a:prstGeom>
+          <a:solidFill>
+            <a:srgbClr val="0F172A"/>
+          </a:solidFill>
+          <a:ln>
+            <a:noFill/>
+          </a:ln>
+          <a:effectLst/>
+        </p:spPr>
+        <p:style>
+          <a:lnRef idx="1">
+            <a:schemeClr val="accent1"/>
+          </a:lnRef>
+          <a:fillRef idx="3">
+            <a:schemeClr val="accent1"/>
+          </a:fillRef>
+          <a:effectRef idx="2">
+            <a:schemeClr val="accent1"/>
+          </a:effectRef>
+          <a:fontRef idx="minor">
+            <a:schemeClr val="lt1"/>
+          </a:fontRef>
+        </p:style>
+        <p:txBody>
+          <a:bodyPr rtlCol="0" anchor="ctr"/>
+          <a:lstStyle/>
+          <a:p>
+            <a:pPr algn="ctr"/>
+            <a:r>
+              <a:rPr sz="1100" b="1">
+                <a:solidFill>
+                  <a:srgbClr val="FFFFFF"/>
+                </a:solidFill>
+                <a:latin typeface="Segoe UI"/>
+              </a:rPr>
+              <a:t>#6 exec-fn</a:t>
+            </a:r>
+          </a:p>
+        </p:txBody>
+      </p:sp>
+      <p:sp>
+        <p:nvSpPr>
+          <p:cNvPr id="16" name="TextBox 15"/>
+          <p:cNvSpPr txBox="1"/>
+          <p:nvPr/>
+        </p:nvSpPr>
+        <p:spPr>
+          <a:xfrm>
+            <a:off x="777240" y="2743200"/>
+            <a:ext cx="10515600" cy="3108960"/>
+          </a:xfrm>
+          <a:prstGeom prst="rect">
+            <a:avLst/>
+          </a:prstGeom>
+          <a:noFill/>
+        </p:spPr>
+        <p:txBody>
+          <a:bodyPr wrap="square" lIns="0" rIns="0" tIns="0" bIns="0">
+            <a:spAutoFit/>
+          </a:bodyPr>
+          <a:lstStyle/>
+          <a:p>
+            <a:pPr>
+              <a:lnSpc>
+                <a:spcPct val="115000"/>
+              </a:lnSpc>
+              <a:spcAft>
+                <a:spcPts val="1000"/>
+              </a:spcAft>
+            </a:pPr>
+            <a:r>
+              <a:rPr sz="1400" b="1">
+                <a:solidFill>
+                  <a:srgbClr val="0F172A"/>
+                </a:solidFill>
+                <a:latin typeface="Segoe UI"/>
+              </a:rPr>
+              <a:t>#5 is a gate, not a task.</a:t>
+            </a:r>
+            <a:r>
+              <a:rPr sz="1400">
+                <a:solidFill>
+                  <a:srgbClr val="475569"/>
+                </a:solidFill>
+                <a:latin typeface="Segoe UI"/>
+              </a:rPr>
+              <a:t>  No third-party code runs until the escape tests pass. CLAUDE.md is explicit that sandboxing is not a later phase — it gates everything.</a:t>
+            </a:r>
+          </a:p>
+          <a:p>
+            <a:pPr>
+              <a:lnSpc>
+                <a:spcPct val="115000"/>
+              </a:lnSpc>
+              <a:spcAft>
+                <a:spcPts val="1000"/>
+              </a:spcAft>
+            </a:pPr>
+            <a:r>
+              <a:rPr sz="1400" b="1">
+                <a:solidFill>
+                  <a:srgbClr val="0F172A"/>
+                </a:solidFill>
+                <a:latin typeface="Segoe UI"/>
+              </a:rPr>
+              <a:t>#1 comes first because two things depend on it.</a:t>
+            </a:r>
+            <a:r>
+              <a:rPr sz="1400">
+                <a:solidFill>
+                  <a:srgbClr val="475569"/>
+                </a:solidFill>
+                <a:latin typeface="Segoe UI"/>
+              </a:rPr>
+              <a:t>  Clustering counts distinct verified callers, and the review gate needs to know who submitted. Retro-fitting identity after the gap log has data means the early data cannot be trusted.</a:t>
+            </a:r>
+          </a:p>
+          <a:p>
+            <a:pPr>
+              <a:lnSpc>
+                <a:spcPct val="115000"/>
+              </a:lnSpc>
+              <a:spcAft>
+                <a:spcPts val="1000"/>
+              </a:spcAft>
+            </a:pPr>
+            <a:r>
+              <a:rPr sz="1400" b="1">
+                <a:solidFill>
+                  <a:srgbClr val="0F172A"/>
+                </a:solidFill>
+                <a:latin typeface="Segoe UI"/>
+              </a:rPr>
+              <a:t>#12 is the cold-start move, and it can start early.</a:t>
+            </a:r>
+            <a:r>
+              <a:rPr sz="1400">
+                <a:solidFill>
+                  <a:srgbClr val="475569"/>
+                </a:solidFill>
+                <a:latin typeface="Segoe UI"/>
+              </a:rPr>
+              <a:t>  PROJECT.md calls the gaps board a standalone product useful before the ecosystem exists. It only needs #9, so it can run in parallel with the sandbox work.</a:t>
+            </a:r>
+          </a:p>
+          <a:p>
+            <a:pPr>
+              <a:lnSpc>
+                <a:spcPct val="115000"/>
+              </a:lnSpc>
+              <a:spcAft>
+                <a:spcPts val="1000"/>
+              </a:spcAft>
+            </a:pPr>
+            <a:r>
+              <a:rPr sz="1400" b="1">
+                <a:solidFill>
+                  <a:srgbClr val="0F172A"/>
+                </a:solidFill>
+                <a:latin typeface="Segoe UI"/>
+              </a:rPr>
+              <a:t>#13 is the exit, as in Phase 0.</a:t>
+            </a:r>
+            <a:r>
+              <a:rPr sz="1400">
+                <a:solidFill>
+                  <a:srgbClr val="475569"/>
+                </a:solidFill>
+                <a:latin typeface="Segoe UI"/>
+              </a:rPr>
+              <a:t>  The gate clears, or a written finding says why not.</a:t>
+            </a:r>
+          </a:p>
+        </p:txBody>
+      </p:sp>
+    </p:spTree>
+  </p:cSld>
+  <p:clrMapOvr>
+    <a:masterClrMapping/>
+  </p:clrMapOvr>
+</p:sld>
+</file>
+
+<file path=ppt/slides/slide11.xml><?xml version="1.0" encoding="utf-8"?>
 <p:sld xmlns:a="http://schemas.openxmlformats.org/drawingml/2006/main" xmlns:p="http://schemas.openxmlformats.org/presentationml/2006/main" xmlns:r="http://schemas.openxmlformats.org/officeDocument/2006/relationships">
   <p:cSld>
     <p:bg>
@@ -4189,7 +5011,7 @@
 </p:sld>
 </file>
 
-<file path=ppt/slides/slide11.xml><?xml version="1.0" encoding="utf-8"?>
+<file path=ppt/slides/slide12.xml><?xml version="1.0" encoding="utf-8"?>
 <p:sld xmlns:a="http://schemas.openxmlformats.org/drawingml/2006/main" xmlns:p="http://schemas.openxmlformats.org/presentationml/2006/main" xmlns:r="http://schemas.openxmlformats.org/officeDocument/2006/relationships">
   <p:cSld>
     <p:bg>
@@ -4500,7 +5322,7 @@
 </p:sld>
 </file>
 
-<file path=ppt/slides/slide12.xml><?xml version="1.0" encoding="utf-8"?>
+<file path=ppt/slides/slide13.xml><?xml version="1.0" encoding="utf-8"?>
 <p:sld xmlns:a="http://schemas.openxmlformats.org/drawingml/2006/main" xmlns:p="http://schemas.openxmlformats.org/presentationml/2006/main" xmlns:r="http://schemas.openxmlformats.org/officeDocument/2006/relationships">
   <p:cSld>
     <p:bg>
@@ -5079,7 +5901,7 @@
 </p:sld>
 </file>
 
-<file path=ppt/slides/slide13.xml><?xml version="1.0" encoding="utf-8"?>
+<file path=ppt/slides/slide14.xml><?xml version="1.0" encoding="utf-8"?>
 <p:sld xmlns:a="http://schemas.openxmlformats.org/drawingml/2006/main" xmlns:p="http://schemas.openxmlformats.org/presentationml/2006/main" xmlns:r="http://schemas.openxmlformats.org/officeDocument/2006/relationships">
   <p:cSld>
     <p:bg>
@@ -5727,6 +6549,462 @@
 </file>
 
 <file path=ppt/slides/slide2.xml><?xml version="1.0" encoding="utf-8"?>
+<p:sld xmlns:a="http://schemas.openxmlformats.org/drawingml/2006/main" xmlns:p="http://schemas.openxmlformats.org/presentationml/2006/main" xmlns:r="http://schemas.openxmlformats.org/officeDocument/2006/relationships">
+  <p:cSld>
+    <p:bg>
+      <p:bgPr>
+        <a:solidFill>
+          <a:srgbClr val="FFFFFF"/>
+        </a:solidFill>
+        <a:effectLst/>
+      </p:bgPr>
+    </p:bg>
+    <p:spTree>
+      <p:nvGrpSpPr>
+        <p:cNvPr id="1" name=""/>
+        <p:cNvGrpSpPr/>
+        <p:nvPr/>
+      </p:nvGrpSpPr>
+      <p:grpSpPr/>
+      <p:sp>
+        <p:nvSpPr>
+          <p:cNvPr id="2" name="TextBox 1"/>
+          <p:cNvSpPr txBox="1"/>
+          <p:nvPr/>
+        </p:nvSpPr>
+        <p:spPr>
+          <a:xfrm>
+            <a:off x="777240" y="502920"/>
+            <a:ext cx="10607040" cy="274320"/>
+          </a:xfrm>
+          <a:prstGeom prst="rect">
+            <a:avLst/>
+          </a:prstGeom>
+          <a:noFill/>
+        </p:spPr>
+        <p:txBody>
+          <a:bodyPr wrap="square" lIns="0" rIns="0" tIns="0" bIns="0">
+            <a:spAutoFit/>
+          </a:bodyPr>
+          <a:lstStyle/>
+          <a:p>
+            <a:pPr algn="l">
+              <a:lnSpc>
+                <a:spcPct val="100000"/>
+              </a:lnSpc>
+            </a:pPr>
+            <a:r>
+              <a:rPr sz="1100" b="1">
+                <a:solidFill>
+                  <a:srgbClr val="94A3B8"/>
+                </a:solidFill>
+                <a:latin typeface="Segoe UI"/>
+              </a:rPr>
+              <a:t>ABOUT THIS PHASE</a:t>
+            </a:r>
+          </a:p>
+        </p:txBody>
+      </p:sp>
+      <p:sp>
+        <p:nvSpPr>
+          <p:cNvPr id="3" name="TextBox 2"/>
+          <p:cNvSpPr txBox="1"/>
+          <p:nvPr/>
+        </p:nvSpPr>
+        <p:spPr>
+          <a:xfrm>
+            <a:off x="777240" y="841248"/>
+            <a:ext cx="10607040" cy="640080"/>
+          </a:xfrm>
+          <a:prstGeom prst="rect">
+            <a:avLst/>
+          </a:prstGeom>
+          <a:noFill/>
+        </p:spPr>
+        <p:txBody>
+          <a:bodyPr wrap="square" lIns="0" rIns="0" tIns="0" bIns="0">
+            <a:spAutoFit/>
+          </a:bodyPr>
+          <a:lstStyle/>
+          <a:p>
+            <a:pPr algn="l">
+              <a:lnSpc>
+                <a:spcPct val="100000"/>
+              </a:lnSpc>
+            </a:pPr>
+            <a:r>
+              <a:rPr sz="3100" b="1">
+                <a:solidFill>
+                  <a:srgbClr val="0F172A"/>
+                </a:solidFill>
+                <a:latin typeface="Segoe UI"/>
+              </a:rPr>
+              <a:t>What Phase 1 is for</a:t>
+            </a:r>
+          </a:p>
+        </p:txBody>
+      </p:sp>
+      <p:sp>
+        <p:nvSpPr>
+          <p:cNvPr id="4" name="Rectangle 3"/>
+          <p:cNvSpPr/>
+          <p:nvPr/>
+        </p:nvSpPr>
+        <p:spPr>
+          <a:xfrm>
+            <a:off x="777240" y="1572768"/>
+            <a:ext cx="1005840" cy="41148"/>
+          </a:xfrm>
+          <a:prstGeom prst="rect">
+            <a:avLst/>
+          </a:prstGeom>
+          <a:solidFill>
+            <a:srgbClr val="ED7100"/>
+          </a:solidFill>
+          <a:ln>
+            <a:noFill/>
+          </a:ln>
+          <a:effectLst/>
+        </p:spPr>
+        <p:style>
+          <a:lnRef idx="1">
+            <a:schemeClr val="accent1"/>
+          </a:lnRef>
+          <a:fillRef idx="3">
+            <a:schemeClr val="accent1"/>
+          </a:fillRef>
+          <a:effectRef idx="2">
+            <a:schemeClr val="accent1"/>
+          </a:effectRef>
+          <a:fontRef idx="minor">
+            <a:schemeClr val="lt1"/>
+          </a:fontRef>
+        </p:style>
+        <p:txBody>
+          <a:bodyPr rtlCol="0" anchor="ctr"/>
+          <a:lstStyle/>
+          <a:p>
+            <a:pPr algn="ctr"/>
+          </a:p>
+        </p:txBody>
+      </p:sp>
+      <p:sp>
+        <p:nvSpPr>
+          <p:cNvPr id="5" name="TextBox 4"/>
+          <p:cNvSpPr txBox="1"/>
+          <p:nvPr/>
+        </p:nvSpPr>
+        <p:spPr>
+          <a:xfrm>
+            <a:off x="777240" y="1783080"/>
+            <a:ext cx="10424160" cy="457200"/>
+          </a:xfrm>
+          <a:prstGeom prst="rect">
+            <a:avLst/>
+          </a:prstGeom>
+          <a:noFill/>
+        </p:spPr>
+        <p:txBody>
+          <a:bodyPr wrap="square" lIns="0" rIns="0" tIns="0" bIns="0">
+            <a:spAutoFit/>
+          </a:bodyPr>
+          <a:lstStyle/>
+          <a:p>
+            <a:pPr algn="l">
+              <a:lnSpc>
+                <a:spcPct val="100000"/>
+              </a:lnSpc>
+            </a:pPr>
+            <a:r>
+              <a:rPr sz="1500" b="0">
+                <a:solidFill>
+                  <a:srgbClr val="475569"/>
+                </a:solidFill>
+                <a:latin typeface="Segoe UI"/>
+              </a:rPr>
+              <a:t>Read this first if you have not read PROJECT.md.</a:t>
+            </a:r>
+          </a:p>
+        </p:txBody>
+      </p:sp>
+      <p:sp>
+        <p:nvSpPr>
+          <p:cNvPr id="6" name="TextBox 5"/>
+          <p:cNvSpPr txBox="1"/>
+          <p:nvPr/>
+        </p:nvSpPr>
+        <p:spPr>
+          <a:xfrm>
+            <a:off x="777240" y="2350008"/>
+            <a:ext cx="10515600" cy="1371600"/>
+          </a:xfrm>
+          <a:prstGeom prst="rect">
+            <a:avLst/>
+          </a:prstGeom>
+          <a:noFill/>
+        </p:spPr>
+        <p:txBody>
+          <a:bodyPr wrap="square" lIns="0" rIns="0" tIns="0" bIns="0">
+            <a:spAutoFit/>
+          </a:bodyPr>
+          <a:lstStyle/>
+          <a:p>
+            <a:pPr>
+              <a:lnSpc>
+                <a:spcPct val="115000"/>
+              </a:lnSpc>
+              <a:spcAft>
+                <a:spcPts val="800"/>
+              </a:spcAft>
+            </a:pPr>
+            <a:r>
+              <a:rPr sz="1400" b="1">
+                <a:solidFill>
+                  <a:srgbClr val="0F172A"/>
+                </a:solidFill>
+                <a:latin typeface="Segoe UI"/>
+              </a:rPr>
+              <a:t>Endless, in one sentence.</a:t>
+            </a:r>
+            <a:r>
+              <a:rPr sz="1400">
+                <a:solidFill>
+                  <a:srgbClr val="475569"/>
+                </a:solidFill>
+                <a:latin typeface="Segoe UI"/>
+              </a:rPr>
+              <a:t>  A shared registry of small tools that AI agents search through — and every search that finds nothing is recorded, so the list of missing tools comes from real use rather than guesswork.</a:t>
+            </a:r>
+          </a:p>
+          <a:p>
+            <a:pPr>
+              <a:lnSpc>
+                <a:spcPct val="115000"/>
+              </a:lnSpc>
+              <a:spcAft>
+                <a:spcPts val="800"/>
+              </a:spcAft>
+            </a:pPr>
+            <a:r>
+              <a:rPr sz="1400" b="1">
+                <a:solidFill>
+                  <a:srgbClr val="0F172A"/>
+                </a:solidFill>
+                <a:latin typeface="Segoe UI"/>
+              </a:rPr>
+              <a:t>Phase 0 built the searching and the recording.</a:t>
+            </a:r>
+            <a:r>
+              <a:rPr sz="1400">
+                <a:solidFill>
+                  <a:srgbClr val="475569"/>
+                </a:solidFill>
+                <a:latin typeface="Segoe UI"/>
+              </a:rPr>
+              <a:t>  It finds the right tool, and it knows when none fits. But nothing has ever been run, nobody outside this project has used it, and no gap on the list came from a real need.</a:t>
+            </a:r>
+          </a:p>
+        </p:txBody>
+      </p:sp>
+      <p:sp>
+        <p:nvSpPr>
+          <p:cNvPr id="7" name="Rounded Rectangle 6"/>
+          <p:cNvSpPr/>
+          <p:nvPr/>
+        </p:nvSpPr>
+        <p:spPr>
+          <a:xfrm>
+            <a:off x="777240" y="3794760"/>
+            <a:ext cx="10515600" cy="868680"/>
+          </a:xfrm>
+          <a:prstGeom prst="roundRect">
+            <a:avLst/>
+          </a:prstGeom>
+          <a:solidFill>
+            <a:srgbClr val="FFF7ED"/>
+          </a:solidFill>
+          <a:ln w="15875">
+            <a:solidFill>
+              <a:srgbClr val="ED7100"/>
+            </a:solidFill>
+          </a:ln>
+          <a:effectLst/>
+        </p:spPr>
+        <p:style>
+          <a:lnRef idx="1">
+            <a:schemeClr val="accent1"/>
+          </a:lnRef>
+          <a:fillRef idx="3">
+            <a:schemeClr val="accent1"/>
+          </a:fillRef>
+          <a:effectRef idx="2">
+            <a:schemeClr val="accent1"/>
+          </a:effectRef>
+          <a:fontRef idx="minor">
+            <a:schemeClr val="lt1"/>
+          </a:fontRef>
+        </p:style>
+        <p:txBody>
+          <a:bodyPr rtlCol="0" anchor="ctr"/>
+          <a:lstStyle/>
+          <a:p/>
+        </p:txBody>
+      </p:sp>
+      <p:sp>
+        <p:nvSpPr>
+          <p:cNvPr id="8" name="TextBox 7"/>
+          <p:cNvSpPr txBox="1"/>
+          <p:nvPr/>
+        </p:nvSpPr>
+        <p:spPr>
+          <a:xfrm>
+            <a:off x="1051560" y="3977640"/>
+            <a:ext cx="9966960" cy="594359"/>
+          </a:xfrm>
+          <a:prstGeom prst="rect">
+            <a:avLst/>
+          </a:prstGeom>
+          <a:noFill/>
+        </p:spPr>
+        <p:txBody>
+          <a:bodyPr wrap="square" lIns="0" rIns="0" tIns="0" bIns="0">
+            <a:spAutoFit/>
+          </a:bodyPr>
+          <a:lstStyle/>
+          <a:p>
+            <a:pPr algn="l">
+              <a:lnSpc>
+                <a:spcPct val="115000"/>
+              </a:lnSpc>
+            </a:pPr>
+            <a:r>
+              <a:rPr sz="1600" b="1">
+                <a:solidFill>
+                  <a:srgbClr val="7C2D12"/>
+                </a:solidFill>
+                <a:latin typeface="Segoe UI"/>
+              </a:rPr>
+              <a:t>Phase 1 is where Endless stops being a catalogue that DESCRIBES tools and becomes a platform that RUNS them.</a:t>
+            </a:r>
+          </a:p>
+        </p:txBody>
+      </p:sp>
+      <p:sp>
+        <p:nvSpPr>
+          <p:cNvPr id="9" name="TextBox 8"/>
+          <p:cNvSpPr txBox="1"/>
+          <p:nvPr/>
+        </p:nvSpPr>
+        <p:spPr>
+          <a:xfrm>
+            <a:off x="777240" y="4864608"/>
+            <a:ext cx="10515600" cy="1783080"/>
+          </a:xfrm>
+          <a:prstGeom prst="rect">
+            <a:avLst/>
+          </a:prstGeom>
+          <a:noFill/>
+        </p:spPr>
+        <p:txBody>
+          <a:bodyPr wrap="square" lIns="0" rIns="0" tIns="0" bIns="0">
+            <a:spAutoFit/>
+          </a:bodyPr>
+          <a:lstStyle/>
+          <a:p>
+            <a:pPr>
+              <a:lnSpc>
+                <a:spcPct val="115000"/>
+              </a:lnSpc>
+              <a:spcAft>
+                <a:spcPts val="700"/>
+              </a:spcAft>
+            </a:pPr>
+            <a:r>
+              <a:rPr sz="1300" b="1">
+                <a:solidFill>
+                  <a:srgbClr val="0F172A"/>
+                </a:solidFill>
+                <a:latin typeface="Segoe UI"/>
+              </a:rPr>
+              <a:t>Three things become real.</a:t>
+            </a:r>
+            <a:r>
+              <a:rPr sz="1300">
+                <a:solidFill>
+                  <a:srgbClr val="475569"/>
+                </a:solidFill>
+                <a:latin typeface="Segoe UI"/>
+              </a:rPr>
+              <a:t>  An agent can call a tool and get a result. Someone who is not you can publish one. The gaps list becomes a public page.</a:t>
+            </a:r>
+          </a:p>
+          <a:p>
+            <a:pPr>
+              <a:lnSpc>
+                <a:spcPct val="115000"/>
+              </a:lnSpc>
+              <a:spcAft>
+                <a:spcPts val="700"/>
+              </a:spcAft>
+            </a:pPr>
+            <a:r>
+              <a:rPr sz="1300" b="1">
+                <a:solidFill>
+                  <a:srgbClr val="0F172A"/>
+                </a:solidFill>
+                <a:latin typeface="Segoe UI"/>
+              </a:rPr>
+              <a:t>Which makes it the riskiest phase so far.</a:t>
+            </a:r>
+            <a:r>
+              <a:rPr sz="1300">
+                <a:solidFill>
+                  <a:srgbClr val="475569"/>
+                </a:solidFill>
+                <a:latin typeface="Segoe UI"/>
+              </a:rPr>
+              <a:t>  Each opens a door that was closed: running code you did not write, trusting submissions from strangers, and publishing something people have a reason to manipulate.</a:t>
+            </a:r>
+          </a:p>
+          <a:p>
+            <a:pPr>
+              <a:lnSpc>
+                <a:spcPct val="115000"/>
+              </a:lnSpc>
+              <a:spcAft>
+                <a:spcPts val="700"/>
+              </a:spcAft>
+            </a:pPr>
+            <a:r>
+              <a:rPr sz="1300" b="1">
+                <a:solidFill>
+                  <a:srgbClr val="0F172A"/>
+                </a:solidFill>
+                <a:latin typeface="Segoe UI"/>
+              </a:rPr>
+              <a:t>So most of Phase 1 is containment, not features.</a:t>
+            </a:r>
+            <a:r>
+              <a:rPr sz="1300">
+                <a:solidFill>
+                  <a:srgbClr val="475569"/>
+                </a:solidFill>
+                <a:latin typeface="Segoe UI"/>
+              </a:rPr>
+              <a:t>  The sandbox, verified identity and the review gate are all there because of those three doors.</a:t>
+            </a:r>
+          </a:p>
+        </p:txBody>
+      </p:sp>
+    </p:spTree>
+  </p:cSld>
+  <p:clrMapOvr>
+    <a:masterClrMapping/>
+  </p:clrMapOvr>
+</p:sld>
+</file>
+
+<file path=ppt/slides/slide3.xml><?xml version="1.0" encoding="utf-8"?>
 <p:sld xmlns:a="http://schemas.openxmlformats.org/drawingml/2006/main" xmlns:p="http://schemas.openxmlformats.org/presentationml/2006/main" xmlns:r="http://schemas.openxmlformats.org/officeDocument/2006/relationships">
   <p:cSld>
     <p:bg>
@@ -6340,7 +7618,7 @@
 </p:sld>
 </file>
 
-<file path=ppt/slides/slide3.xml><?xml version="1.0" encoding="utf-8"?>
+<file path=ppt/slides/slide4.xml><?xml version="1.0" encoding="utf-8"?>
 <p:sld xmlns:a="http://schemas.openxmlformats.org/drawingml/2006/main" xmlns:p="http://schemas.openxmlformats.org/presentationml/2006/main" xmlns:r="http://schemas.openxmlformats.org/officeDocument/2006/relationships">
   <p:cSld>
     <p:bg>
@@ -6965,2671 +8243,6 @@
 </p:sld>
 </file>
 
-<file path=ppt/slides/slide4.xml><?xml version="1.0" encoding="utf-8"?>
-<p:sld xmlns:a="http://schemas.openxmlformats.org/drawingml/2006/main" xmlns:p="http://schemas.openxmlformats.org/presentationml/2006/main" xmlns:r="http://schemas.openxmlformats.org/officeDocument/2006/relationships">
-  <p:cSld>
-    <p:bg>
-      <p:bgPr>
-        <a:solidFill>
-          <a:srgbClr val="FFFFFF"/>
-        </a:solidFill>
-        <a:effectLst/>
-      </p:bgPr>
-    </p:bg>
-    <p:spTree>
-      <p:nvGrpSpPr>
-        <p:cNvPr id="1" name=""/>
-        <p:cNvGrpSpPr/>
-        <p:nvPr/>
-      </p:nvGrpSpPr>
-      <p:grpSpPr/>
-      <p:sp>
-        <p:nvSpPr>
-          <p:cNvPr id="2" name="TextBox 1"/>
-          <p:cNvSpPr txBox="1"/>
-          <p:nvPr/>
-        </p:nvSpPr>
-        <p:spPr>
-          <a:xfrm>
-            <a:off x="777240" y="502920"/>
-            <a:ext cx="10607040" cy="274320"/>
-          </a:xfrm>
-          <a:prstGeom prst="rect">
-            <a:avLst/>
-          </a:prstGeom>
-          <a:noFill/>
-        </p:spPr>
-        <p:txBody>
-          <a:bodyPr wrap="square" lIns="0" rIns="0" tIns="0" bIns="0">
-            <a:spAutoFit/>
-          </a:bodyPr>
-          <a:lstStyle/>
-          <a:p>
-            <a:pPr algn="l">
-              <a:lnSpc>
-                <a:spcPct val="100000"/>
-              </a:lnSpc>
-            </a:pPr>
-            <a:r>
-              <a:rPr sz="1100" b="1">
-                <a:solidFill>
-                  <a:srgbClr val="94A3B8"/>
-                </a:solidFill>
-                <a:latin typeface="Segoe UI"/>
-              </a:rPr>
-              <a:t>ARCHITECTURE</a:t>
-            </a:r>
-          </a:p>
-        </p:txBody>
-      </p:sp>
-      <p:sp>
-        <p:nvSpPr>
-          <p:cNvPr id="3" name="TextBox 2"/>
-          <p:cNvSpPr txBox="1"/>
-          <p:nvPr/>
-        </p:nvSpPr>
-        <p:spPr>
-          <a:xfrm>
-            <a:off x="777240" y="841248"/>
-            <a:ext cx="10607040" cy="640080"/>
-          </a:xfrm>
-          <a:prstGeom prst="rect">
-            <a:avLst/>
-          </a:prstGeom>
-          <a:noFill/>
-        </p:spPr>
-        <p:txBody>
-          <a:bodyPr wrap="square" lIns="0" rIns="0" tIns="0" bIns="0">
-            <a:spAutoFit/>
-          </a:bodyPr>
-          <a:lstStyle/>
-          <a:p>
-            <a:pPr algn="l">
-              <a:lnSpc>
-                <a:spcPct val="100000"/>
-              </a:lnSpc>
-            </a:pPr>
-            <a:r>
-              <a:rPr sz="3100" b="1">
-                <a:solidFill>
-                  <a:srgbClr val="0F172A"/>
-                </a:solidFill>
-                <a:latin typeface="Segoe UI"/>
-              </a:rPr>
-              <a:t>What runs in Phase 1</a:t>
-            </a:r>
-          </a:p>
-        </p:txBody>
-      </p:sp>
-      <p:sp>
-        <p:nvSpPr>
-          <p:cNvPr id="4" name="Rectangle 3"/>
-          <p:cNvSpPr/>
-          <p:nvPr/>
-        </p:nvSpPr>
-        <p:spPr>
-          <a:xfrm>
-            <a:off x="777240" y="1572768"/>
-            <a:ext cx="1005840" cy="41148"/>
-          </a:xfrm>
-          <a:prstGeom prst="rect">
-            <a:avLst/>
-          </a:prstGeom>
-          <a:solidFill>
-            <a:srgbClr val="ED7100"/>
-          </a:solidFill>
-          <a:ln>
-            <a:noFill/>
-          </a:ln>
-          <a:effectLst/>
-        </p:spPr>
-        <p:style>
-          <a:lnRef idx="1">
-            <a:schemeClr val="accent1"/>
-          </a:lnRef>
-          <a:fillRef idx="3">
-            <a:schemeClr val="accent1"/>
-          </a:fillRef>
-          <a:effectRef idx="2">
-            <a:schemeClr val="accent1"/>
-          </a:effectRef>
-          <a:fontRef idx="minor">
-            <a:schemeClr val="lt1"/>
-          </a:fontRef>
-        </p:style>
-        <p:txBody>
-          <a:bodyPr rtlCol="0" anchor="ctr"/>
-          <a:lstStyle/>
-          <a:p>
-            <a:pPr algn="ctr"/>
-          </a:p>
-        </p:txBody>
-      </p:sp>
-      <p:sp>
-        <p:nvSpPr>
-          <p:cNvPr id="5" name="TextBox 4"/>
-          <p:cNvSpPr txBox="1"/>
-          <p:nvPr/>
-        </p:nvSpPr>
-        <p:spPr>
-          <a:xfrm>
-            <a:off x="777240" y="1783080"/>
-            <a:ext cx="10424160" cy="457200"/>
-          </a:xfrm>
-          <a:prstGeom prst="rect">
-            <a:avLst/>
-          </a:prstGeom>
-          <a:noFill/>
-        </p:spPr>
-        <p:txBody>
-          <a:bodyPr wrap="square" lIns="0" rIns="0" tIns="0" bIns="0">
-            <a:spAutoFit/>
-          </a:bodyPr>
-          <a:lstStyle/>
-          <a:p>
-            <a:pPr algn="l">
-              <a:lnSpc>
-                <a:spcPct val="100000"/>
-              </a:lnSpc>
-            </a:pPr>
-            <a:r>
-              <a:rPr sz="1500" b="0">
-                <a:solidFill>
-                  <a:srgbClr val="475569"/>
-                </a:solidFill>
-                <a:latin typeface="Segoe UI"/>
-              </a:rPr>
-              <a:t>Green is new. The full diagram is on the Miro board beneath Phase 0.</a:t>
-            </a:r>
-          </a:p>
-        </p:txBody>
-      </p:sp>
-      <p:sp>
-        <p:nvSpPr>
-          <p:cNvPr id="6" name="TextBox 5"/>
-          <p:cNvSpPr txBox="1"/>
-          <p:nvPr/>
-        </p:nvSpPr>
-        <p:spPr>
-          <a:xfrm>
-            <a:off x="822960" y="2258568"/>
-            <a:ext cx="2743200" cy="228600"/>
-          </a:xfrm>
-          <a:prstGeom prst="rect">
-            <a:avLst/>
-          </a:prstGeom>
-          <a:noFill/>
-        </p:spPr>
-        <p:txBody>
-          <a:bodyPr wrap="square" lIns="0" rIns="0" tIns="0" bIns="0">
-            <a:spAutoFit/>
-          </a:bodyPr>
-          <a:lstStyle/>
-          <a:p>
-            <a:pPr algn="l">
-              <a:lnSpc>
-                <a:spcPct val="100000"/>
-              </a:lnSpc>
-            </a:pPr>
-            <a:r>
-              <a:rPr sz="950" b="1">
-                <a:solidFill>
-                  <a:srgbClr val="94A3B8"/>
-                </a:solidFill>
-                <a:latin typeface="Segoe UI"/>
-              </a:rPr>
-              <a:t>CALLERS</a:t>
-            </a:r>
-          </a:p>
-        </p:txBody>
-      </p:sp>
-      <p:sp>
-        <p:nvSpPr>
-          <p:cNvPr id="7" name="Rounded Rectangle 6"/>
-          <p:cNvSpPr/>
-          <p:nvPr/>
-        </p:nvSpPr>
-        <p:spPr>
-          <a:xfrm>
-            <a:off x="777240" y="2505456"/>
-            <a:ext cx="2286000" cy="749808"/>
-          </a:xfrm>
-          <a:prstGeom prst="roundRect">
-            <a:avLst/>
-          </a:prstGeom>
-          <a:solidFill>
-            <a:srgbClr val="FFFFFF"/>
-          </a:solidFill>
-          <a:ln w="15875">
-            <a:solidFill>
-              <a:srgbClr val="64748B"/>
-            </a:solidFill>
-          </a:ln>
-          <a:effectLst/>
-        </p:spPr>
-        <p:style>
-          <a:lnRef idx="1">
-            <a:schemeClr val="accent1"/>
-          </a:lnRef>
-          <a:fillRef idx="3">
-            <a:schemeClr val="accent1"/>
-          </a:fillRef>
-          <a:effectRef idx="2">
-            <a:schemeClr val="accent1"/>
-          </a:effectRef>
-          <a:fontRef idx="minor">
-            <a:schemeClr val="lt1"/>
-          </a:fontRef>
-        </p:style>
-        <p:txBody>
-          <a:bodyPr rtlCol="0" anchor="ctr"/>
-          <a:lstStyle/>
-          <a:p/>
-        </p:txBody>
-      </p:sp>
-      <p:pic>
-        <p:nvPicPr>
-          <p:cNvPr id="8" name="Picture 7" descr="client.png"/>
-          <p:cNvPicPr>
-            <a:picLocks noChangeAspect="1"/>
-          </p:cNvPicPr>
-          <p:nvPr/>
-        </p:nvPicPr>
-        <p:blipFill>
-          <a:blip r:embed="rId2"/>
-          <a:stretch>
-            <a:fillRect/>
-          </a:stretch>
-        </p:blipFill>
-        <p:spPr>
-          <a:xfrm>
-            <a:off x="886968" y="2624327"/>
-            <a:ext cx="384048" cy="384048"/>
-          </a:xfrm>
-          <a:prstGeom prst="rect">
-            <a:avLst/>
-          </a:prstGeom>
-        </p:spPr>
-      </p:pic>
-      <p:sp>
-        <p:nvSpPr>
-          <p:cNvPr id="9" name="TextBox 8"/>
-          <p:cNvSpPr txBox="1"/>
-          <p:nvPr/>
-        </p:nvSpPr>
-        <p:spPr>
-          <a:xfrm>
-            <a:off x="1399032" y="2624327"/>
-            <a:ext cx="1554480" cy="237744"/>
-          </a:xfrm>
-          <a:prstGeom prst="rect">
-            <a:avLst/>
-          </a:prstGeom>
-          <a:noFill/>
-        </p:spPr>
-        <p:txBody>
-          <a:bodyPr wrap="square" lIns="0" rIns="0" tIns="0" bIns="0">
-            <a:spAutoFit/>
-          </a:bodyPr>
-          <a:lstStyle/>
-          <a:p>
-            <a:pPr algn="l">
-              <a:lnSpc>
-                <a:spcPct val="100000"/>
-              </a:lnSpc>
-            </a:pPr>
-            <a:r>
-              <a:rPr sz="1200" b="1">
-                <a:solidFill>
-                  <a:srgbClr val="0F172A"/>
-                </a:solidFill>
-                <a:latin typeface="Segoe UI"/>
-              </a:rPr>
-              <a:t>Agent</a:t>
-            </a:r>
-          </a:p>
-        </p:txBody>
-      </p:sp>
-      <p:sp>
-        <p:nvSpPr>
-          <p:cNvPr id="10" name="TextBox 9"/>
-          <p:cNvSpPr txBox="1"/>
-          <p:nvPr/>
-        </p:nvSpPr>
-        <p:spPr>
-          <a:xfrm>
-            <a:off x="1399032" y="2871215"/>
-            <a:ext cx="1554480" cy="457200"/>
-          </a:xfrm>
-          <a:prstGeom prst="rect">
-            <a:avLst/>
-          </a:prstGeom>
-          <a:noFill/>
-        </p:spPr>
-        <p:txBody>
-          <a:bodyPr wrap="square" lIns="0" rIns="0" tIns="0" bIns="0">
-            <a:spAutoFit/>
-          </a:bodyPr>
-          <a:lstStyle/>
-          <a:p>
-            <a:pPr algn="l">
-              <a:lnSpc>
-                <a:spcPct val="105000"/>
-              </a:lnSpc>
-            </a:pPr>
-            <a:r>
-              <a:rPr sz="950" b="0">
-                <a:solidFill>
-                  <a:srgbClr val="475569"/>
-                </a:solidFill>
-                <a:latin typeface="Segoe UI"/>
-              </a:rPr>
-              <a:t>calls tools</a:t>
-            </a:r>
-          </a:p>
-        </p:txBody>
-      </p:sp>
-      <p:sp>
-        <p:nvSpPr>
-          <p:cNvPr id="11" name="Rounded Rectangle 10"/>
-          <p:cNvSpPr/>
-          <p:nvPr/>
-        </p:nvSpPr>
-        <p:spPr>
-          <a:xfrm>
-            <a:off x="777240" y="3346703"/>
-            <a:ext cx="2286000" cy="749808"/>
-          </a:xfrm>
-          <a:prstGeom prst="roundRect">
-            <a:avLst/>
-          </a:prstGeom>
-          <a:solidFill>
-            <a:srgbClr val="FFFFFF"/>
-          </a:solidFill>
-          <a:ln w="15875">
-            <a:solidFill>
-              <a:srgbClr val="64748B"/>
-            </a:solidFill>
-          </a:ln>
-          <a:effectLst/>
-        </p:spPr>
-        <p:style>
-          <a:lnRef idx="1">
-            <a:schemeClr val="accent1"/>
-          </a:lnRef>
-          <a:fillRef idx="3">
-            <a:schemeClr val="accent1"/>
-          </a:fillRef>
-          <a:effectRef idx="2">
-            <a:schemeClr val="accent1"/>
-          </a:effectRef>
-          <a:fontRef idx="minor">
-            <a:schemeClr val="lt1"/>
-          </a:fontRef>
-        </p:style>
-        <p:txBody>
-          <a:bodyPr rtlCol="0" anchor="ctr"/>
-          <a:lstStyle/>
-          <a:p/>
-        </p:txBody>
-      </p:sp>
-      <p:pic>
-        <p:nvPicPr>
-          <p:cNvPr id="12" name="Picture 11" descr="users.png"/>
-          <p:cNvPicPr>
-            <a:picLocks noChangeAspect="1"/>
-          </p:cNvPicPr>
-          <p:nvPr/>
-        </p:nvPicPr>
-        <p:blipFill>
-          <a:blip r:embed="rId3"/>
-          <a:stretch>
-            <a:fillRect/>
-          </a:stretch>
-        </p:blipFill>
-        <p:spPr>
-          <a:xfrm>
-            <a:off x="886968" y="3465575"/>
-            <a:ext cx="384048" cy="384048"/>
-          </a:xfrm>
-          <a:prstGeom prst="rect">
-            <a:avLst/>
-          </a:prstGeom>
-        </p:spPr>
-      </p:pic>
-      <p:sp>
-        <p:nvSpPr>
-          <p:cNvPr id="13" name="TextBox 12"/>
-          <p:cNvSpPr txBox="1"/>
-          <p:nvPr/>
-        </p:nvSpPr>
-        <p:spPr>
-          <a:xfrm>
-            <a:off x="1399032" y="3465575"/>
-            <a:ext cx="1554480" cy="237744"/>
-          </a:xfrm>
-          <a:prstGeom prst="rect">
-            <a:avLst/>
-          </a:prstGeom>
-          <a:noFill/>
-        </p:spPr>
-        <p:txBody>
-          <a:bodyPr wrap="square" lIns="0" rIns="0" tIns="0" bIns="0">
-            <a:spAutoFit/>
-          </a:bodyPr>
-          <a:lstStyle/>
-          <a:p>
-            <a:pPr algn="l">
-              <a:lnSpc>
-                <a:spcPct val="100000"/>
-              </a:lnSpc>
-            </a:pPr>
-            <a:r>
-              <a:rPr sz="1200" b="1">
-                <a:solidFill>
-                  <a:srgbClr val="0F172A"/>
-                </a:solidFill>
-                <a:latin typeface="Segoe UI"/>
-              </a:rPr>
-              <a:t>Creator</a:t>
-            </a:r>
-          </a:p>
-        </p:txBody>
-      </p:sp>
-      <p:sp>
-        <p:nvSpPr>
-          <p:cNvPr id="14" name="TextBox 13"/>
-          <p:cNvSpPr txBox="1"/>
-          <p:nvPr/>
-        </p:nvSpPr>
-        <p:spPr>
-          <a:xfrm>
-            <a:off x="1399032" y="3712463"/>
-            <a:ext cx="1554480" cy="457200"/>
-          </a:xfrm>
-          <a:prstGeom prst="rect">
-            <a:avLst/>
-          </a:prstGeom>
-          <a:noFill/>
-        </p:spPr>
-        <p:txBody>
-          <a:bodyPr wrap="square" lIns="0" rIns="0" tIns="0" bIns="0">
-            <a:spAutoFit/>
-          </a:bodyPr>
-          <a:lstStyle/>
-          <a:p>
-            <a:pPr algn="l">
-              <a:lnSpc>
-                <a:spcPct val="105000"/>
-              </a:lnSpc>
-            </a:pPr>
-            <a:r>
-              <a:rPr sz="950" b="0">
-                <a:solidFill>
-                  <a:srgbClr val="475569"/>
-                </a:solidFill>
-                <a:latin typeface="Segoe UI"/>
-              </a:rPr>
-              <a:t>publishes tools</a:t>
-            </a:r>
-          </a:p>
-        </p:txBody>
-      </p:sp>
-      <p:sp>
-        <p:nvSpPr>
-          <p:cNvPr id="15" name="TextBox 14"/>
-          <p:cNvSpPr txBox="1"/>
-          <p:nvPr/>
-        </p:nvSpPr>
-        <p:spPr>
-          <a:xfrm>
-            <a:off x="3291840" y="2258568"/>
-            <a:ext cx="2743200" cy="228600"/>
-          </a:xfrm>
-          <a:prstGeom prst="rect">
-            <a:avLst/>
-          </a:prstGeom>
-          <a:noFill/>
-        </p:spPr>
-        <p:txBody>
-          <a:bodyPr wrap="square" lIns="0" rIns="0" tIns="0" bIns="0">
-            <a:spAutoFit/>
-          </a:bodyPr>
-          <a:lstStyle/>
-          <a:p>
-            <a:pPr algn="l">
-              <a:lnSpc>
-                <a:spcPct val="100000"/>
-              </a:lnSpc>
-            </a:pPr>
-            <a:r>
-              <a:rPr sz="950" b="1">
-                <a:solidFill>
-                  <a:srgbClr val="16A34A"/>
-                </a:solidFill>
-                <a:latin typeface="Segoe UI"/>
-              </a:rPr>
-              <a:t>EDGE</a:t>
-            </a:r>
-          </a:p>
-        </p:txBody>
-      </p:sp>
-      <p:sp>
-        <p:nvSpPr>
-          <p:cNvPr id="16" name="Rounded Rectangle 15"/>
-          <p:cNvSpPr/>
-          <p:nvPr/>
-        </p:nvSpPr>
-        <p:spPr>
-          <a:xfrm>
-            <a:off x="3246120" y="2926079"/>
-            <a:ext cx="2468880" cy="749808"/>
-          </a:xfrm>
-          <a:prstGeom prst="roundRect">
-            <a:avLst/>
-          </a:prstGeom>
-          <a:solidFill>
-            <a:srgbClr val="FFFFFF"/>
-          </a:solidFill>
-          <a:ln w="25400">
-            <a:solidFill>
-              <a:srgbClr val="16A34A"/>
-            </a:solidFill>
-          </a:ln>
-          <a:effectLst/>
-        </p:spPr>
-        <p:style>
-          <a:lnRef idx="1">
-            <a:schemeClr val="accent1"/>
-          </a:lnRef>
-          <a:fillRef idx="3">
-            <a:schemeClr val="accent1"/>
-          </a:fillRef>
-          <a:effectRef idx="2">
-            <a:schemeClr val="accent1"/>
-          </a:effectRef>
-          <a:fontRef idx="minor">
-            <a:schemeClr val="lt1"/>
-          </a:fontRef>
-        </p:style>
-        <p:txBody>
-          <a:bodyPr rtlCol="0" anchor="ctr"/>
-          <a:lstStyle/>
-          <a:p/>
-        </p:txBody>
-      </p:sp>
-      <p:pic>
-        <p:nvPicPr>
-          <p:cNvPr id="17" name="Picture 16" descr="iam.png"/>
-          <p:cNvPicPr>
-            <a:picLocks noChangeAspect="1"/>
-          </p:cNvPicPr>
-          <p:nvPr/>
-        </p:nvPicPr>
-        <p:blipFill>
-          <a:blip r:embed="rId4"/>
-          <a:stretch>
-            <a:fillRect/>
-          </a:stretch>
-        </p:blipFill>
-        <p:spPr>
-          <a:xfrm>
-            <a:off x="3355848" y="3044951"/>
-            <a:ext cx="384048" cy="384048"/>
-          </a:xfrm>
-          <a:prstGeom prst="rect">
-            <a:avLst/>
-          </a:prstGeom>
-        </p:spPr>
-      </p:pic>
-      <p:sp>
-        <p:nvSpPr>
-          <p:cNvPr id="18" name="TextBox 17"/>
-          <p:cNvSpPr txBox="1"/>
-          <p:nvPr/>
-        </p:nvSpPr>
-        <p:spPr>
-          <a:xfrm>
-            <a:off x="3867911" y="3044951"/>
-            <a:ext cx="1737360" cy="237744"/>
-          </a:xfrm>
-          <a:prstGeom prst="rect">
-            <a:avLst/>
-          </a:prstGeom>
-          <a:noFill/>
-        </p:spPr>
-        <p:txBody>
-          <a:bodyPr wrap="square" lIns="0" rIns="0" tIns="0" bIns="0">
-            <a:spAutoFit/>
-          </a:bodyPr>
-          <a:lstStyle/>
-          <a:p>
-            <a:pPr algn="l">
-              <a:lnSpc>
-                <a:spcPct val="100000"/>
-              </a:lnSpc>
-            </a:pPr>
-            <a:r>
-              <a:rPr sz="1200" b="1">
-                <a:solidFill>
-                  <a:srgbClr val="0F172A"/>
-                </a:solidFill>
-                <a:latin typeface="Segoe UI"/>
-              </a:rPr>
-              <a:t>auth-fn</a:t>
-            </a:r>
-          </a:p>
-        </p:txBody>
-      </p:sp>
-      <p:sp>
-        <p:nvSpPr>
-          <p:cNvPr id="19" name="TextBox 18"/>
-          <p:cNvSpPr txBox="1"/>
-          <p:nvPr/>
-        </p:nvSpPr>
-        <p:spPr>
-          <a:xfrm>
-            <a:off x="3867911" y="3291839"/>
-            <a:ext cx="1737360" cy="457200"/>
-          </a:xfrm>
-          <a:prstGeom prst="rect">
-            <a:avLst/>
-          </a:prstGeom>
-          <a:noFill/>
-        </p:spPr>
-        <p:txBody>
-          <a:bodyPr wrap="square" lIns="0" rIns="0" tIns="0" bIns="0">
-            <a:spAutoFit/>
-          </a:bodyPr>
-          <a:lstStyle/>
-          <a:p>
-            <a:pPr algn="l">
-              <a:lnSpc>
-                <a:spcPct val="105000"/>
-              </a:lnSpc>
-            </a:pPr>
-            <a:r>
-              <a:rPr sz="950" b="0">
-                <a:solidFill>
-                  <a:srgbClr val="475569"/>
-                </a:solidFill>
-                <a:latin typeface="Segoe UI"/>
-              </a:rPr>
-              <a:t>verifies the API key</a:t>
-            </a:r>
-          </a:p>
-        </p:txBody>
-      </p:sp>
-      <p:sp>
-        <p:nvSpPr>
-          <p:cNvPr id="20" name="Rounded Rectangle 19"/>
-          <p:cNvSpPr/>
-          <p:nvPr/>
-        </p:nvSpPr>
-        <p:spPr>
-          <a:xfrm>
-            <a:off x="5148072" y="2999232"/>
-            <a:ext cx="457200" cy="201168"/>
-          </a:xfrm>
-          <a:prstGeom prst="roundRect">
-            <a:avLst/>
-          </a:prstGeom>
-          <a:solidFill>
-            <a:srgbClr val="16A34A"/>
-          </a:solidFill>
-          <a:ln>
-            <a:noFill/>
-          </a:ln>
-          <a:effectLst/>
-        </p:spPr>
-        <p:style>
-          <a:lnRef idx="1">
-            <a:schemeClr val="accent1"/>
-          </a:lnRef>
-          <a:fillRef idx="3">
-            <a:schemeClr val="accent1"/>
-          </a:fillRef>
-          <a:effectRef idx="2">
-            <a:schemeClr val="accent1"/>
-          </a:effectRef>
-          <a:fontRef idx="minor">
-            <a:schemeClr val="lt1"/>
-          </a:fontRef>
-        </p:style>
-        <p:txBody>
-          <a:bodyPr rtlCol="0" anchor="ctr"/>
-          <a:lstStyle/>
-          <a:p>
-            <a:pPr algn="ctr"/>
-            <a:r>
-              <a:rPr sz="750" b="1">
-                <a:solidFill>
-                  <a:srgbClr val="FFFFFF"/>
-                </a:solidFill>
-                <a:latin typeface="Segoe UI"/>
-              </a:rPr>
-              <a:t>NEW</a:t>
-            </a:r>
-          </a:p>
-        </p:txBody>
-      </p:sp>
-      <p:sp>
-        <p:nvSpPr>
-          <p:cNvPr id="21" name="TextBox 20"/>
-          <p:cNvSpPr txBox="1"/>
-          <p:nvPr/>
-        </p:nvSpPr>
-        <p:spPr>
-          <a:xfrm>
-            <a:off x="5943600" y="2258568"/>
-            <a:ext cx="2926080" cy="228600"/>
-          </a:xfrm>
-          <a:prstGeom prst="rect">
-            <a:avLst/>
-          </a:prstGeom>
-          <a:noFill/>
-        </p:spPr>
-        <p:txBody>
-          <a:bodyPr wrap="square" lIns="0" rIns="0" tIns="0" bIns="0">
-            <a:spAutoFit/>
-          </a:bodyPr>
-          <a:lstStyle/>
-          <a:p>
-            <a:pPr algn="l">
-              <a:lnSpc>
-                <a:spcPct val="100000"/>
-              </a:lnSpc>
-            </a:pPr>
-            <a:r>
-              <a:rPr sz="950" b="1">
-                <a:solidFill>
-                  <a:srgbClr val="ED7100"/>
-                </a:solidFill>
-                <a:latin typeface="Segoe UI"/>
-              </a:rPr>
-              <a:t>CONTROL PLANE</a:t>
-            </a:r>
-          </a:p>
-        </p:txBody>
-      </p:sp>
-      <p:sp>
-        <p:nvSpPr>
-          <p:cNvPr id="22" name="Rounded Rectangle 21"/>
-          <p:cNvSpPr/>
-          <p:nvPr/>
-        </p:nvSpPr>
-        <p:spPr>
-          <a:xfrm>
-            <a:off x="5897880" y="2505456"/>
-            <a:ext cx="2743200" cy="676656"/>
-          </a:xfrm>
-          <a:prstGeom prst="roundRect">
-            <a:avLst/>
-          </a:prstGeom>
-          <a:solidFill>
-            <a:srgbClr val="FFFFFF"/>
-          </a:solidFill>
-          <a:ln w="15875">
-            <a:solidFill>
-              <a:srgbClr val="ED7100"/>
-            </a:solidFill>
-          </a:ln>
-          <a:effectLst/>
-        </p:spPr>
-        <p:style>
-          <a:lnRef idx="1">
-            <a:schemeClr val="accent1"/>
-          </a:lnRef>
-          <a:fillRef idx="3">
-            <a:schemeClr val="accent1"/>
-          </a:fillRef>
-          <a:effectRef idx="2">
-            <a:schemeClr val="accent1"/>
-          </a:effectRef>
-          <a:fontRef idx="minor">
-            <a:schemeClr val="lt1"/>
-          </a:fontRef>
-        </p:style>
-        <p:txBody>
-          <a:bodyPr rtlCol="0" anchor="ctr"/>
-          <a:lstStyle/>
-          <a:p/>
-        </p:txBody>
-      </p:sp>
-      <p:pic>
-        <p:nvPicPr>
-          <p:cNvPr id="23" name="Picture 22" descr="lambda.png"/>
-          <p:cNvPicPr>
-            <a:picLocks noChangeAspect="1"/>
-          </p:cNvPicPr>
-          <p:nvPr/>
-        </p:nvPicPr>
-        <p:blipFill>
-          <a:blip r:embed="rId5"/>
-          <a:stretch>
-            <a:fillRect/>
-          </a:stretch>
-        </p:blipFill>
-        <p:spPr>
-          <a:xfrm>
-            <a:off x="6007608" y="2624327"/>
-            <a:ext cx="384048" cy="384048"/>
-          </a:xfrm>
-          <a:prstGeom prst="rect">
-            <a:avLst/>
-          </a:prstGeom>
-        </p:spPr>
-      </p:pic>
-      <p:sp>
-        <p:nvSpPr>
-          <p:cNvPr id="24" name="TextBox 23"/>
-          <p:cNvSpPr txBox="1"/>
-          <p:nvPr/>
-        </p:nvSpPr>
-        <p:spPr>
-          <a:xfrm>
-            <a:off x="6519672" y="2624327"/>
-            <a:ext cx="2011680" cy="237744"/>
-          </a:xfrm>
-          <a:prstGeom prst="rect">
-            <a:avLst/>
-          </a:prstGeom>
-          <a:noFill/>
-        </p:spPr>
-        <p:txBody>
-          <a:bodyPr wrap="square" lIns="0" rIns="0" tIns="0" bIns="0">
-            <a:spAutoFit/>
-          </a:bodyPr>
-          <a:lstStyle/>
-          <a:p>
-            <a:pPr algn="l">
-              <a:lnSpc>
-                <a:spcPct val="100000"/>
-              </a:lnSpc>
-            </a:pPr>
-            <a:r>
-              <a:rPr sz="1200" b="1">
-                <a:solidFill>
-                  <a:srgbClr val="0F172A"/>
-                </a:solidFill>
-                <a:latin typeface="Segoe UI"/>
-              </a:rPr>
-              <a:t>search-fn</a:t>
-            </a:r>
-          </a:p>
-        </p:txBody>
-      </p:sp>
-      <p:sp>
-        <p:nvSpPr>
-          <p:cNvPr id="25" name="TextBox 24"/>
-          <p:cNvSpPr txBox="1"/>
-          <p:nvPr/>
-        </p:nvSpPr>
-        <p:spPr>
-          <a:xfrm>
-            <a:off x="6519672" y="2871215"/>
-            <a:ext cx="2011680" cy="457200"/>
-          </a:xfrm>
-          <a:prstGeom prst="rect">
-            <a:avLst/>
-          </a:prstGeom>
-          <a:noFill/>
-        </p:spPr>
-        <p:txBody>
-          <a:bodyPr wrap="square" lIns="0" rIns="0" tIns="0" bIns="0">
-            <a:spAutoFit/>
-          </a:bodyPr>
-          <a:lstStyle/>
-          <a:p>
-            <a:pPr algn="l">
-              <a:lnSpc>
-                <a:spcPct val="105000"/>
-              </a:lnSpc>
-            </a:pPr>
-            <a:r>
-              <a:rPr sz="950" b="0">
-                <a:solidFill>
-                  <a:srgbClr val="475569"/>
-                </a:solidFill>
-                <a:latin typeface="Segoe UI"/>
-              </a:rPr>
-              <a:t>rank + adjudicate</a:t>
-            </a:r>
-          </a:p>
-        </p:txBody>
-      </p:sp>
-      <p:sp>
-        <p:nvSpPr>
-          <p:cNvPr id="26" name="Rounded Rectangle 25"/>
-          <p:cNvSpPr/>
-          <p:nvPr/>
-        </p:nvSpPr>
-        <p:spPr>
-          <a:xfrm>
-            <a:off x="5897880" y="3273551"/>
-            <a:ext cx="2743200" cy="676656"/>
-          </a:xfrm>
-          <a:prstGeom prst="roundRect">
-            <a:avLst/>
-          </a:prstGeom>
-          <a:solidFill>
-            <a:srgbClr val="FFFFFF"/>
-          </a:solidFill>
-          <a:ln w="25400">
-            <a:solidFill>
-              <a:srgbClr val="16A34A"/>
-            </a:solidFill>
-          </a:ln>
-          <a:effectLst/>
-        </p:spPr>
-        <p:style>
-          <a:lnRef idx="1">
-            <a:schemeClr val="accent1"/>
-          </a:lnRef>
-          <a:fillRef idx="3">
-            <a:schemeClr val="accent1"/>
-          </a:fillRef>
-          <a:effectRef idx="2">
-            <a:schemeClr val="accent1"/>
-          </a:effectRef>
-          <a:fontRef idx="minor">
-            <a:schemeClr val="lt1"/>
-          </a:fontRef>
-        </p:style>
-        <p:txBody>
-          <a:bodyPr rtlCol="0" anchor="ctr"/>
-          <a:lstStyle/>
-          <a:p/>
-        </p:txBody>
-      </p:sp>
-      <p:pic>
-        <p:nvPicPr>
-          <p:cNvPr id="27" name="Picture 26" descr="lambda.png"/>
-          <p:cNvPicPr>
-            <a:picLocks noChangeAspect="1"/>
-          </p:cNvPicPr>
-          <p:nvPr/>
-        </p:nvPicPr>
-        <p:blipFill>
-          <a:blip r:embed="rId5"/>
-          <a:stretch>
-            <a:fillRect/>
-          </a:stretch>
-        </p:blipFill>
-        <p:spPr>
-          <a:xfrm>
-            <a:off x="6007608" y="3392423"/>
-            <a:ext cx="384048" cy="384048"/>
-          </a:xfrm>
-          <a:prstGeom prst="rect">
-            <a:avLst/>
-          </a:prstGeom>
-        </p:spPr>
-      </p:pic>
-      <p:sp>
-        <p:nvSpPr>
-          <p:cNvPr id="28" name="TextBox 27"/>
-          <p:cNvSpPr txBox="1"/>
-          <p:nvPr/>
-        </p:nvSpPr>
-        <p:spPr>
-          <a:xfrm>
-            <a:off x="6519672" y="3392423"/>
-            <a:ext cx="2011680" cy="237744"/>
-          </a:xfrm>
-          <a:prstGeom prst="rect">
-            <a:avLst/>
-          </a:prstGeom>
-          <a:noFill/>
-        </p:spPr>
-        <p:txBody>
-          <a:bodyPr wrap="square" lIns="0" rIns="0" tIns="0" bIns="0">
-            <a:spAutoFit/>
-          </a:bodyPr>
-          <a:lstStyle/>
-          <a:p>
-            <a:pPr algn="l">
-              <a:lnSpc>
-                <a:spcPct val="100000"/>
-              </a:lnSpc>
-            </a:pPr>
-            <a:r>
-              <a:rPr sz="1200" b="1">
-                <a:solidFill>
-                  <a:srgbClr val="0F172A"/>
-                </a:solidFill>
-                <a:latin typeface="Segoe UI"/>
-              </a:rPr>
-              <a:t>exec-fn</a:t>
-            </a:r>
-          </a:p>
-        </p:txBody>
-      </p:sp>
-      <p:sp>
-        <p:nvSpPr>
-          <p:cNvPr id="29" name="TextBox 28"/>
-          <p:cNvSpPr txBox="1"/>
-          <p:nvPr/>
-        </p:nvSpPr>
-        <p:spPr>
-          <a:xfrm>
-            <a:off x="6519672" y="3639311"/>
-            <a:ext cx="2011680" cy="457200"/>
-          </a:xfrm>
-          <a:prstGeom prst="rect">
-            <a:avLst/>
-          </a:prstGeom>
-          <a:noFill/>
-        </p:spPr>
-        <p:txBody>
-          <a:bodyPr wrap="square" lIns="0" rIns="0" tIns="0" bIns="0">
-            <a:spAutoFit/>
-          </a:bodyPr>
-          <a:lstStyle/>
-          <a:p>
-            <a:pPr algn="l">
-              <a:lnSpc>
-                <a:spcPct val="105000"/>
-              </a:lnSpc>
-            </a:pPr>
-            <a:r>
-              <a:rPr sz="950" b="0">
-                <a:solidFill>
-                  <a:srgbClr val="475569"/>
-                </a:solidFill>
-                <a:latin typeface="Segoe UI"/>
-              </a:rPr>
-              <a:t>call a tool</a:t>
-            </a:r>
-          </a:p>
-        </p:txBody>
-      </p:sp>
-      <p:sp>
-        <p:nvSpPr>
-          <p:cNvPr id="30" name="Rounded Rectangle 29"/>
-          <p:cNvSpPr/>
-          <p:nvPr/>
-        </p:nvSpPr>
-        <p:spPr>
-          <a:xfrm>
-            <a:off x="8074152" y="3346703"/>
-            <a:ext cx="457200" cy="201168"/>
-          </a:xfrm>
-          <a:prstGeom prst="roundRect">
-            <a:avLst/>
-          </a:prstGeom>
-          <a:solidFill>
-            <a:srgbClr val="16A34A"/>
-          </a:solidFill>
-          <a:ln>
-            <a:noFill/>
-          </a:ln>
-          <a:effectLst/>
-        </p:spPr>
-        <p:style>
-          <a:lnRef idx="1">
-            <a:schemeClr val="accent1"/>
-          </a:lnRef>
-          <a:fillRef idx="3">
-            <a:schemeClr val="accent1"/>
-          </a:fillRef>
-          <a:effectRef idx="2">
-            <a:schemeClr val="accent1"/>
-          </a:effectRef>
-          <a:fontRef idx="minor">
-            <a:schemeClr val="lt1"/>
-          </a:fontRef>
-        </p:style>
-        <p:txBody>
-          <a:bodyPr rtlCol="0" anchor="ctr"/>
-          <a:lstStyle/>
-          <a:p>
-            <a:pPr algn="ctr"/>
-            <a:r>
-              <a:rPr sz="750" b="1">
-                <a:solidFill>
-                  <a:srgbClr val="FFFFFF"/>
-                </a:solidFill>
-                <a:latin typeface="Segoe UI"/>
-              </a:rPr>
-              <a:t>NEW</a:t>
-            </a:r>
-          </a:p>
-        </p:txBody>
-      </p:sp>
-      <p:sp>
-        <p:nvSpPr>
-          <p:cNvPr id="31" name="Rounded Rectangle 30"/>
-          <p:cNvSpPr/>
-          <p:nvPr/>
-        </p:nvSpPr>
-        <p:spPr>
-          <a:xfrm>
-            <a:off x="5897880" y="4041648"/>
-            <a:ext cx="2743200" cy="676656"/>
-          </a:xfrm>
-          <a:prstGeom prst="roundRect">
-            <a:avLst/>
-          </a:prstGeom>
-          <a:solidFill>
-            <a:srgbClr val="FFFFFF"/>
-          </a:solidFill>
-          <a:ln w="25400">
-            <a:solidFill>
-              <a:srgbClr val="16A34A"/>
-            </a:solidFill>
-          </a:ln>
-          <a:effectLst/>
-        </p:spPr>
-        <p:style>
-          <a:lnRef idx="1">
-            <a:schemeClr val="accent1"/>
-          </a:lnRef>
-          <a:fillRef idx="3">
-            <a:schemeClr val="accent1"/>
-          </a:fillRef>
-          <a:effectRef idx="2">
-            <a:schemeClr val="accent1"/>
-          </a:effectRef>
-          <a:fontRef idx="minor">
-            <a:schemeClr val="lt1"/>
-          </a:fontRef>
-        </p:style>
-        <p:txBody>
-          <a:bodyPr rtlCol="0" anchor="ctr"/>
-          <a:lstStyle/>
-          <a:p/>
-        </p:txBody>
-      </p:sp>
-      <p:pic>
-        <p:nvPicPr>
-          <p:cNvPr id="32" name="Picture 31" descr="lambda.png"/>
-          <p:cNvPicPr>
-            <a:picLocks noChangeAspect="1"/>
-          </p:cNvPicPr>
-          <p:nvPr/>
-        </p:nvPicPr>
-        <p:blipFill>
-          <a:blip r:embed="rId5"/>
-          <a:stretch>
-            <a:fillRect/>
-          </a:stretch>
-        </p:blipFill>
-        <p:spPr>
-          <a:xfrm>
-            <a:off x="6007608" y="4160520"/>
-            <a:ext cx="384048" cy="384048"/>
-          </a:xfrm>
-          <a:prstGeom prst="rect">
-            <a:avLst/>
-          </a:prstGeom>
-        </p:spPr>
-      </p:pic>
-      <p:sp>
-        <p:nvSpPr>
-          <p:cNvPr id="33" name="TextBox 32"/>
-          <p:cNvSpPr txBox="1"/>
-          <p:nvPr/>
-        </p:nvSpPr>
-        <p:spPr>
-          <a:xfrm>
-            <a:off x="6519672" y="4160520"/>
-            <a:ext cx="2011680" cy="237744"/>
-          </a:xfrm>
-          <a:prstGeom prst="rect">
-            <a:avLst/>
-          </a:prstGeom>
-          <a:noFill/>
-        </p:spPr>
-        <p:txBody>
-          <a:bodyPr wrap="square" lIns="0" rIns="0" tIns="0" bIns="0">
-            <a:spAutoFit/>
-          </a:bodyPr>
-          <a:lstStyle/>
-          <a:p>
-            <a:pPr algn="l">
-              <a:lnSpc>
-                <a:spcPct val="100000"/>
-              </a:lnSpc>
-            </a:pPr>
-            <a:r>
-              <a:rPr sz="1200" b="1">
-                <a:solidFill>
-                  <a:srgbClr val="0F172A"/>
-                </a:solidFill>
-                <a:latin typeface="Segoe UI"/>
-              </a:rPr>
-              <a:t>submit / review</a:t>
-            </a:r>
-          </a:p>
-        </p:txBody>
-      </p:sp>
-      <p:sp>
-        <p:nvSpPr>
-          <p:cNvPr id="34" name="TextBox 33"/>
-          <p:cNvSpPr txBox="1"/>
-          <p:nvPr/>
-        </p:nvSpPr>
-        <p:spPr>
-          <a:xfrm>
-            <a:off x="6519672" y="4407408"/>
-            <a:ext cx="2011680" cy="457200"/>
-          </a:xfrm>
-          <a:prstGeom prst="rect">
-            <a:avLst/>
-          </a:prstGeom>
-          <a:noFill/>
-        </p:spPr>
-        <p:txBody>
-          <a:bodyPr wrap="square" lIns="0" rIns="0" tIns="0" bIns="0">
-            <a:spAutoFit/>
-          </a:bodyPr>
-          <a:lstStyle/>
-          <a:p>
-            <a:pPr algn="l">
-              <a:lnSpc>
-                <a:spcPct val="105000"/>
-              </a:lnSpc>
-            </a:pPr>
-            <a:r>
-              <a:rPr sz="950" b="0">
-                <a:solidFill>
-                  <a:srgbClr val="475569"/>
-                </a:solidFill>
-                <a:latin typeface="Segoe UI"/>
-              </a:rPr>
-              <a:t>the review gate</a:t>
-            </a:r>
-          </a:p>
-        </p:txBody>
-      </p:sp>
-      <p:sp>
-        <p:nvSpPr>
-          <p:cNvPr id="35" name="Rounded Rectangle 34"/>
-          <p:cNvSpPr/>
-          <p:nvPr/>
-        </p:nvSpPr>
-        <p:spPr>
-          <a:xfrm>
-            <a:off x="8074152" y="4114800"/>
-            <a:ext cx="457200" cy="201168"/>
-          </a:xfrm>
-          <a:prstGeom prst="roundRect">
-            <a:avLst/>
-          </a:prstGeom>
-          <a:solidFill>
-            <a:srgbClr val="16A34A"/>
-          </a:solidFill>
-          <a:ln>
-            <a:noFill/>
-          </a:ln>
-          <a:effectLst/>
-        </p:spPr>
-        <p:style>
-          <a:lnRef idx="1">
-            <a:schemeClr val="accent1"/>
-          </a:lnRef>
-          <a:fillRef idx="3">
-            <a:schemeClr val="accent1"/>
-          </a:fillRef>
-          <a:effectRef idx="2">
-            <a:schemeClr val="accent1"/>
-          </a:effectRef>
-          <a:fontRef idx="minor">
-            <a:schemeClr val="lt1"/>
-          </a:fontRef>
-        </p:style>
-        <p:txBody>
-          <a:bodyPr rtlCol="0" anchor="ctr"/>
-          <a:lstStyle/>
-          <a:p>
-            <a:pPr algn="ctr"/>
-            <a:r>
-              <a:rPr sz="750" b="1">
-                <a:solidFill>
-                  <a:srgbClr val="FFFFFF"/>
-                </a:solidFill>
-                <a:latin typeface="Segoe UI"/>
-              </a:rPr>
-              <a:t>NEW</a:t>
-            </a:r>
-          </a:p>
-        </p:txBody>
-      </p:sp>
-      <p:sp>
-        <p:nvSpPr>
-          <p:cNvPr id="36" name="TextBox 35"/>
-          <p:cNvSpPr txBox="1"/>
-          <p:nvPr/>
-        </p:nvSpPr>
-        <p:spPr>
-          <a:xfrm>
-            <a:off x="8915400" y="2258568"/>
-            <a:ext cx="2926080" cy="228600"/>
-          </a:xfrm>
-          <a:prstGeom prst="rect">
-            <a:avLst/>
-          </a:prstGeom>
-          <a:noFill/>
-        </p:spPr>
-        <p:txBody>
-          <a:bodyPr wrap="square" lIns="0" rIns="0" tIns="0" bIns="0">
-            <a:spAutoFit/>
-          </a:bodyPr>
-          <a:lstStyle/>
-          <a:p>
-            <a:pPr algn="l">
-              <a:lnSpc>
-                <a:spcPct val="100000"/>
-              </a:lnSpc>
-            </a:pPr>
-            <a:r>
-              <a:rPr sz="950" b="1">
-                <a:solidFill>
-                  <a:srgbClr val="DD344C"/>
-                </a:solidFill>
-                <a:latin typeface="Segoe UI"/>
-              </a:rPr>
-              <a:t>SANDBOX</a:t>
-            </a:r>
-          </a:p>
-        </p:txBody>
-      </p:sp>
-      <p:sp>
-        <p:nvSpPr>
-          <p:cNvPr id="37" name="Rounded Rectangle 36"/>
-          <p:cNvSpPr/>
-          <p:nvPr/>
-        </p:nvSpPr>
-        <p:spPr>
-          <a:xfrm>
-            <a:off x="8869680" y="2505456"/>
-            <a:ext cx="2834640" cy="676656"/>
-          </a:xfrm>
-          <a:prstGeom prst="roundRect">
-            <a:avLst/>
-          </a:prstGeom>
-          <a:solidFill>
-            <a:srgbClr val="FFFFFF"/>
-          </a:solidFill>
-          <a:ln w="25400">
-            <a:solidFill>
-              <a:srgbClr val="DD344C"/>
-            </a:solidFill>
-          </a:ln>
-          <a:effectLst/>
-        </p:spPr>
-        <p:style>
-          <a:lnRef idx="1">
-            <a:schemeClr val="accent1"/>
-          </a:lnRef>
-          <a:fillRef idx="3">
-            <a:schemeClr val="accent1"/>
-          </a:fillRef>
-          <a:effectRef idx="2">
-            <a:schemeClr val="accent1"/>
-          </a:effectRef>
-          <a:fontRef idx="minor">
-            <a:schemeClr val="lt1"/>
-          </a:fontRef>
-        </p:style>
-        <p:txBody>
-          <a:bodyPr rtlCol="0" anchor="ctr"/>
-          <a:lstStyle/>
-          <a:p/>
-        </p:txBody>
-      </p:sp>
-      <p:pic>
-        <p:nvPicPr>
-          <p:cNvPr id="38" name="Picture 37" descr="fargate.png"/>
-          <p:cNvPicPr>
-            <a:picLocks noChangeAspect="1"/>
-          </p:cNvPicPr>
-          <p:nvPr/>
-        </p:nvPicPr>
-        <p:blipFill>
-          <a:blip r:embed="rId6"/>
-          <a:stretch>
-            <a:fillRect/>
-          </a:stretch>
-        </p:blipFill>
-        <p:spPr>
-          <a:xfrm>
-            <a:off x="8979407" y="2624327"/>
-            <a:ext cx="384048" cy="384048"/>
-          </a:xfrm>
-          <a:prstGeom prst="rect">
-            <a:avLst/>
-          </a:prstGeom>
-        </p:spPr>
-      </p:pic>
-      <p:sp>
-        <p:nvSpPr>
-          <p:cNvPr id="39" name="TextBox 38"/>
-          <p:cNvSpPr txBox="1"/>
-          <p:nvPr/>
-        </p:nvSpPr>
-        <p:spPr>
-          <a:xfrm>
-            <a:off x="9491472" y="2624327"/>
-            <a:ext cx="2103120" cy="237744"/>
-          </a:xfrm>
-          <a:prstGeom prst="rect">
-            <a:avLst/>
-          </a:prstGeom>
-          <a:noFill/>
-        </p:spPr>
-        <p:txBody>
-          <a:bodyPr wrap="square" lIns="0" rIns="0" tIns="0" bIns="0">
-            <a:spAutoFit/>
-          </a:bodyPr>
-          <a:lstStyle/>
-          <a:p>
-            <a:pPr algn="l">
-              <a:lnSpc>
-                <a:spcPct val="100000"/>
-              </a:lnSpc>
-            </a:pPr>
-            <a:r>
-              <a:rPr sz="1200" b="1">
-                <a:solidFill>
-                  <a:srgbClr val="0F172A"/>
-                </a:solidFill>
-                <a:latin typeface="Segoe UI"/>
-              </a:rPr>
-              <a:t>tool-runtime</a:t>
-            </a:r>
-          </a:p>
-        </p:txBody>
-      </p:sp>
-      <p:sp>
-        <p:nvSpPr>
-          <p:cNvPr id="40" name="TextBox 39"/>
-          <p:cNvSpPr txBox="1"/>
-          <p:nvPr/>
-        </p:nvSpPr>
-        <p:spPr>
-          <a:xfrm>
-            <a:off x="9491472" y="2871215"/>
-            <a:ext cx="2103120" cy="457200"/>
-          </a:xfrm>
-          <a:prstGeom prst="rect">
-            <a:avLst/>
-          </a:prstGeom>
-          <a:noFill/>
-        </p:spPr>
-        <p:txBody>
-          <a:bodyPr wrap="square" lIns="0" rIns="0" tIns="0" bIns="0">
-            <a:spAutoFit/>
-          </a:bodyPr>
-          <a:lstStyle/>
-          <a:p>
-            <a:pPr algn="l">
-              <a:lnSpc>
-                <a:spcPct val="105000"/>
-              </a:lnSpc>
-            </a:pPr>
-            <a:r>
-              <a:rPr sz="950" b="0">
-                <a:solidFill>
-                  <a:srgbClr val="475569"/>
-                </a:solidFill>
-                <a:latin typeface="Segoe UI"/>
-              </a:rPr>
-              <a:t>no network, null role</a:t>
-            </a:r>
-          </a:p>
-        </p:txBody>
-      </p:sp>
-      <p:sp>
-        <p:nvSpPr>
-          <p:cNvPr id="41" name="Rounded Rectangle 40"/>
-          <p:cNvSpPr/>
-          <p:nvPr/>
-        </p:nvSpPr>
-        <p:spPr>
-          <a:xfrm>
-            <a:off x="11137392" y="2578608"/>
-            <a:ext cx="457200" cy="201168"/>
-          </a:xfrm>
-          <a:prstGeom prst="roundRect">
-            <a:avLst/>
-          </a:prstGeom>
-          <a:solidFill>
-            <a:srgbClr val="16A34A"/>
-          </a:solidFill>
-          <a:ln>
-            <a:noFill/>
-          </a:ln>
-          <a:effectLst/>
-        </p:spPr>
-        <p:style>
-          <a:lnRef idx="1">
-            <a:schemeClr val="accent1"/>
-          </a:lnRef>
-          <a:fillRef idx="3">
-            <a:schemeClr val="accent1"/>
-          </a:fillRef>
-          <a:effectRef idx="2">
-            <a:schemeClr val="accent1"/>
-          </a:effectRef>
-          <a:fontRef idx="minor">
-            <a:schemeClr val="lt1"/>
-          </a:fontRef>
-        </p:style>
-        <p:txBody>
-          <a:bodyPr rtlCol="0" anchor="ctr"/>
-          <a:lstStyle/>
-          <a:p>
-            <a:pPr algn="ctr"/>
-            <a:r>
-              <a:rPr sz="750" b="1">
-                <a:solidFill>
-                  <a:srgbClr val="FFFFFF"/>
-                </a:solidFill>
-                <a:latin typeface="Segoe UI"/>
-              </a:rPr>
-              <a:t>NEW</a:t>
-            </a:r>
-          </a:p>
-        </p:txBody>
-      </p:sp>
-      <p:sp>
-        <p:nvSpPr>
-          <p:cNvPr id="42" name="Rounded Rectangle 41"/>
-          <p:cNvSpPr/>
-          <p:nvPr/>
-        </p:nvSpPr>
-        <p:spPr>
-          <a:xfrm>
-            <a:off x="8869680" y="3273551"/>
-            <a:ext cx="2834640" cy="676656"/>
-          </a:xfrm>
-          <a:prstGeom prst="roundRect">
-            <a:avLst/>
-          </a:prstGeom>
-          <a:solidFill>
-            <a:srgbClr val="FFFFFF"/>
-          </a:solidFill>
-          <a:ln w="25400">
-            <a:solidFill>
-              <a:srgbClr val="DD344C"/>
-            </a:solidFill>
-          </a:ln>
-          <a:effectLst/>
-        </p:spPr>
-        <p:style>
-          <a:lnRef idx="1">
-            <a:schemeClr val="accent1"/>
-          </a:lnRef>
-          <a:fillRef idx="3">
-            <a:schemeClr val="accent1"/>
-          </a:fillRef>
-          <a:effectRef idx="2">
-            <a:schemeClr val="accent1"/>
-          </a:effectRef>
-          <a:fontRef idx="minor">
-            <a:schemeClr val="lt1"/>
-          </a:fontRef>
-        </p:style>
-        <p:txBody>
-          <a:bodyPr rtlCol="0" anchor="ctr"/>
-          <a:lstStyle/>
-          <a:p/>
-        </p:txBody>
-      </p:sp>
-      <p:pic>
-        <p:nvPicPr>
-          <p:cNvPr id="43" name="Picture 42" descr="lambda.png"/>
-          <p:cNvPicPr>
-            <a:picLocks noChangeAspect="1"/>
-          </p:cNvPicPr>
-          <p:nvPr/>
-        </p:nvPicPr>
-        <p:blipFill>
-          <a:blip r:embed="rId5"/>
-          <a:stretch>
-            <a:fillRect/>
-          </a:stretch>
-        </p:blipFill>
-        <p:spPr>
-          <a:xfrm>
-            <a:off x="8979407" y="3392423"/>
-            <a:ext cx="384048" cy="384048"/>
-          </a:xfrm>
-          <a:prstGeom prst="rect">
-            <a:avLst/>
-          </a:prstGeom>
-        </p:spPr>
-      </p:pic>
-      <p:sp>
-        <p:nvSpPr>
-          <p:cNvPr id="44" name="TextBox 43"/>
-          <p:cNvSpPr txBox="1"/>
-          <p:nvPr/>
-        </p:nvSpPr>
-        <p:spPr>
-          <a:xfrm>
-            <a:off x="9491472" y="3392423"/>
-            <a:ext cx="2103120" cy="237744"/>
-          </a:xfrm>
-          <a:prstGeom prst="rect">
-            <a:avLst/>
-          </a:prstGeom>
-          <a:noFill/>
-        </p:spPr>
-        <p:txBody>
-          <a:bodyPr wrap="square" lIns="0" rIns="0" tIns="0" bIns="0">
-            <a:spAutoFit/>
-          </a:bodyPr>
-          <a:lstStyle/>
-          <a:p>
-            <a:pPr algn="l">
-              <a:lnSpc>
-                <a:spcPct val="100000"/>
-              </a:lnSpc>
-            </a:pPr>
-            <a:r>
-              <a:rPr sz="1200" b="1">
-                <a:solidFill>
-                  <a:srgbClr val="0F172A"/>
-                </a:solidFill>
-                <a:latin typeface="Segoe UI"/>
-              </a:rPr>
-              <a:t>fetcher-fn</a:t>
-            </a:r>
-          </a:p>
-        </p:txBody>
-      </p:sp>
-      <p:sp>
-        <p:nvSpPr>
-          <p:cNvPr id="45" name="TextBox 44"/>
-          <p:cNvSpPr txBox="1"/>
-          <p:nvPr/>
-        </p:nvSpPr>
-        <p:spPr>
-          <a:xfrm>
-            <a:off x="9491472" y="3639311"/>
-            <a:ext cx="2103120" cy="457200"/>
-          </a:xfrm>
-          <a:prstGeom prst="rect">
-            <a:avLst/>
-          </a:prstGeom>
-          <a:noFill/>
-        </p:spPr>
-        <p:txBody>
-          <a:bodyPr wrap="square" lIns="0" rIns="0" tIns="0" bIns="0">
-            <a:spAutoFit/>
-          </a:bodyPr>
-          <a:lstStyle/>
-          <a:p>
-            <a:pPr algn="l">
-              <a:lnSpc>
-                <a:spcPct val="105000"/>
-              </a:lnSpc>
-            </a:pPr>
-            <a:r>
-              <a:rPr sz="950" b="0">
-                <a:solidFill>
-                  <a:srgbClr val="475569"/>
-                </a:solidFill>
-                <a:latin typeface="Segoe UI"/>
-              </a:rPr>
-              <a:t>the only thing online</a:t>
-            </a:r>
-          </a:p>
-        </p:txBody>
-      </p:sp>
-      <p:sp>
-        <p:nvSpPr>
-          <p:cNvPr id="46" name="Rounded Rectangle 45"/>
-          <p:cNvSpPr/>
-          <p:nvPr/>
-        </p:nvSpPr>
-        <p:spPr>
-          <a:xfrm>
-            <a:off x="11137392" y="3346703"/>
-            <a:ext cx="457200" cy="201168"/>
-          </a:xfrm>
-          <a:prstGeom prst="roundRect">
-            <a:avLst/>
-          </a:prstGeom>
-          <a:solidFill>
-            <a:srgbClr val="16A34A"/>
-          </a:solidFill>
-          <a:ln>
-            <a:noFill/>
-          </a:ln>
-          <a:effectLst/>
-        </p:spPr>
-        <p:style>
-          <a:lnRef idx="1">
-            <a:schemeClr val="accent1"/>
-          </a:lnRef>
-          <a:fillRef idx="3">
-            <a:schemeClr val="accent1"/>
-          </a:fillRef>
-          <a:effectRef idx="2">
-            <a:schemeClr val="accent1"/>
-          </a:effectRef>
-          <a:fontRef idx="minor">
-            <a:schemeClr val="lt1"/>
-          </a:fontRef>
-        </p:style>
-        <p:txBody>
-          <a:bodyPr rtlCol="0" anchor="ctr"/>
-          <a:lstStyle/>
-          <a:p>
-            <a:pPr algn="ctr"/>
-            <a:r>
-              <a:rPr sz="750" b="1">
-                <a:solidFill>
-                  <a:srgbClr val="FFFFFF"/>
-                </a:solidFill>
-                <a:latin typeface="Segoe UI"/>
-              </a:rPr>
-              <a:t>NEW</a:t>
-            </a:r>
-          </a:p>
-        </p:txBody>
-      </p:sp>
-      <p:sp>
-        <p:nvSpPr>
-          <p:cNvPr id="47" name="Rounded Rectangle 46"/>
-          <p:cNvSpPr/>
-          <p:nvPr/>
-        </p:nvSpPr>
-        <p:spPr>
-          <a:xfrm>
-            <a:off x="8869680" y="4041648"/>
-            <a:ext cx="2834640" cy="676656"/>
-          </a:xfrm>
-          <a:prstGeom prst="roundRect">
-            <a:avLst/>
-          </a:prstGeom>
-          <a:solidFill>
-            <a:srgbClr val="FFFFFF"/>
-          </a:solidFill>
-          <a:ln w="15875">
-            <a:solidFill>
-              <a:srgbClr val="C925D1"/>
-            </a:solidFill>
-          </a:ln>
-          <a:effectLst/>
-        </p:spPr>
-        <p:style>
-          <a:lnRef idx="1">
-            <a:schemeClr val="accent1"/>
-          </a:lnRef>
-          <a:fillRef idx="3">
-            <a:schemeClr val="accent1"/>
-          </a:fillRef>
-          <a:effectRef idx="2">
-            <a:schemeClr val="accent1"/>
-          </a:effectRef>
-          <a:fontRef idx="minor">
-            <a:schemeClr val="lt1"/>
-          </a:fontRef>
-        </p:style>
-        <p:txBody>
-          <a:bodyPr rtlCol="0" anchor="ctr"/>
-          <a:lstStyle/>
-          <a:p/>
-        </p:txBody>
-      </p:sp>
-      <p:pic>
-        <p:nvPicPr>
-          <p:cNvPr id="48" name="Picture 47" descr="dynamodb.png"/>
-          <p:cNvPicPr>
-            <a:picLocks noChangeAspect="1"/>
-          </p:cNvPicPr>
-          <p:nvPr/>
-        </p:nvPicPr>
-        <p:blipFill>
-          <a:blip r:embed="rId7"/>
-          <a:stretch>
-            <a:fillRect/>
-          </a:stretch>
-        </p:blipFill>
-        <p:spPr>
-          <a:xfrm>
-            <a:off x="8979407" y="4160520"/>
-            <a:ext cx="384048" cy="384048"/>
-          </a:xfrm>
-          <a:prstGeom prst="rect">
-            <a:avLst/>
-          </a:prstGeom>
-        </p:spPr>
-      </p:pic>
-      <p:sp>
-        <p:nvSpPr>
-          <p:cNvPr id="49" name="TextBox 48"/>
-          <p:cNvSpPr txBox="1"/>
-          <p:nvPr/>
-        </p:nvSpPr>
-        <p:spPr>
-          <a:xfrm>
-            <a:off x="9491472" y="4160520"/>
-            <a:ext cx="2103120" cy="237744"/>
-          </a:xfrm>
-          <a:prstGeom prst="rect">
-            <a:avLst/>
-          </a:prstGeom>
-          <a:noFill/>
-        </p:spPr>
-        <p:txBody>
-          <a:bodyPr wrap="square" lIns="0" rIns="0" tIns="0" bIns="0">
-            <a:spAutoFit/>
-          </a:bodyPr>
-          <a:lstStyle/>
-          <a:p>
-            <a:pPr algn="l">
-              <a:lnSpc>
-                <a:spcPct val="100000"/>
-              </a:lnSpc>
-            </a:pPr>
-            <a:r>
-              <a:rPr sz="1200" b="1">
-                <a:solidFill>
-                  <a:srgbClr val="0F172A"/>
-                </a:solidFill>
-                <a:latin typeface="Segoe UI"/>
-              </a:rPr>
-              <a:t>7 tables</a:t>
-            </a:r>
-          </a:p>
-        </p:txBody>
-      </p:sp>
-      <p:sp>
-        <p:nvSpPr>
-          <p:cNvPr id="50" name="TextBox 49"/>
-          <p:cNvSpPr txBox="1"/>
-          <p:nvPr/>
-        </p:nvSpPr>
-        <p:spPr>
-          <a:xfrm>
-            <a:off x="9491472" y="4407408"/>
-            <a:ext cx="2103120" cy="457200"/>
-          </a:xfrm>
-          <a:prstGeom prst="rect">
-            <a:avLst/>
-          </a:prstGeom>
-          <a:noFill/>
-        </p:spPr>
-        <p:txBody>
-          <a:bodyPr wrap="square" lIns="0" rIns="0" tIns="0" bIns="0">
-            <a:spAutoFit/>
-          </a:bodyPr>
-          <a:lstStyle/>
-          <a:p>
-            <a:pPr algn="l">
-              <a:lnSpc>
-                <a:spcPct val="105000"/>
-              </a:lnSpc>
-            </a:pPr>
-            <a:r>
-              <a:rPr sz="950" b="0">
-                <a:solidFill>
-                  <a:srgbClr val="475569"/>
-                </a:solidFill>
-                <a:latin typeface="Segoe UI"/>
-              </a:rPr>
-              <a:t>3 existing, 4 new</a:t>
-            </a:r>
-          </a:p>
-        </p:txBody>
-      </p:sp>
-      <p:sp>
-        <p:nvSpPr>
-          <p:cNvPr id="51" name="Rounded Rectangle 50"/>
-          <p:cNvSpPr/>
-          <p:nvPr/>
-        </p:nvSpPr>
-        <p:spPr>
-          <a:xfrm>
-            <a:off x="777240" y="4882896"/>
-            <a:ext cx="2286000" cy="676656"/>
-          </a:xfrm>
-          <a:prstGeom prst="roundRect">
-            <a:avLst/>
-          </a:prstGeom>
-          <a:solidFill>
-            <a:srgbClr val="FFFFFF"/>
-          </a:solidFill>
-          <a:ln w="25400">
-            <a:solidFill>
-              <a:srgbClr val="E7157B"/>
-            </a:solidFill>
-          </a:ln>
-          <a:effectLst/>
-        </p:spPr>
-        <p:style>
-          <a:lnRef idx="1">
-            <a:schemeClr val="accent1"/>
-          </a:lnRef>
-          <a:fillRef idx="3">
-            <a:schemeClr val="accent1"/>
-          </a:fillRef>
-          <a:effectRef idx="2">
-            <a:schemeClr val="accent1"/>
-          </a:effectRef>
-          <a:fontRef idx="minor">
-            <a:schemeClr val="lt1"/>
-          </a:fontRef>
-        </p:style>
-        <p:txBody>
-          <a:bodyPr rtlCol="0" anchor="ctr"/>
-          <a:lstStyle/>
-          <a:p/>
-        </p:txBody>
-      </p:sp>
-      <p:pic>
-        <p:nvPicPr>
-          <p:cNvPr id="52" name="Picture 51" descr="eventbridge.png"/>
-          <p:cNvPicPr>
-            <a:picLocks noChangeAspect="1"/>
-          </p:cNvPicPr>
-          <p:nvPr/>
-        </p:nvPicPr>
-        <p:blipFill>
-          <a:blip r:embed="rId8"/>
-          <a:stretch>
-            <a:fillRect/>
-          </a:stretch>
-        </p:blipFill>
-        <p:spPr>
-          <a:xfrm>
-            <a:off x="886968" y="5001768"/>
-            <a:ext cx="384048" cy="384048"/>
-          </a:xfrm>
-          <a:prstGeom prst="rect">
-            <a:avLst/>
-          </a:prstGeom>
-        </p:spPr>
-      </p:pic>
-      <p:sp>
-        <p:nvSpPr>
-          <p:cNvPr id="53" name="TextBox 52"/>
-          <p:cNvSpPr txBox="1"/>
-          <p:nvPr/>
-        </p:nvSpPr>
-        <p:spPr>
-          <a:xfrm>
-            <a:off x="1399032" y="5001768"/>
-            <a:ext cx="1554480" cy="237744"/>
-          </a:xfrm>
-          <a:prstGeom prst="rect">
-            <a:avLst/>
-          </a:prstGeom>
-          <a:noFill/>
-        </p:spPr>
-        <p:txBody>
-          <a:bodyPr wrap="square" lIns="0" rIns="0" tIns="0" bIns="0">
-            <a:spAutoFit/>
-          </a:bodyPr>
-          <a:lstStyle/>
-          <a:p>
-            <a:pPr algn="l">
-              <a:lnSpc>
-                <a:spcPct val="100000"/>
-              </a:lnSpc>
-            </a:pPr>
-            <a:r>
-              <a:rPr sz="1200" b="1">
-                <a:solidFill>
-                  <a:srgbClr val="0F172A"/>
-                </a:solidFill>
-                <a:latin typeface="Segoe UI"/>
-              </a:rPr>
-              <a:t>EventBridge</a:t>
-            </a:r>
-          </a:p>
-        </p:txBody>
-      </p:sp>
-      <p:sp>
-        <p:nvSpPr>
-          <p:cNvPr id="54" name="TextBox 53"/>
-          <p:cNvSpPr txBox="1"/>
-          <p:nvPr/>
-        </p:nvSpPr>
-        <p:spPr>
-          <a:xfrm>
-            <a:off x="1399032" y="5248656"/>
-            <a:ext cx="1554480" cy="457200"/>
-          </a:xfrm>
-          <a:prstGeom prst="rect">
-            <a:avLst/>
-          </a:prstGeom>
-          <a:noFill/>
-        </p:spPr>
-        <p:txBody>
-          <a:bodyPr wrap="square" lIns="0" rIns="0" tIns="0" bIns="0">
-            <a:spAutoFit/>
-          </a:bodyPr>
-          <a:lstStyle/>
-          <a:p>
-            <a:pPr algn="l">
-              <a:lnSpc>
-                <a:spcPct val="105000"/>
-              </a:lnSpc>
-            </a:pPr>
-            <a:r>
-              <a:rPr sz="950" b="0">
-                <a:solidFill>
-                  <a:srgbClr val="475569"/>
-                </a:solidFill>
-                <a:latin typeface="Segoe UI"/>
-              </a:rPr>
-              <a:t>nightly jobs</a:t>
-            </a:r>
-          </a:p>
-        </p:txBody>
-      </p:sp>
-      <p:sp>
-        <p:nvSpPr>
-          <p:cNvPr id="55" name="Rounded Rectangle 54"/>
-          <p:cNvSpPr/>
-          <p:nvPr/>
-        </p:nvSpPr>
-        <p:spPr>
-          <a:xfrm>
-            <a:off x="2496312" y="4956048"/>
-            <a:ext cx="457200" cy="201168"/>
-          </a:xfrm>
-          <a:prstGeom prst="roundRect">
-            <a:avLst/>
-          </a:prstGeom>
-          <a:solidFill>
-            <a:srgbClr val="16A34A"/>
-          </a:solidFill>
-          <a:ln>
-            <a:noFill/>
-          </a:ln>
-          <a:effectLst/>
-        </p:spPr>
-        <p:style>
-          <a:lnRef idx="1">
-            <a:schemeClr val="accent1"/>
-          </a:lnRef>
-          <a:fillRef idx="3">
-            <a:schemeClr val="accent1"/>
-          </a:fillRef>
-          <a:effectRef idx="2">
-            <a:schemeClr val="accent1"/>
-          </a:effectRef>
-          <a:fontRef idx="minor">
-            <a:schemeClr val="lt1"/>
-          </a:fontRef>
-        </p:style>
-        <p:txBody>
-          <a:bodyPr rtlCol="0" anchor="ctr"/>
-          <a:lstStyle/>
-          <a:p>
-            <a:pPr algn="ctr"/>
-            <a:r>
-              <a:rPr sz="750" b="1">
-                <a:solidFill>
-                  <a:srgbClr val="FFFFFF"/>
-                </a:solidFill>
-                <a:latin typeface="Segoe UI"/>
-              </a:rPr>
-              <a:t>NEW</a:t>
-            </a:r>
-          </a:p>
-        </p:txBody>
-      </p:sp>
-      <p:sp>
-        <p:nvSpPr>
-          <p:cNvPr id="56" name="Rounded Rectangle 55"/>
-          <p:cNvSpPr/>
-          <p:nvPr/>
-        </p:nvSpPr>
-        <p:spPr>
-          <a:xfrm>
-            <a:off x="3246120" y="4882896"/>
-            <a:ext cx="2468880" cy="676656"/>
-          </a:xfrm>
-          <a:prstGeom prst="roundRect">
-            <a:avLst/>
-          </a:prstGeom>
-          <a:solidFill>
-            <a:srgbClr val="FFFFFF"/>
-          </a:solidFill>
-          <a:ln w="25400">
-            <a:solidFill>
-              <a:srgbClr val="16A34A"/>
-            </a:solidFill>
-          </a:ln>
-          <a:effectLst/>
-        </p:spPr>
-        <p:style>
-          <a:lnRef idx="1">
-            <a:schemeClr val="accent1"/>
-          </a:lnRef>
-          <a:fillRef idx="3">
-            <a:schemeClr val="accent1"/>
-          </a:fillRef>
-          <a:effectRef idx="2">
-            <a:schemeClr val="accent1"/>
-          </a:effectRef>
-          <a:fontRef idx="minor">
-            <a:schemeClr val="lt1"/>
-          </a:fontRef>
-        </p:style>
-        <p:txBody>
-          <a:bodyPr rtlCol="0" anchor="ctr"/>
-          <a:lstStyle/>
-          <a:p/>
-        </p:txBody>
-      </p:sp>
-      <p:pic>
-        <p:nvPicPr>
-          <p:cNvPr id="57" name="Picture 56" descr="lambda.png"/>
-          <p:cNvPicPr>
-            <a:picLocks noChangeAspect="1"/>
-          </p:cNvPicPr>
-          <p:nvPr/>
-        </p:nvPicPr>
-        <p:blipFill>
-          <a:blip r:embed="rId5"/>
-          <a:stretch>
-            <a:fillRect/>
-          </a:stretch>
-        </p:blipFill>
-        <p:spPr>
-          <a:xfrm>
-            <a:off x="3355848" y="5001768"/>
-            <a:ext cx="384048" cy="384048"/>
-          </a:xfrm>
-          <a:prstGeom prst="rect">
-            <a:avLst/>
-          </a:prstGeom>
-        </p:spPr>
-      </p:pic>
-      <p:sp>
-        <p:nvSpPr>
-          <p:cNvPr id="58" name="TextBox 57"/>
-          <p:cNvSpPr txBox="1"/>
-          <p:nvPr/>
-        </p:nvSpPr>
-        <p:spPr>
-          <a:xfrm>
-            <a:off x="3867911" y="5001768"/>
-            <a:ext cx="1737360" cy="237744"/>
-          </a:xfrm>
-          <a:prstGeom prst="rect">
-            <a:avLst/>
-          </a:prstGeom>
-          <a:noFill/>
-        </p:spPr>
-        <p:txBody>
-          <a:bodyPr wrap="square" lIns="0" rIns="0" tIns="0" bIns="0">
-            <a:spAutoFit/>
-          </a:bodyPr>
-          <a:lstStyle/>
-          <a:p>
-            <a:pPr algn="l">
-              <a:lnSpc>
-                <a:spcPct val="100000"/>
-              </a:lnSpc>
-            </a:pPr>
-            <a:r>
-              <a:rPr sz="1200" b="1">
-                <a:solidFill>
-                  <a:srgbClr val="0F172A"/>
-                </a:solidFill>
-                <a:latin typeface="Segoe UI"/>
-              </a:rPr>
-              <a:t>cluster + score</a:t>
-            </a:r>
-          </a:p>
-        </p:txBody>
-      </p:sp>
-      <p:sp>
-        <p:nvSpPr>
-          <p:cNvPr id="59" name="TextBox 58"/>
-          <p:cNvSpPr txBox="1"/>
-          <p:nvPr/>
-        </p:nvSpPr>
-        <p:spPr>
-          <a:xfrm>
-            <a:off x="3867911" y="5248656"/>
-            <a:ext cx="1737360" cy="457200"/>
-          </a:xfrm>
-          <a:prstGeom prst="rect">
-            <a:avLst/>
-          </a:prstGeom>
-          <a:noFill/>
-        </p:spPr>
-        <p:txBody>
-          <a:bodyPr wrap="square" lIns="0" rIns="0" tIns="0" bIns="0">
-            <a:spAutoFit/>
-          </a:bodyPr>
-          <a:lstStyle/>
-          <a:p>
-            <a:pPr algn="l">
-              <a:lnSpc>
-                <a:spcPct val="105000"/>
-              </a:lnSpc>
-            </a:pPr>
-            <a:r>
-              <a:rPr sz="950" b="0">
-                <a:solidFill>
-                  <a:srgbClr val="475569"/>
-                </a:solidFill>
-                <a:latin typeface="Segoe UI"/>
-              </a:rPr>
-              <a:t>replay the log</a:t>
-            </a:r>
-          </a:p>
-        </p:txBody>
-      </p:sp>
-      <p:sp>
-        <p:nvSpPr>
-          <p:cNvPr id="60" name="Rounded Rectangle 59"/>
-          <p:cNvSpPr/>
-          <p:nvPr/>
-        </p:nvSpPr>
-        <p:spPr>
-          <a:xfrm>
-            <a:off x="5148072" y="4956048"/>
-            <a:ext cx="457200" cy="201168"/>
-          </a:xfrm>
-          <a:prstGeom prst="roundRect">
-            <a:avLst/>
-          </a:prstGeom>
-          <a:solidFill>
-            <a:srgbClr val="16A34A"/>
-          </a:solidFill>
-          <a:ln>
-            <a:noFill/>
-          </a:ln>
-          <a:effectLst/>
-        </p:spPr>
-        <p:style>
-          <a:lnRef idx="1">
-            <a:schemeClr val="accent1"/>
-          </a:lnRef>
-          <a:fillRef idx="3">
-            <a:schemeClr val="accent1"/>
-          </a:fillRef>
-          <a:effectRef idx="2">
-            <a:schemeClr val="accent1"/>
-          </a:effectRef>
-          <a:fontRef idx="minor">
-            <a:schemeClr val="lt1"/>
-          </a:fontRef>
-        </p:style>
-        <p:txBody>
-          <a:bodyPr rtlCol="0" anchor="ctr"/>
-          <a:lstStyle/>
-          <a:p>
-            <a:pPr algn="ctr"/>
-            <a:r>
-              <a:rPr sz="750" b="1">
-                <a:solidFill>
-                  <a:srgbClr val="FFFFFF"/>
-                </a:solidFill>
-                <a:latin typeface="Segoe UI"/>
-              </a:rPr>
-              <a:t>NEW</a:t>
-            </a:r>
-          </a:p>
-        </p:txBody>
-      </p:sp>
-      <p:sp>
-        <p:nvSpPr>
-          <p:cNvPr id="61" name="Rounded Rectangle 60"/>
-          <p:cNvSpPr/>
-          <p:nvPr/>
-        </p:nvSpPr>
-        <p:spPr>
-          <a:xfrm>
-            <a:off x="5897880" y="4882896"/>
-            <a:ext cx="2743200" cy="676656"/>
-          </a:xfrm>
-          <a:prstGeom prst="roundRect">
-            <a:avLst/>
-          </a:prstGeom>
-          <a:solidFill>
-            <a:srgbClr val="FFFFFF"/>
-          </a:solidFill>
-          <a:ln w="25400">
-            <a:solidFill>
-              <a:srgbClr val="8C4FFF"/>
-            </a:solidFill>
-          </a:ln>
-          <a:effectLst/>
-        </p:spPr>
-        <p:style>
-          <a:lnRef idx="1">
-            <a:schemeClr val="accent1"/>
-          </a:lnRef>
-          <a:fillRef idx="3">
-            <a:schemeClr val="accent1"/>
-          </a:fillRef>
-          <a:effectRef idx="2">
-            <a:schemeClr val="accent1"/>
-          </a:effectRef>
-          <a:fontRef idx="minor">
-            <a:schemeClr val="lt1"/>
-          </a:fontRef>
-        </p:style>
-        <p:txBody>
-          <a:bodyPr rtlCol="0" anchor="ctr"/>
-          <a:lstStyle/>
-          <a:p/>
-        </p:txBody>
-      </p:sp>
-      <p:pic>
-        <p:nvPicPr>
-          <p:cNvPr id="62" name="Picture 61" descr="cloudfront.png"/>
-          <p:cNvPicPr>
-            <a:picLocks noChangeAspect="1"/>
-          </p:cNvPicPr>
-          <p:nvPr/>
-        </p:nvPicPr>
-        <p:blipFill>
-          <a:blip r:embed="rId9"/>
-          <a:stretch>
-            <a:fillRect/>
-          </a:stretch>
-        </p:blipFill>
-        <p:spPr>
-          <a:xfrm>
-            <a:off x="6007608" y="5001768"/>
-            <a:ext cx="384048" cy="384048"/>
-          </a:xfrm>
-          <a:prstGeom prst="rect">
-            <a:avLst/>
-          </a:prstGeom>
-        </p:spPr>
-      </p:pic>
-      <p:sp>
-        <p:nvSpPr>
-          <p:cNvPr id="63" name="TextBox 62"/>
-          <p:cNvSpPr txBox="1"/>
-          <p:nvPr/>
-        </p:nvSpPr>
-        <p:spPr>
-          <a:xfrm>
-            <a:off x="6519672" y="5001768"/>
-            <a:ext cx="2011680" cy="237744"/>
-          </a:xfrm>
-          <a:prstGeom prst="rect">
-            <a:avLst/>
-          </a:prstGeom>
-          <a:noFill/>
-        </p:spPr>
-        <p:txBody>
-          <a:bodyPr wrap="square" lIns="0" rIns="0" tIns="0" bIns="0">
-            <a:spAutoFit/>
-          </a:bodyPr>
-          <a:lstStyle/>
-          <a:p>
-            <a:pPr algn="l">
-              <a:lnSpc>
-                <a:spcPct val="100000"/>
-              </a:lnSpc>
-            </a:pPr>
-            <a:r>
-              <a:rPr sz="1200" b="1">
-                <a:solidFill>
-                  <a:srgbClr val="0F172A"/>
-                </a:solidFill>
-                <a:latin typeface="Segoe UI"/>
-              </a:rPr>
-              <a:t>gaps board</a:t>
-            </a:r>
-          </a:p>
-        </p:txBody>
-      </p:sp>
-      <p:sp>
-        <p:nvSpPr>
-          <p:cNvPr id="64" name="TextBox 63"/>
-          <p:cNvSpPr txBox="1"/>
-          <p:nvPr/>
-        </p:nvSpPr>
-        <p:spPr>
-          <a:xfrm>
-            <a:off x="6519672" y="5248656"/>
-            <a:ext cx="2011680" cy="457200"/>
-          </a:xfrm>
-          <a:prstGeom prst="rect">
-            <a:avLst/>
-          </a:prstGeom>
-          <a:noFill/>
-        </p:spPr>
-        <p:txBody>
-          <a:bodyPr wrap="square" lIns="0" rIns="0" tIns="0" bIns="0">
-            <a:spAutoFit/>
-          </a:bodyPr>
-          <a:lstStyle/>
-          <a:p>
-            <a:pPr algn="l">
-              <a:lnSpc>
-                <a:spcPct val="105000"/>
-              </a:lnSpc>
-            </a:pPr>
-            <a:r>
-              <a:rPr sz="950" b="0">
-                <a:solidFill>
-                  <a:srgbClr val="475569"/>
-                </a:solidFill>
-                <a:latin typeface="Segoe UI"/>
-              </a:rPr>
-              <a:t>CloudFront + S3</a:t>
-            </a:r>
-          </a:p>
-        </p:txBody>
-      </p:sp>
-      <p:sp>
-        <p:nvSpPr>
-          <p:cNvPr id="65" name="Rounded Rectangle 64"/>
-          <p:cNvSpPr/>
-          <p:nvPr/>
-        </p:nvSpPr>
-        <p:spPr>
-          <a:xfrm>
-            <a:off x="8074152" y="4956048"/>
-            <a:ext cx="457200" cy="201168"/>
-          </a:xfrm>
-          <a:prstGeom prst="roundRect">
-            <a:avLst/>
-          </a:prstGeom>
-          <a:solidFill>
-            <a:srgbClr val="16A34A"/>
-          </a:solidFill>
-          <a:ln>
-            <a:noFill/>
-          </a:ln>
-          <a:effectLst/>
-        </p:spPr>
-        <p:style>
-          <a:lnRef idx="1">
-            <a:schemeClr val="accent1"/>
-          </a:lnRef>
-          <a:fillRef idx="3">
-            <a:schemeClr val="accent1"/>
-          </a:fillRef>
-          <a:effectRef idx="2">
-            <a:schemeClr val="accent1"/>
-          </a:effectRef>
-          <a:fontRef idx="minor">
-            <a:schemeClr val="lt1"/>
-          </a:fontRef>
-        </p:style>
-        <p:txBody>
-          <a:bodyPr rtlCol="0" anchor="ctr"/>
-          <a:lstStyle/>
-          <a:p>
-            <a:pPr algn="ctr"/>
-            <a:r>
-              <a:rPr sz="750" b="1">
-                <a:solidFill>
-                  <a:srgbClr val="FFFFFF"/>
-                </a:solidFill>
-                <a:latin typeface="Segoe UI"/>
-              </a:rPr>
-              <a:t>NEW</a:t>
-            </a:r>
-          </a:p>
-        </p:txBody>
-      </p:sp>
-      <p:sp>
-        <p:nvSpPr>
-          <p:cNvPr id="66" name="Rounded Rectangle 65"/>
-          <p:cNvSpPr/>
-          <p:nvPr/>
-        </p:nvSpPr>
-        <p:spPr>
-          <a:xfrm>
-            <a:off x="8869680" y="4882896"/>
-            <a:ext cx="2834640" cy="676656"/>
-          </a:xfrm>
-          <a:prstGeom prst="roundRect">
-            <a:avLst/>
-          </a:prstGeom>
-          <a:solidFill>
-            <a:srgbClr val="FFFFFF"/>
-          </a:solidFill>
-          <a:ln w="15875">
-            <a:solidFill>
-              <a:srgbClr val="01A88D"/>
-            </a:solidFill>
-          </a:ln>
-          <a:effectLst/>
-        </p:spPr>
-        <p:style>
-          <a:lnRef idx="1">
-            <a:schemeClr val="accent1"/>
-          </a:lnRef>
-          <a:fillRef idx="3">
-            <a:schemeClr val="accent1"/>
-          </a:fillRef>
-          <a:effectRef idx="2">
-            <a:schemeClr val="accent1"/>
-          </a:effectRef>
-          <a:fontRef idx="minor">
-            <a:schemeClr val="lt1"/>
-          </a:fontRef>
-        </p:style>
-        <p:txBody>
-          <a:bodyPr rtlCol="0" anchor="ctr"/>
-          <a:lstStyle/>
-          <a:p/>
-        </p:txBody>
-      </p:sp>
-      <p:pic>
-        <p:nvPicPr>
-          <p:cNvPr id="67" name="Picture 66" descr="bedrock.png"/>
-          <p:cNvPicPr>
-            <a:picLocks noChangeAspect="1"/>
-          </p:cNvPicPr>
-          <p:nvPr/>
-        </p:nvPicPr>
-        <p:blipFill>
-          <a:blip r:embed="rId10"/>
-          <a:stretch>
-            <a:fillRect/>
-          </a:stretch>
-        </p:blipFill>
-        <p:spPr>
-          <a:xfrm>
-            <a:off x="8979407" y="5001768"/>
-            <a:ext cx="384048" cy="384048"/>
-          </a:xfrm>
-          <a:prstGeom prst="rect">
-            <a:avLst/>
-          </a:prstGeom>
-        </p:spPr>
-      </p:pic>
-      <p:sp>
-        <p:nvSpPr>
-          <p:cNvPr id="68" name="TextBox 67"/>
-          <p:cNvSpPr txBox="1"/>
-          <p:nvPr/>
-        </p:nvSpPr>
-        <p:spPr>
-          <a:xfrm>
-            <a:off x="9491472" y="5001768"/>
-            <a:ext cx="2103120" cy="237744"/>
-          </a:xfrm>
-          <a:prstGeom prst="rect">
-            <a:avLst/>
-          </a:prstGeom>
-          <a:noFill/>
-        </p:spPr>
-        <p:txBody>
-          <a:bodyPr wrap="square" lIns="0" rIns="0" tIns="0" bIns="0">
-            <a:spAutoFit/>
-          </a:bodyPr>
-          <a:lstStyle/>
-          <a:p>
-            <a:pPr algn="l">
-              <a:lnSpc>
-                <a:spcPct val="100000"/>
-              </a:lnSpc>
-            </a:pPr>
-            <a:r>
-              <a:rPr sz="1200" b="1">
-                <a:solidFill>
-                  <a:srgbClr val="0F172A"/>
-                </a:solidFill>
-                <a:latin typeface="Segoe UI"/>
-              </a:rPr>
-              <a:t>Bedrock</a:t>
-            </a:r>
-          </a:p>
-        </p:txBody>
-      </p:sp>
-      <p:sp>
-        <p:nvSpPr>
-          <p:cNvPr id="69" name="TextBox 68"/>
-          <p:cNvSpPr txBox="1"/>
-          <p:nvPr/>
-        </p:nvSpPr>
-        <p:spPr>
-          <a:xfrm>
-            <a:off x="9491472" y="5248656"/>
-            <a:ext cx="2103120" cy="457200"/>
-          </a:xfrm>
-          <a:prstGeom prst="rect">
-            <a:avLst/>
-          </a:prstGeom>
-          <a:noFill/>
-        </p:spPr>
-        <p:txBody>
-          <a:bodyPr wrap="square" lIns="0" rIns="0" tIns="0" bIns="0">
-            <a:spAutoFit/>
-          </a:bodyPr>
-          <a:lstStyle/>
-          <a:p>
-            <a:pPr algn="l">
-              <a:lnSpc>
-                <a:spcPct val="105000"/>
-              </a:lnSpc>
-            </a:pPr>
-            <a:r>
-              <a:rPr sz="950" b="0">
-                <a:solidFill>
-                  <a:srgbClr val="475569"/>
-                </a:solidFill>
-                <a:latin typeface="Segoe UI"/>
-              </a:rPr>
-              <a:t>embed + adjudicate</a:t>
-            </a:r>
-          </a:p>
-        </p:txBody>
-      </p:sp>
-    </p:spTree>
-  </p:cSld>
-  <p:clrMapOvr>
-    <a:masterClrMapping/>
-  </p:clrMapOvr>
-</p:sld>
-</file>
-
 <file path=ppt/slides/slide5.xml><?xml version="1.0" encoding="utf-8"?>
 <p:sld xmlns:a="http://schemas.openxmlformats.org/drawingml/2006/main" xmlns:p="http://schemas.openxmlformats.org/presentationml/2006/main" xmlns:r="http://schemas.openxmlformats.org/officeDocument/2006/relationships">
   <p:cSld>
@@ -9682,7 +8295,7 @@
                 </a:solidFill>
                 <a:latin typeface="Segoe UI"/>
               </a:rPr>
-              <a:t>THE KEY DECISION</a:t>
+              <a:t>ARCHITECTURE</a:t>
             </a:r>
           </a:p>
         </p:txBody>
@@ -9721,7 +8334,7 @@
                 </a:solidFill>
                 <a:latin typeface="Segoe UI"/>
               </a:rPr>
-              <a:t>The sandbox, and why it is shaped this way</a:t>
+              <a:t>What runs in Phase 1</a:t>
             </a:r>
           </a:p>
         </p:txBody>
@@ -9804,7 +8417,7 @@
                 </a:solidFill>
                 <a:latin typeface="Segoe UI"/>
               </a:rPr>
-              <a:t>This is the hardest thing in Phase 1 and the one worth getting right first.</a:t>
+              <a:t>Green is new. The full diagram is on the Miro board beneath Phase 0.</a:t>
             </a:r>
           </a:p>
         </p:txBody>
@@ -9817,8 +8430,8 @@
         </p:nvSpPr>
         <p:spPr>
           <a:xfrm>
-            <a:off x="777240" y="2350008"/>
-            <a:ext cx="10515600" cy="2377440"/>
+            <a:off x="822960" y="2258568"/>
+            <a:ext cx="2743200" cy="228600"/>
           </a:xfrm>
           <a:prstGeom prst="rect">
             <a:avLst/>
@@ -9831,87 +8444,19 @@
           </a:bodyPr>
           <a:lstStyle/>
           <a:p>
-            <a:pPr>
+            <a:pPr algn="l">
               <a:lnSpc>
-                <a:spcPct val="115000"/>
+                <a:spcPct val="100000"/>
               </a:lnSpc>
-              <a:spcAft>
-                <a:spcPts val="1000"/>
-              </a:spcAft>
             </a:pPr>
             <a:r>
-              <a:rPr sz="1400" b="1">
-                <a:solidFill>
-                  <a:srgbClr val="0F172A"/>
-                </a:solidFill>
-                <a:latin typeface="Segoe UI"/>
-              </a:rPr>
-              <a:t>A tool never opens a network connection.</a:t>
-            </a:r>
-            <a:r>
-              <a:rPr sz="1400">
-                <a:solidFill>
-                  <a:srgbClr val="475569"/>
-                </a:solidFill>
-                <a:latin typeface="Segoe UI"/>
-              </a:rPr>
-              <a:t>  It declares the endpoint it needs. The platform fetches that endpoint against a per-tool allowlist and hands back the response. The tool only transforms data.</a:t>
-            </a:r>
-          </a:p>
-          <a:p>
-            <a:pPr>
-              <a:lnSpc>
-                <a:spcPct val="115000"/>
-              </a:lnSpc>
-              <a:spcAft>
-                <a:spcPts val="1000"/>
-              </a:spcAft>
-            </a:pPr>
-            <a:r>
-              <a:rPr sz="1400" b="1">
-                <a:solidFill>
-                  <a:srgbClr val="0F172A"/>
-                </a:solidFill>
-                <a:latin typeface="Segoe UI"/>
-              </a:rPr>
-              <a:t>So the sandbox has nothing to contain.</a:t>
-            </a:r>
-            <a:r>
-              <a:rPr sz="1400">
-                <a:solidFill>
-                  <a:srgbClr val="475569"/>
-                </a:solidFill>
-                <a:latin typeface="Segoe UI"/>
-              </a:rPr>
-              <a:t>  No network, no IAM role, no disk. An escape reaches an empty room — there is no credential to steal and nowhere to send it.</a:t>
-            </a:r>
-          </a:p>
-          <a:p>
-            <a:pPr>
-              <a:lnSpc>
-                <a:spcPct val="115000"/>
-              </a:lnSpc>
-              <a:spcAft>
-                <a:spcPts val="1000"/>
-              </a:spcAft>
-            </a:pPr>
-            <a:r>
-              <a:rPr sz="1400" b="1">
-                <a:solidFill>
-                  <a:srgbClr val="0F172A"/>
-                </a:solidFill>
-                <a:latin typeface="Segoe UI"/>
-              </a:rPr>
-              <a:t>The alternative was containing arbitrary code WITH internet access.</a:t>
-            </a:r>
-            <a:r>
-              <a:rPr sz="1400">
-                <a:solidFill>
-                  <a:srgbClr val="475569"/>
-                </a:solidFill>
-                <a:latin typeface="Segoe UI"/>
-              </a:rPr>
-              <a:t>  That is an open-ended problem. Egress filtering, DNS rebinding, exfiltration through a permitted host. This design removes the category instead of defending it.</a:t>
+              <a:rPr sz="950" b="1">
+                <a:solidFill>
+                  <a:srgbClr val="94A3B8"/>
+                </a:solidFill>
+                <a:latin typeface="Segoe UI"/>
+              </a:rPr>
+              <a:t>CALLERS</a:t>
             </a:r>
           </a:p>
         </p:txBody>
@@ -9924,16 +8469,1168 @@
         </p:nvSpPr>
         <p:spPr>
           <a:xfrm>
-            <a:off x="777240" y="4864608"/>
-            <a:ext cx="10515600" cy="1005840"/>
+            <a:off x="777240" y="2505456"/>
+            <a:ext cx="2286000" cy="749808"/>
           </a:xfrm>
           <a:prstGeom prst="roundRect">
             <a:avLst/>
           </a:prstGeom>
           <a:solidFill>
-            <a:srgbClr val="FEF2F2"/>
+            <a:srgbClr val="FFFFFF"/>
           </a:solidFill>
           <a:ln w="15875">
+            <a:solidFill>
+              <a:srgbClr val="64748B"/>
+            </a:solidFill>
+          </a:ln>
+          <a:effectLst/>
+        </p:spPr>
+        <p:style>
+          <a:lnRef idx="1">
+            <a:schemeClr val="accent1"/>
+          </a:lnRef>
+          <a:fillRef idx="3">
+            <a:schemeClr val="accent1"/>
+          </a:fillRef>
+          <a:effectRef idx="2">
+            <a:schemeClr val="accent1"/>
+          </a:effectRef>
+          <a:fontRef idx="minor">
+            <a:schemeClr val="lt1"/>
+          </a:fontRef>
+        </p:style>
+        <p:txBody>
+          <a:bodyPr rtlCol="0" anchor="ctr"/>
+          <a:lstStyle/>
+          <a:p/>
+        </p:txBody>
+      </p:sp>
+      <p:pic>
+        <p:nvPicPr>
+          <p:cNvPr id="8" name="Picture 7" descr="client.png"/>
+          <p:cNvPicPr>
+            <a:picLocks noChangeAspect="1"/>
+          </p:cNvPicPr>
+          <p:nvPr/>
+        </p:nvPicPr>
+        <p:blipFill>
+          <a:blip r:embed="rId2"/>
+          <a:stretch>
+            <a:fillRect/>
+          </a:stretch>
+        </p:blipFill>
+        <p:spPr>
+          <a:xfrm>
+            <a:off x="886968" y="2624327"/>
+            <a:ext cx="384048" cy="384048"/>
+          </a:xfrm>
+          <a:prstGeom prst="rect">
+            <a:avLst/>
+          </a:prstGeom>
+        </p:spPr>
+      </p:pic>
+      <p:sp>
+        <p:nvSpPr>
+          <p:cNvPr id="9" name="TextBox 8"/>
+          <p:cNvSpPr txBox="1"/>
+          <p:nvPr/>
+        </p:nvSpPr>
+        <p:spPr>
+          <a:xfrm>
+            <a:off x="1399032" y="2624327"/>
+            <a:ext cx="1554480" cy="237744"/>
+          </a:xfrm>
+          <a:prstGeom prst="rect">
+            <a:avLst/>
+          </a:prstGeom>
+          <a:noFill/>
+        </p:spPr>
+        <p:txBody>
+          <a:bodyPr wrap="square" lIns="0" rIns="0" tIns="0" bIns="0">
+            <a:spAutoFit/>
+          </a:bodyPr>
+          <a:lstStyle/>
+          <a:p>
+            <a:pPr algn="l">
+              <a:lnSpc>
+                <a:spcPct val="100000"/>
+              </a:lnSpc>
+            </a:pPr>
+            <a:r>
+              <a:rPr sz="1200" b="1">
+                <a:solidFill>
+                  <a:srgbClr val="0F172A"/>
+                </a:solidFill>
+                <a:latin typeface="Segoe UI"/>
+              </a:rPr>
+              <a:t>Agent</a:t>
+            </a:r>
+          </a:p>
+        </p:txBody>
+      </p:sp>
+      <p:sp>
+        <p:nvSpPr>
+          <p:cNvPr id="10" name="TextBox 9"/>
+          <p:cNvSpPr txBox="1"/>
+          <p:nvPr/>
+        </p:nvSpPr>
+        <p:spPr>
+          <a:xfrm>
+            <a:off x="1399032" y="2871215"/>
+            <a:ext cx="1554480" cy="457200"/>
+          </a:xfrm>
+          <a:prstGeom prst="rect">
+            <a:avLst/>
+          </a:prstGeom>
+          <a:noFill/>
+        </p:spPr>
+        <p:txBody>
+          <a:bodyPr wrap="square" lIns="0" rIns="0" tIns="0" bIns="0">
+            <a:spAutoFit/>
+          </a:bodyPr>
+          <a:lstStyle/>
+          <a:p>
+            <a:pPr algn="l">
+              <a:lnSpc>
+                <a:spcPct val="105000"/>
+              </a:lnSpc>
+            </a:pPr>
+            <a:r>
+              <a:rPr sz="950" b="0">
+                <a:solidFill>
+                  <a:srgbClr val="475569"/>
+                </a:solidFill>
+                <a:latin typeface="Segoe UI"/>
+              </a:rPr>
+              <a:t>calls tools</a:t>
+            </a:r>
+          </a:p>
+        </p:txBody>
+      </p:sp>
+      <p:sp>
+        <p:nvSpPr>
+          <p:cNvPr id="11" name="Rounded Rectangle 10"/>
+          <p:cNvSpPr/>
+          <p:nvPr/>
+        </p:nvSpPr>
+        <p:spPr>
+          <a:xfrm>
+            <a:off x="777240" y="3346703"/>
+            <a:ext cx="2286000" cy="749808"/>
+          </a:xfrm>
+          <a:prstGeom prst="roundRect">
+            <a:avLst/>
+          </a:prstGeom>
+          <a:solidFill>
+            <a:srgbClr val="FFFFFF"/>
+          </a:solidFill>
+          <a:ln w="15875">
+            <a:solidFill>
+              <a:srgbClr val="64748B"/>
+            </a:solidFill>
+          </a:ln>
+          <a:effectLst/>
+        </p:spPr>
+        <p:style>
+          <a:lnRef idx="1">
+            <a:schemeClr val="accent1"/>
+          </a:lnRef>
+          <a:fillRef idx="3">
+            <a:schemeClr val="accent1"/>
+          </a:fillRef>
+          <a:effectRef idx="2">
+            <a:schemeClr val="accent1"/>
+          </a:effectRef>
+          <a:fontRef idx="minor">
+            <a:schemeClr val="lt1"/>
+          </a:fontRef>
+        </p:style>
+        <p:txBody>
+          <a:bodyPr rtlCol="0" anchor="ctr"/>
+          <a:lstStyle/>
+          <a:p/>
+        </p:txBody>
+      </p:sp>
+      <p:pic>
+        <p:nvPicPr>
+          <p:cNvPr id="12" name="Picture 11" descr="users.png"/>
+          <p:cNvPicPr>
+            <a:picLocks noChangeAspect="1"/>
+          </p:cNvPicPr>
+          <p:nvPr/>
+        </p:nvPicPr>
+        <p:blipFill>
+          <a:blip r:embed="rId3"/>
+          <a:stretch>
+            <a:fillRect/>
+          </a:stretch>
+        </p:blipFill>
+        <p:spPr>
+          <a:xfrm>
+            <a:off x="886968" y="3465575"/>
+            <a:ext cx="384048" cy="384048"/>
+          </a:xfrm>
+          <a:prstGeom prst="rect">
+            <a:avLst/>
+          </a:prstGeom>
+        </p:spPr>
+      </p:pic>
+      <p:sp>
+        <p:nvSpPr>
+          <p:cNvPr id="13" name="TextBox 12"/>
+          <p:cNvSpPr txBox="1"/>
+          <p:nvPr/>
+        </p:nvSpPr>
+        <p:spPr>
+          <a:xfrm>
+            <a:off x="1399032" y="3465575"/>
+            <a:ext cx="1554480" cy="237744"/>
+          </a:xfrm>
+          <a:prstGeom prst="rect">
+            <a:avLst/>
+          </a:prstGeom>
+          <a:noFill/>
+        </p:spPr>
+        <p:txBody>
+          <a:bodyPr wrap="square" lIns="0" rIns="0" tIns="0" bIns="0">
+            <a:spAutoFit/>
+          </a:bodyPr>
+          <a:lstStyle/>
+          <a:p>
+            <a:pPr algn="l">
+              <a:lnSpc>
+                <a:spcPct val="100000"/>
+              </a:lnSpc>
+            </a:pPr>
+            <a:r>
+              <a:rPr sz="1200" b="1">
+                <a:solidFill>
+                  <a:srgbClr val="0F172A"/>
+                </a:solidFill>
+                <a:latin typeface="Segoe UI"/>
+              </a:rPr>
+              <a:t>Creator</a:t>
+            </a:r>
+          </a:p>
+        </p:txBody>
+      </p:sp>
+      <p:sp>
+        <p:nvSpPr>
+          <p:cNvPr id="14" name="TextBox 13"/>
+          <p:cNvSpPr txBox="1"/>
+          <p:nvPr/>
+        </p:nvSpPr>
+        <p:spPr>
+          <a:xfrm>
+            <a:off x="1399032" y="3712463"/>
+            <a:ext cx="1554480" cy="457200"/>
+          </a:xfrm>
+          <a:prstGeom prst="rect">
+            <a:avLst/>
+          </a:prstGeom>
+          <a:noFill/>
+        </p:spPr>
+        <p:txBody>
+          <a:bodyPr wrap="square" lIns="0" rIns="0" tIns="0" bIns="0">
+            <a:spAutoFit/>
+          </a:bodyPr>
+          <a:lstStyle/>
+          <a:p>
+            <a:pPr algn="l">
+              <a:lnSpc>
+                <a:spcPct val="105000"/>
+              </a:lnSpc>
+            </a:pPr>
+            <a:r>
+              <a:rPr sz="950" b="0">
+                <a:solidFill>
+                  <a:srgbClr val="475569"/>
+                </a:solidFill>
+                <a:latin typeface="Segoe UI"/>
+              </a:rPr>
+              <a:t>publishes tools</a:t>
+            </a:r>
+          </a:p>
+        </p:txBody>
+      </p:sp>
+      <p:sp>
+        <p:nvSpPr>
+          <p:cNvPr id="15" name="TextBox 14"/>
+          <p:cNvSpPr txBox="1"/>
+          <p:nvPr/>
+        </p:nvSpPr>
+        <p:spPr>
+          <a:xfrm>
+            <a:off x="3291840" y="2258568"/>
+            <a:ext cx="2743200" cy="228600"/>
+          </a:xfrm>
+          <a:prstGeom prst="rect">
+            <a:avLst/>
+          </a:prstGeom>
+          <a:noFill/>
+        </p:spPr>
+        <p:txBody>
+          <a:bodyPr wrap="square" lIns="0" rIns="0" tIns="0" bIns="0">
+            <a:spAutoFit/>
+          </a:bodyPr>
+          <a:lstStyle/>
+          <a:p>
+            <a:pPr algn="l">
+              <a:lnSpc>
+                <a:spcPct val="100000"/>
+              </a:lnSpc>
+            </a:pPr>
+            <a:r>
+              <a:rPr sz="950" b="1">
+                <a:solidFill>
+                  <a:srgbClr val="16A34A"/>
+                </a:solidFill>
+                <a:latin typeface="Segoe UI"/>
+              </a:rPr>
+              <a:t>EDGE</a:t>
+            </a:r>
+          </a:p>
+        </p:txBody>
+      </p:sp>
+      <p:sp>
+        <p:nvSpPr>
+          <p:cNvPr id="16" name="Rounded Rectangle 15"/>
+          <p:cNvSpPr/>
+          <p:nvPr/>
+        </p:nvSpPr>
+        <p:spPr>
+          <a:xfrm>
+            <a:off x="3246120" y="2926079"/>
+            <a:ext cx="2468880" cy="749808"/>
+          </a:xfrm>
+          <a:prstGeom prst="roundRect">
+            <a:avLst/>
+          </a:prstGeom>
+          <a:solidFill>
+            <a:srgbClr val="FFFFFF"/>
+          </a:solidFill>
+          <a:ln w="25400">
+            <a:solidFill>
+              <a:srgbClr val="16A34A"/>
+            </a:solidFill>
+          </a:ln>
+          <a:effectLst/>
+        </p:spPr>
+        <p:style>
+          <a:lnRef idx="1">
+            <a:schemeClr val="accent1"/>
+          </a:lnRef>
+          <a:fillRef idx="3">
+            <a:schemeClr val="accent1"/>
+          </a:fillRef>
+          <a:effectRef idx="2">
+            <a:schemeClr val="accent1"/>
+          </a:effectRef>
+          <a:fontRef idx="minor">
+            <a:schemeClr val="lt1"/>
+          </a:fontRef>
+        </p:style>
+        <p:txBody>
+          <a:bodyPr rtlCol="0" anchor="ctr"/>
+          <a:lstStyle/>
+          <a:p/>
+        </p:txBody>
+      </p:sp>
+      <p:pic>
+        <p:nvPicPr>
+          <p:cNvPr id="17" name="Picture 16" descr="iam.png"/>
+          <p:cNvPicPr>
+            <a:picLocks noChangeAspect="1"/>
+          </p:cNvPicPr>
+          <p:nvPr/>
+        </p:nvPicPr>
+        <p:blipFill>
+          <a:blip r:embed="rId4"/>
+          <a:stretch>
+            <a:fillRect/>
+          </a:stretch>
+        </p:blipFill>
+        <p:spPr>
+          <a:xfrm>
+            <a:off x="3355848" y="3044951"/>
+            <a:ext cx="384048" cy="384048"/>
+          </a:xfrm>
+          <a:prstGeom prst="rect">
+            <a:avLst/>
+          </a:prstGeom>
+        </p:spPr>
+      </p:pic>
+      <p:sp>
+        <p:nvSpPr>
+          <p:cNvPr id="18" name="TextBox 17"/>
+          <p:cNvSpPr txBox="1"/>
+          <p:nvPr/>
+        </p:nvSpPr>
+        <p:spPr>
+          <a:xfrm>
+            <a:off x="3867911" y="3044951"/>
+            <a:ext cx="1737360" cy="237744"/>
+          </a:xfrm>
+          <a:prstGeom prst="rect">
+            <a:avLst/>
+          </a:prstGeom>
+          <a:noFill/>
+        </p:spPr>
+        <p:txBody>
+          <a:bodyPr wrap="square" lIns="0" rIns="0" tIns="0" bIns="0">
+            <a:spAutoFit/>
+          </a:bodyPr>
+          <a:lstStyle/>
+          <a:p>
+            <a:pPr algn="l">
+              <a:lnSpc>
+                <a:spcPct val="100000"/>
+              </a:lnSpc>
+            </a:pPr>
+            <a:r>
+              <a:rPr sz="1200" b="1">
+                <a:solidFill>
+                  <a:srgbClr val="0F172A"/>
+                </a:solidFill>
+                <a:latin typeface="Segoe UI"/>
+              </a:rPr>
+              <a:t>auth-fn</a:t>
+            </a:r>
+          </a:p>
+        </p:txBody>
+      </p:sp>
+      <p:sp>
+        <p:nvSpPr>
+          <p:cNvPr id="19" name="TextBox 18"/>
+          <p:cNvSpPr txBox="1"/>
+          <p:nvPr/>
+        </p:nvSpPr>
+        <p:spPr>
+          <a:xfrm>
+            <a:off x="3867911" y="3291839"/>
+            <a:ext cx="1737360" cy="457200"/>
+          </a:xfrm>
+          <a:prstGeom prst="rect">
+            <a:avLst/>
+          </a:prstGeom>
+          <a:noFill/>
+        </p:spPr>
+        <p:txBody>
+          <a:bodyPr wrap="square" lIns="0" rIns="0" tIns="0" bIns="0">
+            <a:spAutoFit/>
+          </a:bodyPr>
+          <a:lstStyle/>
+          <a:p>
+            <a:pPr algn="l">
+              <a:lnSpc>
+                <a:spcPct val="105000"/>
+              </a:lnSpc>
+            </a:pPr>
+            <a:r>
+              <a:rPr sz="950" b="0">
+                <a:solidFill>
+                  <a:srgbClr val="475569"/>
+                </a:solidFill>
+                <a:latin typeface="Segoe UI"/>
+              </a:rPr>
+              <a:t>verifies the API key</a:t>
+            </a:r>
+          </a:p>
+        </p:txBody>
+      </p:sp>
+      <p:sp>
+        <p:nvSpPr>
+          <p:cNvPr id="20" name="Rounded Rectangle 19"/>
+          <p:cNvSpPr/>
+          <p:nvPr/>
+        </p:nvSpPr>
+        <p:spPr>
+          <a:xfrm>
+            <a:off x="5148072" y="2999232"/>
+            <a:ext cx="457200" cy="201168"/>
+          </a:xfrm>
+          <a:prstGeom prst="roundRect">
+            <a:avLst/>
+          </a:prstGeom>
+          <a:solidFill>
+            <a:srgbClr val="16A34A"/>
+          </a:solidFill>
+          <a:ln>
+            <a:noFill/>
+          </a:ln>
+          <a:effectLst/>
+        </p:spPr>
+        <p:style>
+          <a:lnRef idx="1">
+            <a:schemeClr val="accent1"/>
+          </a:lnRef>
+          <a:fillRef idx="3">
+            <a:schemeClr val="accent1"/>
+          </a:fillRef>
+          <a:effectRef idx="2">
+            <a:schemeClr val="accent1"/>
+          </a:effectRef>
+          <a:fontRef idx="minor">
+            <a:schemeClr val="lt1"/>
+          </a:fontRef>
+        </p:style>
+        <p:txBody>
+          <a:bodyPr rtlCol="0" anchor="ctr"/>
+          <a:lstStyle/>
+          <a:p>
+            <a:pPr algn="ctr"/>
+            <a:r>
+              <a:rPr sz="750" b="1">
+                <a:solidFill>
+                  <a:srgbClr val="FFFFFF"/>
+                </a:solidFill>
+                <a:latin typeface="Segoe UI"/>
+              </a:rPr>
+              <a:t>NEW</a:t>
+            </a:r>
+          </a:p>
+        </p:txBody>
+      </p:sp>
+      <p:sp>
+        <p:nvSpPr>
+          <p:cNvPr id="21" name="TextBox 20"/>
+          <p:cNvSpPr txBox="1"/>
+          <p:nvPr/>
+        </p:nvSpPr>
+        <p:spPr>
+          <a:xfrm>
+            <a:off x="5943600" y="2258568"/>
+            <a:ext cx="2926080" cy="228600"/>
+          </a:xfrm>
+          <a:prstGeom prst="rect">
+            <a:avLst/>
+          </a:prstGeom>
+          <a:noFill/>
+        </p:spPr>
+        <p:txBody>
+          <a:bodyPr wrap="square" lIns="0" rIns="0" tIns="0" bIns="0">
+            <a:spAutoFit/>
+          </a:bodyPr>
+          <a:lstStyle/>
+          <a:p>
+            <a:pPr algn="l">
+              <a:lnSpc>
+                <a:spcPct val="100000"/>
+              </a:lnSpc>
+            </a:pPr>
+            <a:r>
+              <a:rPr sz="950" b="1">
+                <a:solidFill>
+                  <a:srgbClr val="ED7100"/>
+                </a:solidFill>
+                <a:latin typeface="Segoe UI"/>
+              </a:rPr>
+              <a:t>CONTROL PLANE</a:t>
+            </a:r>
+          </a:p>
+        </p:txBody>
+      </p:sp>
+      <p:sp>
+        <p:nvSpPr>
+          <p:cNvPr id="22" name="Rounded Rectangle 21"/>
+          <p:cNvSpPr/>
+          <p:nvPr/>
+        </p:nvSpPr>
+        <p:spPr>
+          <a:xfrm>
+            <a:off x="5897880" y="2505456"/>
+            <a:ext cx="2743200" cy="676656"/>
+          </a:xfrm>
+          <a:prstGeom prst="roundRect">
+            <a:avLst/>
+          </a:prstGeom>
+          <a:solidFill>
+            <a:srgbClr val="FFFFFF"/>
+          </a:solidFill>
+          <a:ln w="15875">
+            <a:solidFill>
+              <a:srgbClr val="ED7100"/>
+            </a:solidFill>
+          </a:ln>
+          <a:effectLst/>
+        </p:spPr>
+        <p:style>
+          <a:lnRef idx="1">
+            <a:schemeClr val="accent1"/>
+          </a:lnRef>
+          <a:fillRef idx="3">
+            <a:schemeClr val="accent1"/>
+          </a:fillRef>
+          <a:effectRef idx="2">
+            <a:schemeClr val="accent1"/>
+          </a:effectRef>
+          <a:fontRef idx="minor">
+            <a:schemeClr val="lt1"/>
+          </a:fontRef>
+        </p:style>
+        <p:txBody>
+          <a:bodyPr rtlCol="0" anchor="ctr"/>
+          <a:lstStyle/>
+          <a:p/>
+        </p:txBody>
+      </p:sp>
+      <p:pic>
+        <p:nvPicPr>
+          <p:cNvPr id="23" name="Picture 22" descr="lambda.png"/>
+          <p:cNvPicPr>
+            <a:picLocks noChangeAspect="1"/>
+          </p:cNvPicPr>
+          <p:nvPr/>
+        </p:nvPicPr>
+        <p:blipFill>
+          <a:blip r:embed="rId5"/>
+          <a:stretch>
+            <a:fillRect/>
+          </a:stretch>
+        </p:blipFill>
+        <p:spPr>
+          <a:xfrm>
+            <a:off x="6007608" y="2624327"/>
+            <a:ext cx="384048" cy="384048"/>
+          </a:xfrm>
+          <a:prstGeom prst="rect">
+            <a:avLst/>
+          </a:prstGeom>
+        </p:spPr>
+      </p:pic>
+      <p:sp>
+        <p:nvSpPr>
+          <p:cNvPr id="24" name="TextBox 23"/>
+          <p:cNvSpPr txBox="1"/>
+          <p:nvPr/>
+        </p:nvSpPr>
+        <p:spPr>
+          <a:xfrm>
+            <a:off x="6519672" y="2624327"/>
+            <a:ext cx="2011680" cy="237744"/>
+          </a:xfrm>
+          <a:prstGeom prst="rect">
+            <a:avLst/>
+          </a:prstGeom>
+          <a:noFill/>
+        </p:spPr>
+        <p:txBody>
+          <a:bodyPr wrap="square" lIns="0" rIns="0" tIns="0" bIns="0">
+            <a:spAutoFit/>
+          </a:bodyPr>
+          <a:lstStyle/>
+          <a:p>
+            <a:pPr algn="l">
+              <a:lnSpc>
+                <a:spcPct val="100000"/>
+              </a:lnSpc>
+            </a:pPr>
+            <a:r>
+              <a:rPr sz="1200" b="1">
+                <a:solidFill>
+                  <a:srgbClr val="0F172A"/>
+                </a:solidFill>
+                <a:latin typeface="Segoe UI"/>
+              </a:rPr>
+              <a:t>search-fn</a:t>
+            </a:r>
+          </a:p>
+        </p:txBody>
+      </p:sp>
+      <p:sp>
+        <p:nvSpPr>
+          <p:cNvPr id="25" name="TextBox 24"/>
+          <p:cNvSpPr txBox="1"/>
+          <p:nvPr/>
+        </p:nvSpPr>
+        <p:spPr>
+          <a:xfrm>
+            <a:off x="6519672" y="2871215"/>
+            <a:ext cx="2011680" cy="457200"/>
+          </a:xfrm>
+          <a:prstGeom prst="rect">
+            <a:avLst/>
+          </a:prstGeom>
+          <a:noFill/>
+        </p:spPr>
+        <p:txBody>
+          <a:bodyPr wrap="square" lIns="0" rIns="0" tIns="0" bIns="0">
+            <a:spAutoFit/>
+          </a:bodyPr>
+          <a:lstStyle/>
+          <a:p>
+            <a:pPr algn="l">
+              <a:lnSpc>
+                <a:spcPct val="105000"/>
+              </a:lnSpc>
+            </a:pPr>
+            <a:r>
+              <a:rPr sz="950" b="0">
+                <a:solidFill>
+                  <a:srgbClr val="475569"/>
+                </a:solidFill>
+                <a:latin typeface="Segoe UI"/>
+              </a:rPr>
+              <a:t>rank + adjudicate</a:t>
+            </a:r>
+          </a:p>
+        </p:txBody>
+      </p:sp>
+      <p:sp>
+        <p:nvSpPr>
+          <p:cNvPr id="26" name="Rounded Rectangle 25"/>
+          <p:cNvSpPr/>
+          <p:nvPr/>
+        </p:nvSpPr>
+        <p:spPr>
+          <a:xfrm>
+            <a:off x="5897880" y="3273551"/>
+            <a:ext cx="2743200" cy="676656"/>
+          </a:xfrm>
+          <a:prstGeom prst="roundRect">
+            <a:avLst/>
+          </a:prstGeom>
+          <a:solidFill>
+            <a:srgbClr val="FFFFFF"/>
+          </a:solidFill>
+          <a:ln w="25400">
+            <a:solidFill>
+              <a:srgbClr val="16A34A"/>
+            </a:solidFill>
+          </a:ln>
+          <a:effectLst/>
+        </p:spPr>
+        <p:style>
+          <a:lnRef idx="1">
+            <a:schemeClr val="accent1"/>
+          </a:lnRef>
+          <a:fillRef idx="3">
+            <a:schemeClr val="accent1"/>
+          </a:fillRef>
+          <a:effectRef idx="2">
+            <a:schemeClr val="accent1"/>
+          </a:effectRef>
+          <a:fontRef idx="minor">
+            <a:schemeClr val="lt1"/>
+          </a:fontRef>
+        </p:style>
+        <p:txBody>
+          <a:bodyPr rtlCol="0" anchor="ctr"/>
+          <a:lstStyle/>
+          <a:p/>
+        </p:txBody>
+      </p:sp>
+      <p:pic>
+        <p:nvPicPr>
+          <p:cNvPr id="27" name="Picture 26" descr="lambda.png"/>
+          <p:cNvPicPr>
+            <a:picLocks noChangeAspect="1"/>
+          </p:cNvPicPr>
+          <p:nvPr/>
+        </p:nvPicPr>
+        <p:blipFill>
+          <a:blip r:embed="rId5"/>
+          <a:stretch>
+            <a:fillRect/>
+          </a:stretch>
+        </p:blipFill>
+        <p:spPr>
+          <a:xfrm>
+            <a:off x="6007608" y="3392423"/>
+            <a:ext cx="384048" cy="384048"/>
+          </a:xfrm>
+          <a:prstGeom prst="rect">
+            <a:avLst/>
+          </a:prstGeom>
+        </p:spPr>
+      </p:pic>
+      <p:sp>
+        <p:nvSpPr>
+          <p:cNvPr id="28" name="TextBox 27"/>
+          <p:cNvSpPr txBox="1"/>
+          <p:nvPr/>
+        </p:nvSpPr>
+        <p:spPr>
+          <a:xfrm>
+            <a:off x="6519672" y="3392423"/>
+            <a:ext cx="2011680" cy="237744"/>
+          </a:xfrm>
+          <a:prstGeom prst="rect">
+            <a:avLst/>
+          </a:prstGeom>
+          <a:noFill/>
+        </p:spPr>
+        <p:txBody>
+          <a:bodyPr wrap="square" lIns="0" rIns="0" tIns="0" bIns="0">
+            <a:spAutoFit/>
+          </a:bodyPr>
+          <a:lstStyle/>
+          <a:p>
+            <a:pPr algn="l">
+              <a:lnSpc>
+                <a:spcPct val="100000"/>
+              </a:lnSpc>
+            </a:pPr>
+            <a:r>
+              <a:rPr sz="1200" b="1">
+                <a:solidFill>
+                  <a:srgbClr val="0F172A"/>
+                </a:solidFill>
+                <a:latin typeface="Segoe UI"/>
+              </a:rPr>
+              <a:t>exec-fn</a:t>
+            </a:r>
+          </a:p>
+        </p:txBody>
+      </p:sp>
+      <p:sp>
+        <p:nvSpPr>
+          <p:cNvPr id="29" name="TextBox 28"/>
+          <p:cNvSpPr txBox="1"/>
+          <p:nvPr/>
+        </p:nvSpPr>
+        <p:spPr>
+          <a:xfrm>
+            <a:off x="6519672" y="3639311"/>
+            <a:ext cx="2011680" cy="457200"/>
+          </a:xfrm>
+          <a:prstGeom prst="rect">
+            <a:avLst/>
+          </a:prstGeom>
+          <a:noFill/>
+        </p:spPr>
+        <p:txBody>
+          <a:bodyPr wrap="square" lIns="0" rIns="0" tIns="0" bIns="0">
+            <a:spAutoFit/>
+          </a:bodyPr>
+          <a:lstStyle/>
+          <a:p>
+            <a:pPr algn="l">
+              <a:lnSpc>
+                <a:spcPct val="105000"/>
+              </a:lnSpc>
+            </a:pPr>
+            <a:r>
+              <a:rPr sz="950" b="0">
+                <a:solidFill>
+                  <a:srgbClr val="475569"/>
+                </a:solidFill>
+                <a:latin typeface="Segoe UI"/>
+              </a:rPr>
+              <a:t>call a tool</a:t>
+            </a:r>
+          </a:p>
+        </p:txBody>
+      </p:sp>
+      <p:sp>
+        <p:nvSpPr>
+          <p:cNvPr id="30" name="Rounded Rectangle 29"/>
+          <p:cNvSpPr/>
+          <p:nvPr/>
+        </p:nvSpPr>
+        <p:spPr>
+          <a:xfrm>
+            <a:off x="8074152" y="3346703"/>
+            <a:ext cx="457200" cy="201168"/>
+          </a:xfrm>
+          <a:prstGeom prst="roundRect">
+            <a:avLst/>
+          </a:prstGeom>
+          <a:solidFill>
+            <a:srgbClr val="16A34A"/>
+          </a:solidFill>
+          <a:ln>
+            <a:noFill/>
+          </a:ln>
+          <a:effectLst/>
+        </p:spPr>
+        <p:style>
+          <a:lnRef idx="1">
+            <a:schemeClr val="accent1"/>
+          </a:lnRef>
+          <a:fillRef idx="3">
+            <a:schemeClr val="accent1"/>
+          </a:fillRef>
+          <a:effectRef idx="2">
+            <a:schemeClr val="accent1"/>
+          </a:effectRef>
+          <a:fontRef idx="minor">
+            <a:schemeClr val="lt1"/>
+          </a:fontRef>
+        </p:style>
+        <p:txBody>
+          <a:bodyPr rtlCol="0" anchor="ctr"/>
+          <a:lstStyle/>
+          <a:p>
+            <a:pPr algn="ctr"/>
+            <a:r>
+              <a:rPr sz="750" b="1">
+                <a:solidFill>
+                  <a:srgbClr val="FFFFFF"/>
+                </a:solidFill>
+                <a:latin typeface="Segoe UI"/>
+              </a:rPr>
+              <a:t>NEW</a:t>
+            </a:r>
+          </a:p>
+        </p:txBody>
+      </p:sp>
+      <p:sp>
+        <p:nvSpPr>
+          <p:cNvPr id="31" name="Rounded Rectangle 30"/>
+          <p:cNvSpPr/>
+          <p:nvPr/>
+        </p:nvSpPr>
+        <p:spPr>
+          <a:xfrm>
+            <a:off x="5897880" y="4041648"/>
+            <a:ext cx="2743200" cy="676656"/>
+          </a:xfrm>
+          <a:prstGeom prst="roundRect">
+            <a:avLst/>
+          </a:prstGeom>
+          <a:solidFill>
+            <a:srgbClr val="FFFFFF"/>
+          </a:solidFill>
+          <a:ln w="25400">
+            <a:solidFill>
+              <a:srgbClr val="16A34A"/>
+            </a:solidFill>
+          </a:ln>
+          <a:effectLst/>
+        </p:spPr>
+        <p:style>
+          <a:lnRef idx="1">
+            <a:schemeClr val="accent1"/>
+          </a:lnRef>
+          <a:fillRef idx="3">
+            <a:schemeClr val="accent1"/>
+          </a:fillRef>
+          <a:effectRef idx="2">
+            <a:schemeClr val="accent1"/>
+          </a:effectRef>
+          <a:fontRef idx="minor">
+            <a:schemeClr val="lt1"/>
+          </a:fontRef>
+        </p:style>
+        <p:txBody>
+          <a:bodyPr rtlCol="0" anchor="ctr"/>
+          <a:lstStyle/>
+          <a:p/>
+        </p:txBody>
+      </p:sp>
+      <p:pic>
+        <p:nvPicPr>
+          <p:cNvPr id="32" name="Picture 31" descr="lambda.png"/>
+          <p:cNvPicPr>
+            <a:picLocks noChangeAspect="1"/>
+          </p:cNvPicPr>
+          <p:nvPr/>
+        </p:nvPicPr>
+        <p:blipFill>
+          <a:blip r:embed="rId5"/>
+          <a:stretch>
+            <a:fillRect/>
+          </a:stretch>
+        </p:blipFill>
+        <p:spPr>
+          <a:xfrm>
+            <a:off x="6007608" y="4160520"/>
+            <a:ext cx="384048" cy="384048"/>
+          </a:xfrm>
+          <a:prstGeom prst="rect">
+            <a:avLst/>
+          </a:prstGeom>
+        </p:spPr>
+      </p:pic>
+      <p:sp>
+        <p:nvSpPr>
+          <p:cNvPr id="33" name="TextBox 32"/>
+          <p:cNvSpPr txBox="1"/>
+          <p:nvPr/>
+        </p:nvSpPr>
+        <p:spPr>
+          <a:xfrm>
+            <a:off x="6519672" y="4160520"/>
+            <a:ext cx="2011680" cy="237744"/>
+          </a:xfrm>
+          <a:prstGeom prst="rect">
+            <a:avLst/>
+          </a:prstGeom>
+          <a:noFill/>
+        </p:spPr>
+        <p:txBody>
+          <a:bodyPr wrap="square" lIns="0" rIns="0" tIns="0" bIns="0">
+            <a:spAutoFit/>
+          </a:bodyPr>
+          <a:lstStyle/>
+          <a:p>
+            <a:pPr algn="l">
+              <a:lnSpc>
+                <a:spcPct val="100000"/>
+              </a:lnSpc>
+            </a:pPr>
+            <a:r>
+              <a:rPr sz="1200" b="1">
+                <a:solidFill>
+                  <a:srgbClr val="0F172A"/>
+                </a:solidFill>
+                <a:latin typeface="Segoe UI"/>
+              </a:rPr>
+              <a:t>submit / review</a:t>
+            </a:r>
+          </a:p>
+        </p:txBody>
+      </p:sp>
+      <p:sp>
+        <p:nvSpPr>
+          <p:cNvPr id="34" name="TextBox 33"/>
+          <p:cNvSpPr txBox="1"/>
+          <p:nvPr/>
+        </p:nvSpPr>
+        <p:spPr>
+          <a:xfrm>
+            <a:off x="6519672" y="4407408"/>
+            <a:ext cx="2011680" cy="457200"/>
+          </a:xfrm>
+          <a:prstGeom prst="rect">
+            <a:avLst/>
+          </a:prstGeom>
+          <a:noFill/>
+        </p:spPr>
+        <p:txBody>
+          <a:bodyPr wrap="square" lIns="0" rIns="0" tIns="0" bIns="0">
+            <a:spAutoFit/>
+          </a:bodyPr>
+          <a:lstStyle/>
+          <a:p>
+            <a:pPr algn="l">
+              <a:lnSpc>
+                <a:spcPct val="105000"/>
+              </a:lnSpc>
+            </a:pPr>
+            <a:r>
+              <a:rPr sz="950" b="0">
+                <a:solidFill>
+                  <a:srgbClr val="475569"/>
+                </a:solidFill>
+                <a:latin typeface="Segoe UI"/>
+              </a:rPr>
+              <a:t>the review gate</a:t>
+            </a:r>
+          </a:p>
+        </p:txBody>
+      </p:sp>
+      <p:sp>
+        <p:nvSpPr>
+          <p:cNvPr id="35" name="Rounded Rectangle 34"/>
+          <p:cNvSpPr/>
+          <p:nvPr/>
+        </p:nvSpPr>
+        <p:spPr>
+          <a:xfrm>
+            <a:off x="8074152" y="4114800"/>
+            <a:ext cx="457200" cy="201168"/>
+          </a:xfrm>
+          <a:prstGeom prst="roundRect">
+            <a:avLst/>
+          </a:prstGeom>
+          <a:solidFill>
+            <a:srgbClr val="16A34A"/>
+          </a:solidFill>
+          <a:ln>
+            <a:noFill/>
+          </a:ln>
+          <a:effectLst/>
+        </p:spPr>
+        <p:style>
+          <a:lnRef idx="1">
+            <a:schemeClr val="accent1"/>
+          </a:lnRef>
+          <a:fillRef idx="3">
+            <a:schemeClr val="accent1"/>
+          </a:fillRef>
+          <a:effectRef idx="2">
+            <a:schemeClr val="accent1"/>
+          </a:effectRef>
+          <a:fontRef idx="minor">
+            <a:schemeClr val="lt1"/>
+          </a:fontRef>
+        </p:style>
+        <p:txBody>
+          <a:bodyPr rtlCol="0" anchor="ctr"/>
+          <a:lstStyle/>
+          <a:p>
+            <a:pPr algn="ctr"/>
+            <a:r>
+              <a:rPr sz="750" b="1">
+                <a:solidFill>
+                  <a:srgbClr val="FFFFFF"/>
+                </a:solidFill>
+                <a:latin typeface="Segoe UI"/>
+              </a:rPr>
+              <a:t>NEW</a:t>
+            </a:r>
+          </a:p>
+        </p:txBody>
+      </p:sp>
+      <p:sp>
+        <p:nvSpPr>
+          <p:cNvPr id="36" name="TextBox 35"/>
+          <p:cNvSpPr txBox="1"/>
+          <p:nvPr/>
+        </p:nvSpPr>
+        <p:spPr>
+          <a:xfrm>
+            <a:off x="8915400" y="2258568"/>
+            <a:ext cx="2926080" cy="228600"/>
+          </a:xfrm>
+          <a:prstGeom prst="rect">
+            <a:avLst/>
+          </a:prstGeom>
+          <a:noFill/>
+        </p:spPr>
+        <p:txBody>
+          <a:bodyPr wrap="square" lIns="0" rIns="0" tIns="0" bIns="0">
+            <a:spAutoFit/>
+          </a:bodyPr>
+          <a:lstStyle/>
+          <a:p>
+            <a:pPr algn="l">
+              <a:lnSpc>
+                <a:spcPct val="100000"/>
+              </a:lnSpc>
+            </a:pPr>
+            <a:r>
+              <a:rPr sz="950" b="1">
+                <a:solidFill>
+                  <a:srgbClr val="DD344C"/>
+                </a:solidFill>
+                <a:latin typeface="Segoe UI"/>
+              </a:rPr>
+              <a:t>SANDBOX</a:t>
+            </a:r>
+          </a:p>
+        </p:txBody>
+      </p:sp>
+      <p:sp>
+        <p:nvSpPr>
+          <p:cNvPr id="37" name="Rounded Rectangle 36"/>
+          <p:cNvSpPr/>
+          <p:nvPr/>
+        </p:nvSpPr>
+        <p:spPr>
+          <a:xfrm>
+            <a:off x="8869680" y="2505456"/>
+            <a:ext cx="2834640" cy="676656"/>
+          </a:xfrm>
+          <a:prstGeom prst="roundRect">
+            <a:avLst/>
+          </a:prstGeom>
+          <a:solidFill>
+            <a:srgbClr val="FFFFFF"/>
+          </a:solidFill>
+          <a:ln w="25400">
             <a:solidFill>
               <a:srgbClr val="DD344C"/>
             </a:solidFill>
@@ -9960,55 +9657,40 @@
           <a:p/>
         </p:txBody>
       </p:sp>
-      <p:sp>
-        <p:nvSpPr>
-          <p:cNvPr id="8" name="TextBox 7"/>
+      <p:pic>
+        <p:nvPicPr>
+          <p:cNvPr id="38" name="Picture 37" descr="fargate.png"/>
+          <p:cNvPicPr>
+            <a:picLocks noChangeAspect="1"/>
+          </p:cNvPicPr>
+          <p:nvPr/>
+        </p:nvPicPr>
+        <p:blipFill>
+          <a:blip r:embed="rId6"/>
+          <a:stretch>
+            <a:fillRect/>
+          </a:stretch>
+        </p:blipFill>
+        <p:spPr>
+          <a:xfrm>
+            <a:off x="8979407" y="2624327"/>
+            <a:ext cx="384048" cy="384048"/>
+          </a:xfrm>
+          <a:prstGeom prst="rect">
+            <a:avLst/>
+          </a:prstGeom>
+        </p:spPr>
+      </p:pic>
+      <p:sp>
+        <p:nvSpPr>
+          <p:cNvPr id="39" name="TextBox 38"/>
           <p:cNvSpPr txBox="1"/>
           <p:nvPr/>
         </p:nvSpPr>
         <p:spPr>
           <a:xfrm>
-            <a:off x="1051560" y="5047488"/>
-            <a:ext cx="9966960" cy="731520"/>
-          </a:xfrm>
-          <a:prstGeom prst="rect">
-            <a:avLst/>
-          </a:prstGeom>
-          <a:noFill/>
-        </p:spPr>
-        <p:txBody>
-          <a:bodyPr wrap="square" lIns="0" rIns="0" tIns="0" bIns="0">
-            <a:spAutoFit/>
-          </a:bodyPr>
-          <a:lstStyle/>
-          <a:p>
-            <a:pPr algn="l">
-              <a:lnSpc>
-                <a:spcPct val="115000"/>
-              </a:lnSpc>
-            </a:pPr>
-            <a:r>
-              <a:rPr sz="1350" b="1">
-                <a:solidFill>
-                  <a:srgbClr val="991B1B"/>
-                </a:solidFill>
-                <a:latin typeface="Segoe UI"/>
-              </a:rPr>
-              <a:t>The cost is real and should be stated up front: a tool needing several chained calls, or an endpoint not known until runtime, does not fit. That limit is the price of a sandbox whose safety can actually be argued about rather than hoped for.</a:t>
-            </a:r>
-          </a:p>
-        </p:txBody>
-      </p:sp>
-      <p:sp>
-        <p:nvSpPr>
-          <p:cNvPr id="9" name="TextBox 8"/>
-          <p:cNvSpPr txBox="1"/>
-          <p:nvPr/>
-        </p:nvSpPr>
-        <p:spPr>
-          <a:xfrm>
-            <a:off x="777240" y="6007608"/>
-            <a:ext cx="10515600" cy="457200"/>
+            <a:off x="9491472" y="2624327"/>
+            <a:ext cx="2103120" cy="237744"/>
           </a:xfrm>
           <a:prstGeom prst="rect">
             <a:avLst/>
@@ -10027,13 +9709,1193 @@
               </a:lnSpc>
             </a:pPr>
             <a:r>
-              <a:rPr sz="1350" b="0">
+              <a:rPr sz="1200" b="1">
+                <a:solidFill>
+                  <a:srgbClr val="0F172A"/>
+                </a:solidFill>
+                <a:latin typeface="Segoe UI"/>
+              </a:rPr>
+              <a:t>tool-runtime</a:t>
+            </a:r>
+          </a:p>
+        </p:txBody>
+      </p:sp>
+      <p:sp>
+        <p:nvSpPr>
+          <p:cNvPr id="40" name="TextBox 39"/>
+          <p:cNvSpPr txBox="1"/>
+          <p:nvPr/>
+        </p:nvSpPr>
+        <p:spPr>
+          <a:xfrm>
+            <a:off x="9491472" y="2871215"/>
+            <a:ext cx="2103120" cy="457200"/>
+          </a:xfrm>
+          <a:prstGeom prst="rect">
+            <a:avLst/>
+          </a:prstGeom>
+          <a:noFill/>
+        </p:spPr>
+        <p:txBody>
+          <a:bodyPr wrap="square" lIns="0" rIns="0" tIns="0" bIns="0">
+            <a:spAutoFit/>
+          </a:bodyPr>
+          <a:lstStyle/>
+          <a:p>
+            <a:pPr algn="l">
+              <a:lnSpc>
+                <a:spcPct val="105000"/>
+              </a:lnSpc>
+            </a:pPr>
+            <a:r>
+              <a:rPr sz="950" b="0">
                 <a:solidFill>
                   <a:srgbClr val="475569"/>
                 </a:solidFill>
                 <a:latin typeface="Segoe UI"/>
               </a:rPr>
-              <a:t>Two ways to run it: Fargate tasks, or Lambda in a VPC with no NAT gateway. Both give no egress; the Lambda route stays inside the free tier.</a:t>
+              <a:t>no network, null role</a:t>
+            </a:r>
+          </a:p>
+        </p:txBody>
+      </p:sp>
+      <p:sp>
+        <p:nvSpPr>
+          <p:cNvPr id="41" name="Rounded Rectangle 40"/>
+          <p:cNvSpPr/>
+          <p:nvPr/>
+        </p:nvSpPr>
+        <p:spPr>
+          <a:xfrm>
+            <a:off x="11137392" y="2578608"/>
+            <a:ext cx="457200" cy="201168"/>
+          </a:xfrm>
+          <a:prstGeom prst="roundRect">
+            <a:avLst/>
+          </a:prstGeom>
+          <a:solidFill>
+            <a:srgbClr val="16A34A"/>
+          </a:solidFill>
+          <a:ln>
+            <a:noFill/>
+          </a:ln>
+          <a:effectLst/>
+        </p:spPr>
+        <p:style>
+          <a:lnRef idx="1">
+            <a:schemeClr val="accent1"/>
+          </a:lnRef>
+          <a:fillRef idx="3">
+            <a:schemeClr val="accent1"/>
+          </a:fillRef>
+          <a:effectRef idx="2">
+            <a:schemeClr val="accent1"/>
+          </a:effectRef>
+          <a:fontRef idx="minor">
+            <a:schemeClr val="lt1"/>
+          </a:fontRef>
+        </p:style>
+        <p:txBody>
+          <a:bodyPr rtlCol="0" anchor="ctr"/>
+          <a:lstStyle/>
+          <a:p>
+            <a:pPr algn="ctr"/>
+            <a:r>
+              <a:rPr sz="750" b="1">
+                <a:solidFill>
+                  <a:srgbClr val="FFFFFF"/>
+                </a:solidFill>
+                <a:latin typeface="Segoe UI"/>
+              </a:rPr>
+              <a:t>NEW</a:t>
+            </a:r>
+          </a:p>
+        </p:txBody>
+      </p:sp>
+      <p:sp>
+        <p:nvSpPr>
+          <p:cNvPr id="42" name="Rounded Rectangle 41"/>
+          <p:cNvSpPr/>
+          <p:nvPr/>
+        </p:nvSpPr>
+        <p:spPr>
+          <a:xfrm>
+            <a:off x="8869680" y="3273551"/>
+            <a:ext cx="2834640" cy="676656"/>
+          </a:xfrm>
+          <a:prstGeom prst="roundRect">
+            <a:avLst/>
+          </a:prstGeom>
+          <a:solidFill>
+            <a:srgbClr val="FFFFFF"/>
+          </a:solidFill>
+          <a:ln w="25400">
+            <a:solidFill>
+              <a:srgbClr val="DD344C"/>
+            </a:solidFill>
+          </a:ln>
+          <a:effectLst/>
+        </p:spPr>
+        <p:style>
+          <a:lnRef idx="1">
+            <a:schemeClr val="accent1"/>
+          </a:lnRef>
+          <a:fillRef idx="3">
+            <a:schemeClr val="accent1"/>
+          </a:fillRef>
+          <a:effectRef idx="2">
+            <a:schemeClr val="accent1"/>
+          </a:effectRef>
+          <a:fontRef idx="minor">
+            <a:schemeClr val="lt1"/>
+          </a:fontRef>
+        </p:style>
+        <p:txBody>
+          <a:bodyPr rtlCol="0" anchor="ctr"/>
+          <a:lstStyle/>
+          <a:p/>
+        </p:txBody>
+      </p:sp>
+      <p:pic>
+        <p:nvPicPr>
+          <p:cNvPr id="43" name="Picture 42" descr="lambda.png"/>
+          <p:cNvPicPr>
+            <a:picLocks noChangeAspect="1"/>
+          </p:cNvPicPr>
+          <p:nvPr/>
+        </p:nvPicPr>
+        <p:blipFill>
+          <a:blip r:embed="rId5"/>
+          <a:stretch>
+            <a:fillRect/>
+          </a:stretch>
+        </p:blipFill>
+        <p:spPr>
+          <a:xfrm>
+            <a:off x="8979407" y="3392423"/>
+            <a:ext cx="384048" cy="384048"/>
+          </a:xfrm>
+          <a:prstGeom prst="rect">
+            <a:avLst/>
+          </a:prstGeom>
+        </p:spPr>
+      </p:pic>
+      <p:sp>
+        <p:nvSpPr>
+          <p:cNvPr id="44" name="TextBox 43"/>
+          <p:cNvSpPr txBox="1"/>
+          <p:nvPr/>
+        </p:nvSpPr>
+        <p:spPr>
+          <a:xfrm>
+            <a:off x="9491472" y="3392423"/>
+            <a:ext cx="2103120" cy="237744"/>
+          </a:xfrm>
+          <a:prstGeom prst="rect">
+            <a:avLst/>
+          </a:prstGeom>
+          <a:noFill/>
+        </p:spPr>
+        <p:txBody>
+          <a:bodyPr wrap="square" lIns="0" rIns="0" tIns="0" bIns="0">
+            <a:spAutoFit/>
+          </a:bodyPr>
+          <a:lstStyle/>
+          <a:p>
+            <a:pPr algn="l">
+              <a:lnSpc>
+                <a:spcPct val="100000"/>
+              </a:lnSpc>
+            </a:pPr>
+            <a:r>
+              <a:rPr sz="1200" b="1">
+                <a:solidFill>
+                  <a:srgbClr val="0F172A"/>
+                </a:solidFill>
+                <a:latin typeface="Segoe UI"/>
+              </a:rPr>
+              <a:t>fetcher-fn</a:t>
+            </a:r>
+          </a:p>
+        </p:txBody>
+      </p:sp>
+      <p:sp>
+        <p:nvSpPr>
+          <p:cNvPr id="45" name="TextBox 44"/>
+          <p:cNvSpPr txBox="1"/>
+          <p:nvPr/>
+        </p:nvSpPr>
+        <p:spPr>
+          <a:xfrm>
+            <a:off x="9491472" y="3639311"/>
+            <a:ext cx="2103120" cy="457200"/>
+          </a:xfrm>
+          <a:prstGeom prst="rect">
+            <a:avLst/>
+          </a:prstGeom>
+          <a:noFill/>
+        </p:spPr>
+        <p:txBody>
+          <a:bodyPr wrap="square" lIns="0" rIns="0" tIns="0" bIns="0">
+            <a:spAutoFit/>
+          </a:bodyPr>
+          <a:lstStyle/>
+          <a:p>
+            <a:pPr algn="l">
+              <a:lnSpc>
+                <a:spcPct val="105000"/>
+              </a:lnSpc>
+            </a:pPr>
+            <a:r>
+              <a:rPr sz="950" b="0">
+                <a:solidFill>
+                  <a:srgbClr val="475569"/>
+                </a:solidFill>
+                <a:latin typeface="Segoe UI"/>
+              </a:rPr>
+              <a:t>the only thing online</a:t>
+            </a:r>
+          </a:p>
+        </p:txBody>
+      </p:sp>
+      <p:sp>
+        <p:nvSpPr>
+          <p:cNvPr id="46" name="Rounded Rectangle 45"/>
+          <p:cNvSpPr/>
+          <p:nvPr/>
+        </p:nvSpPr>
+        <p:spPr>
+          <a:xfrm>
+            <a:off x="11137392" y="3346703"/>
+            <a:ext cx="457200" cy="201168"/>
+          </a:xfrm>
+          <a:prstGeom prst="roundRect">
+            <a:avLst/>
+          </a:prstGeom>
+          <a:solidFill>
+            <a:srgbClr val="16A34A"/>
+          </a:solidFill>
+          <a:ln>
+            <a:noFill/>
+          </a:ln>
+          <a:effectLst/>
+        </p:spPr>
+        <p:style>
+          <a:lnRef idx="1">
+            <a:schemeClr val="accent1"/>
+          </a:lnRef>
+          <a:fillRef idx="3">
+            <a:schemeClr val="accent1"/>
+          </a:fillRef>
+          <a:effectRef idx="2">
+            <a:schemeClr val="accent1"/>
+          </a:effectRef>
+          <a:fontRef idx="minor">
+            <a:schemeClr val="lt1"/>
+          </a:fontRef>
+        </p:style>
+        <p:txBody>
+          <a:bodyPr rtlCol="0" anchor="ctr"/>
+          <a:lstStyle/>
+          <a:p>
+            <a:pPr algn="ctr"/>
+            <a:r>
+              <a:rPr sz="750" b="1">
+                <a:solidFill>
+                  <a:srgbClr val="FFFFFF"/>
+                </a:solidFill>
+                <a:latin typeface="Segoe UI"/>
+              </a:rPr>
+              <a:t>NEW</a:t>
+            </a:r>
+          </a:p>
+        </p:txBody>
+      </p:sp>
+      <p:sp>
+        <p:nvSpPr>
+          <p:cNvPr id="47" name="Rounded Rectangle 46"/>
+          <p:cNvSpPr/>
+          <p:nvPr/>
+        </p:nvSpPr>
+        <p:spPr>
+          <a:xfrm>
+            <a:off x="8869680" y="4041648"/>
+            <a:ext cx="2834640" cy="676656"/>
+          </a:xfrm>
+          <a:prstGeom prst="roundRect">
+            <a:avLst/>
+          </a:prstGeom>
+          <a:solidFill>
+            <a:srgbClr val="FFFFFF"/>
+          </a:solidFill>
+          <a:ln w="15875">
+            <a:solidFill>
+              <a:srgbClr val="C925D1"/>
+            </a:solidFill>
+          </a:ln>
+          <a:effectLst/>
+        </p:spPr>
+        <p:style>
+          <a:lnRef idx="1">
+            <a:schemeClr val="accent1"/>
+          </a:lnRef>
+          <a:fillRef idx="3">
+            <a:schemeClr val="accent1"/>
+          </a:fillRef>
+          <a:effectRef idx="2">
+            <a:schemeClr val="accent1"/>
+          </a:effectRef>
+          <a:fontRef idx="minor">
+            <a:schemeClr val="lt1"/>
+          </a:fontRef>
+        </p:style>
+        <p:txBody>
+          <a:bodyPr rtlCol="0" anchor="ctr"/>
+          <a:lstStyle/>
+          <a:p/>
+        </p:txBody>
+      </p:sp>
+      <p:pic>
+        <p:nvPicPr>
+          <p:cNvPr id="48" name="Picture 47" descr="dynamodb.png"/>
+          <p:cNvPicPr>
+            <a:picLocks noChangeAspect="1"/>
+          </p:cNvPicPr>
+          <p:nvPr/>
+        </p:nvPicPr>
+        <p:blipFill>
+          <a:blip r:embed="rId7"/>
+          <a:stretch>
+            <a:fillRect/>
+          </a:stretch>
+        </p:blipFill>
+        <p:spPr>
+          <a:xfrm>
+            <a:off x="8979407" y="4160520"/>
+            <a:ext cx="384048" cy="384048"/>
+          </a:xfrm>
+          <a:prstGeom prst="rect">
+            <a:avLst/>
+          </a:prstGeom>
+        </p:spPr>
+      </p:pic>
+      <p:sp>
+        <p:nvSpPr>
+          <p:cNvPr id="49" name="TextBox 48"/>
+          <p:cNvSpPr txBox="1"/>
+          <p:nvPr/>
+        </p:nvSpPr>
+        <p:spPr>
+          <a:xfrm>
+            <a:off x="9491472" y="4160520"/>
+            <a:ext cx="2103120" cy="237744"/>
+          </a:xfrm>
+          <a:prstGeom prst="rect">
+            <a:avLst/>
+          </a:prstGeom>
+          <a:noFill/>
+        </p:spPr>
+        <p:txBody>
+          <a:bodyPr wrap="square" lIns="0" rIns="0" tIns="0" bIns="0">
+            <a:spAutoFit/>
+          </a:bodyPr>
+          <a:lstStyle/>
+          <a:p>
+            <a:pPr algn="l">
+              <a:lnSpc>
+                <a:spcPct val="100000"/>
+              </a:lnSpc>
+            </a:pPr>
+            <a:r>
+              <a:rPr sz="1200" b="1">
+                <a:solidFill>
+                  <a:srgbClr val="0F172A"/>
+                </a:solidFill>
+                <a:latin typeface="Segoe UI"/>
+              </a:rPr>
+              <a:t>7 tables</a:t>
+            </a:r>
+          </a:p>
+        </p:txBody>
+      </p:sp>
+      <p:sp>
+        <p:nvSpPr>
+          <p:cNvPr id="50" name="TextBox 49"/>
+          <p:cNvSpPr txBox="1"/>
+          <p:nvPr/>
+        </p:nvSpPr>
+        <p:spPr>
+          <a:xfrm>
+            <a:off x="9491472" y="4407408"/>
+            <a:ext cx="2103120" cy="457200"/>
+          </a:xfrm>
+          <a:prstGeom prst="rect">
+            <a:avLst/>
+          </a:prstGeom>
+          <a:noFill/>
+        </p:spPr>
+        <p:txBody>
+          <a:bodyPr wrap="square" lIns="0" rIns="0" tIns="0" bIns="0">
+            <a:spAutoFit/>
+          </a:bodyPr>
+          <a:lstStyle/>
+          <a:p>
+            <a:pPr algn="l">
+              <a:lnSpc>
+                <a:spcPct val="105000"/>
+              </a:lnSpc>
+            </a:pPr>
+            <a:r>
+              <a:rPr sz="950" b="0">
+                <a:solidFill>
+                  <a:srgbClr val="475569"/>
+                </a:solidFill>
+                <a:latin typeface="Segoe UI"/>
+              </a:rPr>
+              <a:t>3 existing, 4 new</a:t>
+            </a:r>
+          </a:p>
+        </p:txBody>
+      </p:sp>
+      <p:sp>
+        <p:nvSpPr>
+          <p:cNvPr id="51" name="Rounded Rectangle 50"/>
+          <p:cNvSpPr/>
+          <p:nvPr/>
+        </p:nvSpPr>
+        <p:spPr>
+          <a:xfrm>
+            <a:off x="777240" y="4882896"/>
+            <a:ext cx="2286000" cy="676656"/>
+          </a:xfrm>
+          <a:prstGeom prst="roundRect">
+            <a:avLst/>
+          </a:prstGeom>
+          <a:solidFill>
+            <a:srgbClr val="FFFFFF"/>
+          </a:solidFill>
+          <a:ln w="25400">
+            <a:solidFill>
+              <a:srgbClr val="E7157B"/>
+            </a:solidFill>
+          </a:ln>
+          <a:effectLst/>
+        </p:spPr>
+        <p:style>
+          <a:lnRef idx="1">
+            <a:schemeClr val="accent1"/>
+          </a:lnRef>
+          <a:fillRef idx="3">
+            <a:schemeClr val="accent1"/>
+          </a:fillRef>
+          <a:effectRef idx="2">
+            <a:schemeClr val="accent1"/>
+          </a:effectRef>
+          <a:fontRef idx="minor">
+            <a:schemeClr val="lt1"/>
+          </a:fontRef>
+        </p:style>
+        <p:txBody>
+          <a:bodyPr rtlCol="0" anchor="ctr"/>
+          <a:lstStyle/>
+          <a:p/>
+        </p:txBody>
+      </p:sp>
+      <p:pic>
+        <p:nvPicPr>
+          <p:cNvPr id="52" name="Picture 51" descr="eventbridge.png"/>
+          <p:cNvPicPr>
+            <a:picLocks noChangeAspect="1"/>
+          </p:cNvPicPr>
+          <p:nvPr/>
+        </p:nvPicPr>
+        <p:blipFill>
+          <a:blip r:embed="rId8"/>
+          <a:stretch>
+            <a:fillRect/>
+          </a:stretch>
+        </p:blipFill>
+        <p:spPr>
+          <a:xfrm>
+            <a:off x="886968" y="5001768"/>
+            <a:ext cx="384048" cy="384048"/>
+          </a:xfrm>
+          <a:prstGeom prst="rect">
+            <a:avLst/>
+          </a:prstGeom>
+        </p:spPr>
+      </p:pic>
+      <p:sp>
+        <p:nvSpPr>
+          <p:cNvPr id="53" name="TextBox 52"/>
+          <p:cNvSpPr txBox="1"/>
+          <p:nvPr/>
+        </p:nvSpPr>
+        <p:spPr>
+          <a:xfrm>
+            <a:off x="1399032" y="5001768"/>
+            <a:ext cx="1554480" cy="237744"/>
+          </a:xfrm>
+          <a:prstGeom prst="rect">
+            <a:avLst/>
+          </a:prstGeom>
+          <a:noFill/>
+        </p:spPr>
+        <p:txBody>
+          <a:bodyPr wrap="square" lIns="0" rIns="0" tIns="0" bIns="0">
+            <a:spAutoFit/>
+          </a:bodyPr>
+          <a:lstStyle/>
+          <a:p>
+            <a:pPr algn="l">
+              <a:lnSpc>
+                <a:spcPct val="100000"/>
+              </a:lnSpc>
+            </a:pPr>
+            <a:r>
+              <a:rPr sz="1200" b="1">
+                <a:solidFill>
+                  <a:srgbClr val="0F172A"/>
+                </a:solidFill>
+                <a:latin typeface="Segoe UI"/>
+              </a:rPr>
+              <a:t>EventBridge</a:t>
+            </a:r>
+          </a:p>
+        </p:txBody>
+      </p:sp>
+      <p:sp>
+        <p:nvSpPr>
+          <p:cNvPr id="54" name="TextBox 53"/>
+          <p:cNvSpPr txBox="1"/>
+          <p:nvPr/>
+        </p:nvSpPr>
+        <p:spPr>
+          <a:xfrm>
+            <a:off x="1399032" y="5248656"/>
+            <a:ext cx="1554480" cy="457200"/>
+          </a:xfrm>
+          <a:prstGeom prst="rect">
+            <a:avLst/>
+          </a:prstGeom>
+          <a:noFill/>
+        </p:spPr>
+        <p:txBody>
+          <a:bodyPr wrap="square" lIns="0" rIns="0" tIns="0" bIns="0">
+            <a:spAutoFit/>
+          </a:bodyPr>
+          <a:lstStyle/>
+          <a:p>
+            <a:pPr algn="l">
+              <a:lnSpc>
+                <a:spcPct val="105000"/>
+              </a:lnSpc>
+            </a:pPr>
+            <a:r>
+              <a:rPr sz="950" b="0">
+                <a:solidFill>
+                  <a:srgbClr val="475569"/>
+                </a:solidFill>
+                <a:latin typeface="Segoe UI"/>
+              </a:rPr>
+              <a:t>nightly jobs</a:t>
+            </a:r>
+          </a:p>
+        </p:txBody>
+      </p:sp>
+      <p:sp>
+        <p:nvSpPr>
+          <p:cNvPr id="55" name="Rounded Rectangle 54"/>
+          <p:cNvSpPr/>
+          <p:nvPr/>
+        </p:nvSpPr>
+        <p:spPr>
+          <a:xfrm>
+            <a:off x="2496312" y="4956048"/>
+            <a:ext cx="457200" cy="201168"/>
+          </a:xfrm>
+          <a:prstGeom prst="roundRect">
+            <a:avLst/>
+          </a:prstGeom>
+          <a:solidFill>
+            <a:srgbClr val="16A34A"/>
+          </a:solidFill>
+          <a:ln>
+            <a:noFill/>
+          </a:ln>
+          <a:effectLst/>
+        </p:spPr>
+        <p:style>
+          <a:lnRef idx="1">
+            <a:schemeClr val="accent1"/>
+          </a:lnRef>
+          <a:fillRef idx="3">
+            <a:schemeClr val="accent1"/>
+          </a:fillRef>
+          <a:effectRef idx="2">
+            <a:schemeClr val="accent1"/>
+          </a:effectRef>
+          <a:fontRef idx="minor">
+            <a:schemeClr val="lt1"/>
+          </a:fontRef>
+        </p:style>
+        <p:txBody>
+          <a:bodyPr rtlCol="0" anchor="ctr"/>
+          <a:lstStyle/>
+          <a:p>
+            <a:pPr algn="ctr"/>
+            <a:r>
+              <a:rPr sz="750" b="1">
+                <a:solidFill>
+                  <a:srgbClr val="FFFFFF"/>
+                </a:solidFill>
+                <a:latin typeface="Segoe UI"/>
+              </a:rPr>
+              <a:t>NEW</a:t>
+            </a:r>
+          </a:p>
+        </p:txBody>
+      </p:sp>
+      <p:sp>
+        <p:nvSpPr>
+          <p:cNvPr id="56" name="Rounded Rectangle 55"/>
+          <p:cNvSpPr/>
+          <p:nvPr/>
+        </p:nvSpPr>
+        <p:spPr>
+          <a:xfrm>
+            <a:off x="3246120" y="4882896"/>
+            <a:ext cx="2468880" cy="676656"/>
+          </a:xfrm>
+          <a:prstGeom prst="roundRect">
+            <a:avLst/>
+          </a:prstGeom>
+          <a:solidFill>
+            <a:srgbClr val="FFFFFF"/>
+          </a:solidFill>
+          <a:ln w="25400">
+            <a:solidFill>
+              <a:srgbClr val="16A34A"/>
+            </a:solidFill>
+          </a:ln>
+          <a:effectLst/>
+        </p:spPr>
+        <p:style>
+          <a:lnRef idx="1">
+            <a:schemeClr val="accent1"/>
+          </a:lnRef>
+          <a:fillRef idx="3">
+            <a:schemeClr val="accent1"/>
+          </a:fillRef>
+          <a:effectRef idx="2">
+            <a:schemeClr val="accent1"/>
+          </a:effectRef>
+          <a:fontRef idx="minor">
+            <a:schemeClr val="lt1"/>
+          </a:fontRef>
+        </p:style>
+        <p:txBody>
+          <a:bodyPr rtlCol="0" anchor="ctr"/>
+          <a:lstStyle/>
+          <a:p/>
+        </p:txBody>
+      </p:sp>
+      <p:pic>
+        <p:nvPicPr>
+          <p:cNvPr id="57" name="Picture 56" descr="lambda.png"/>
+          <p:cNvPicPr>
+            <a:picLocks noChangeAspect="1"/>
+          </p:cNvPicPr>
+          <p:nvPr/>
+        </p:nvPicPr>
+        <p:blipFill>
+          <a:blip r:embed="rId5"/>
+          <a:stretch>
+            <a:fillRect/>
+          </a:stretch>
+        </p:blipFill>
+        <p:spPr>
+          <a:xfrm>
+            <a:off x="3355848" y="5001768"/>
+            <a:ext cx="384048" cy="384048"/>
+          </a:xfrm>
+          <a:prstGeom prst="rect">
+            <a:avLst/>
+          </a:prstGeom>
+        </p:spPr>
+      </p:pic>
+      <p:sp>
+        <p:nvSpPr>
+          <p:cNvPr id="58" name="TextBox 57"/>
+          <p:cNvSpPr txBox="1"/>
+          <p:nvPr/>
+        </p:nvSpPr>
+        <p:spPr>
+          <a:xfrm>
+            <a:off x="3867911" y="5001768"/>
+            <a:ext cx="1737360" cy="237744"/>
+          </a:xfrm>
+          <a:prstGeom prst="rect">
+            <a:avLst/>
+          </a:prstGeom>
+          <a:noFill/>
+        </p:spPr>
+        <p:txBody>
+          <a:bodyPr wrap="square" lIns="0" rIns="0" tIns="0" bIns="0">
+            <a:spAutoFit/>
+          </a:bodyPr>
+          <a:lstStyle/>
+          <a:p>
+            <a:pPr algn="l">
+              <a:lnSpc>
+                <a:spcPct val="100000"/>
+              </a:lnSpc>
+            </a:pPr>
+            <a:r>
+              <a:rPr sz="1200" b="1">
+                <a:solidFill>
+                  <a:srgbClr val="0F172A"/>
+                </a:solidFill>
+                <a:latin typeface="Segoe UI"/>
+              </a:rPr>
+              <a:t>cluster + score</a:t>
+            </a:r>
+          </a:p>
+        </p:txBody>
+      </p:sp>
+      <p:sp>
+        <p:nvSpPr>
+          <p:cNvPr id="59" name="TextBox 58"/>
+          <p:cNvSpPr txBox="1"/>
+          <p:nvPr/>
+        </p:nvSpPr>
+        <p:spPr>
+          <a:xfrm>
+            <a:off x="3867911" y="5248656"/>
+            <a:ext cx="1737360" cy="457200"/>
+          </a:xfrm>
+          <a:prstGeom prst="rect">
+            <a:avLst/>
+          </a:prstGeom>
+          <a:noFill/>
+        </p:spPr>
+        <p:txBody>
+          <a:bodyPr wrap="square" lIns="0" rIns="0" tIns="0" bIns="0">
+            <a:spAutoFit/>
+          </a:bodyPr>
+          <a:lstStyle/>
+          <a:p>
+            <a:pPr algn="l">
+              <a:lnSpc>
+                <a:spcPct val="105000"/>
+              </a:lnSpc>
+            </a:pPr>
+            <a:r>
+              <a:rPr sz="950" b="0">
+                <a:solidFill>
+                  <a:srgbClr val="475569"/>
+                </a:solidFill>
+                <a:latin typeface="Segoe UI"/>
+              </a:rPr>
+              <a:t>replay the log</a:t>
+            </a:r>
+          </a:p>
+        </p:txBody>
+      </p:sp>
+      <p:sp>
+        <p:nvSpPr>
+          <p:cNvPr id="60" name="Rounded Rectangle 59"/>
+          <p:cNvSpPr/>
+          <p:nvPr/>
+        </p:nvSpPr>
+        <p:spPr>
+          <a:xfrm>
+            <a:off x="5148072" y="4956048"/>
+            <a:ext cx="457200" cy="201168"/>
+          </a:xfrm>
+          <a:prstGeom prst="roundRect">
+            <a:avLst/>
+          </a:prstGeom>
+          <a:solidFill>
+            <a:srgbClr val="16A34A"/>
+          </a:solidFill>
+          <a:ln>
+            <a:noFill/>
+          </a:ln>
+          <a:effectLst/>
+        </p:spPr>
+        <p:style>
+          <a:lnRef idx="1">
+            <a:schemeClr val="accent1"/>
+          </a:lnRef>
+          <a:fillRef idx="3">
+            <a:schemeClr val="accent1"/>
+          </a:fillRef>
+          <a:effectRef idx="2">
+            <a:schemeClr val="accent1"/>
+          </a:effectRef>
+          <a:fontRef idx="minor">
+            <a:schemeClr val="lt1"/>
+          </a:fontRef>
+        </p:style>
+        <p:txBody>
+          <a:bodyPr rtlCol="0" anchor="ctr"/>
+          <a:lstStyle/>
+          <a:p>
+            <a:pPr algn="ctr"/>
+            <a:r>
+              <a:rPr sz="750" b="1">
+                <a:solidFill>
+                  <a:srgbClr val="FFFFFF"/>
+                </a:solidFill>
+                <a:latin typeface="Segoe UI"/>
+              </a:rPr>
+              <a:t>NEW</a:t>
+            </a:r>
+          </a:p>
+        </p:txBody>
+      </p:sp>
+      <p:sp>
+        <p:nvSpPr>
+          <p:cNvPr id="61" name="Rounded Rectangle 60"/>
+          <p:cNvSpPr/>
+          <p:nvPr/>
+        </p:nvSpPr>
+        <p:spPr>
+          <a:xfrm>
+            <a:off x="5897880" y="4882896"/>
+            <a:ext cx="2743200" cy="676656"/>
+          </a:xfrm>
+          <a:prstGeom prst="roundRect">
+            <a:avLst/>
+          </a:prstGeom>
+          <a:solidFill>
+            <a:srgbClr val="FFFFFF"/>
+          </a:solidFill>
+          <a:ln w="25400">
+            <a:solidFill>
+              <a:srgbClr val="8C4FFF"/>
+            </a:solidFill>
+          </a:ln>
+          <a:effectLst/>
+        </p:spPr>
+        <p:style>
+          <a:lnRef idx="1">
+            <a:schemeClr val="accent1"/>
+          </a:lnRef>
+          <a:fillRef idx="3">
+            <a:schemeClr val="accent1"/>
+          </a:fillRef>
+          <a:effectRef idx="2">
+            <a:schemeClr val="accent1"/>
+          </a:effectRef>
+          <a:fontRef idx="minor">
+            <a:schemeClr val="lt1"/>
+          </a:fontRef>
+        </p:style>
+        <p:txBody>
+          <a:bodyPr rtlCol="0" anchor="ctr"/>
+          <a:lstStyle/>
+          <a:p/>
+        </p:txBody>
+      </p:sp>
+      <p:pic>
+        <p:nvPicPr>
+          <p:cNvPr id="62" name="Picture 61" descr="cloudfront.png"/>
+          <p:cNvPicPr>
+            <a:picLocks noChangeAspect="1"/>
+          </p:cNvPicPr>
+          <p:nvPr/>
+        </p:nvPicPr>
+        <p:blipFill>
+          <a:blip r:embed="rId9"/>
+          <a:stretch>
+            <a:fillRect/>
+          </a:stretch>
+        </p:blipFill>
+        <p:spPr>
+          <a:xfrm>
+            <a:off x="6007608" y="5001768"/>
+            <a:ext cx="384048" cy="384048"/>
+          </a:xfrm>
+          <a:prstGeom prst="rect">
+            <a:avLst/>
+          </a:prstGeom>
+        </p:spPr>
+      </p:pic>
+      <p:sp>
+        <p:nvSpPr>
+          <p:cNvPr id="63" name="TextBox 62"/>
+          <p:cNvSpPr txBox="1"/>
+          <p:nvPr/>
+        </p:nvSpPr>
+        <p:spPr>
+          <a:xfrm>
+            <a:off x="6519672" y="5001768"/>
+            <a:ext cx="2011680" cy="237744"/>
+          </a:xfrm>
+          <a:prstGeom prst="rect">
+            <a:avLst/>
+          </a:prstGeom>
+          <a:noFill/>
+        </p:spPr>
+        <p:txBody>
+          <a:bodyPr wrap="square" lIns="0" rIns="0" tIns="0" bIns="0">
+            <a:spAutoFit/>
+          </a:bodyPr>
+          <a:lstStyle/>
+          <a:p>
+            <a:pPr algn="l">
+              <a:lnSpc>
+                <a:spcPct val="100000"/>
+              </a:lnSpc>
+            </a:pPr>
+            <a:r>
+              <a:rPr sz="1200" b="1">
+                <a:solidFill>
+                  <a:srgbClr val="0F172A"/>
+                </a:solidFill>
+                <a:latin typeface="Segoe UI"/>
+              </a:rPr>
+              <a:t>gaps board</a:t>
+            </a:r>
+          </a:p>
+        </p:txBody>
+      </p:sp>
+      <p:sp>
+        <p:nvSpPr>
+          <p:cNvPr id="64" name="TextBox 63"/>
+          <p:cNvSpPr txBox="1"/>
+          <p:nvPr/>
+        </p:nvSpPr>
+        <p:spPr>
+          <a:xfrm>
+            <a:off x="6519672" y="5248656"/>
+            <a:ext cx="2011680" cy="457200"/>
+          </a:xfrm>
+          <a:prstGeom prst="rect">
+            <a:avLst/>
+          </a:prstGeom>
+          <a:noFill/>
+        </p:spPr>
+        <p:txBody>
+          <a:bodyPr wrap="square" lIns="0" rIns="0" tIns="0" bIns="0">
+            <a:spAutoFit/>
+          </a:bodyPr>
+          <a:lstStyle/>
+          <a:p>
+            <a:pPr algn="l">
+              <a:lnSpc>
+                <a:spcPct val="105000"/>
+              </a:lnSpc>
+            </a:pPr>
+            <a:r>
+              <a:rPr sz="950" b="0">
+                <a:solidFill>
+                  <a:srgbClr val="475569"/>
+                </a:solidFill>
+                <a:latin typeface="Segoe UI"/>
+              </a:rPr>
+              <a:t>CloudFront + S3</a:t>
+            </a:r>
+          </a:p>
+        </p:txBody>
+      </p:sp>
+      <p:sp>
+        <p:nvSpPr>
+          <p:cNvPr id="65" name="Rounded Rectangle 64"/>
+          <p:cNvSpPr/>
+          <p:nvPr/>
+        </p:nvSpPr>
+        <p:spPr>
+          <a:xfrm>
+            <a:off x="8074152" y="4956048"/>
+            <a:ext cx="457200" cy="201168"/>
+          </a:xfrm>
+          <a:prstGeom prst="roundRect">
+            <a:avLst/>
+          </a:prstGeom>
+          <a:solidFill>
+            <a:srgbClr val="16A34A"/>
+          </a:solidFill>
+          <a:ln>
+            <a:noFill/>
+          </a:ln>
+          <a:effectLst/>
+        </p:spPr>
+        <p:style>
+          <a:lnRef idx="1">
+            <a:schemeClr val="accent1"/>
+          </a:lnRef>
+          <a:fillRef idx="3">
+            <a:schemeClr val="accent1"/>
+          </a:fillRef>
+          <a:effectRef idx="2">
+            <a:schemeClr val="accent1"/>
+          </a:effectRef>
+          <a:fontRef idx="minor">
+            <a:schemeClr val="lt1"/>
+          </a:fontRef>
+        </p:style>
+        <p:txBody>
+          <a:bodyPr rtlCol="0" anchor="ctr"/>
+          <a:lstStyle/>
+          <a:p>
+            <a:pPr algn="ctr"/>
+            <a:r>
+              <a:rPr sz="750" b="1">
+                <a:solidFill>
+                  <a:srgbClr val="FFFFFF"/>
+                </a:solidFill>
+                <a:latin typeface="Segoe UI"/>
+              </a:rPr>
+              <a:t>NEW</a:t>
+            </a:r>
+          </a:p>
+        </p:txBody>
+      </p:sp>
+      <p:sp>
+        <p:nvSpPr>
+          <p:cNvPr id="66" name="Rounded Rectangle 65"/>
+          <p:cNvSpPr/>
+          <p:nvPr/>
+        </p:nvSpPr>
+        <p:spPr>
+          <a:xfrm>
+            <a:off x="8869680" y="4882896"/>
+            <a:ext cx="2834640" cy="676656"/>
+          </a:xfrm>
+          <a:prstGeom prst="roundRect">
+            <a:avLst/>
+          </a:prstGeom>
+          <a:solidFill>
+            <a:srgbClr val="FFFFFF"/>
+          </a:solidFill>
+          <a:ln w="15875">
+            <a:solidFill>
+              <a:srgbClr val="01A88D"/>
+            </a:solidFill>
+          </a:ln>
+          <a:effectLst/>
+        </p:spPr>
+        <p:style>
+          <a:lnRef idx="1">
+            <a:schemeClr val="accent1"/>
+          </a:lnRef>
+          <a:fillRef idx="3">
+            <a:schemeClr val="accent1"/>
+          </a:fillRef>
+          <a:effectRef idx="2">
+            <a:schemeClr val="accent1"/>
+          </a:effectRef>
+          <a:fontRef idx="minor">
+            <a:schemeClr val="lt1"/>
+          </a:fontRef>
+        </p:style>
+        <p:txBody>
+          <a:bodyPr rtlCol="0" anchor="ctr"/>
+          <a:lstStyle/>
+          <a:p/>
+        </p:txBody>
+      </p:sp>
+      <p:pic>
+        <p:nvPicPr>
+          <p:cNvPr id="67" name="Picture 66" descr="bedrock.png"/>
+          <p:cNvPicPr>
+            <a:picLocks noChangeAspect="1"/>
+          </p:cNvPicPr>
+          <p:nvPr/>
+        </p:nvPicPr>
+        <p:blipFill>
+          <a:blip r:embed="rId10"/>
+          <a:stretch>
+            <a:fillRect/>
+          </a:stretch>
+        </p:blipFill>
+        <p:spPr>
+          <a:xfrm>
+            <a:off x="8979407" y="5001768"/>
+            <a:ext cx="384048" cy="384048"/>
+          </a:xfrm>
+          <a:prstGeom prst="rect">
+            <a:avLst/>
+          </a:prstGeom>
+        </p:spPr>
+      </p:pic>
+      <p:sp>
+        <p:nvSpPr>
+          <p:cNvPr id="68" name="TextBox 67"/>
+          <p:cNvSpPr txBox="1"/>
+          <p:nvPr/>
+        </p:nvSpPr>
+        <p:spPr>
+          <a:xfrm>
+            <a:off x="9491472" y="5001768"/>
+            <a:ext cx="2103120" cy="237744"/>
+          </a:xfrm>
+          <a:prstGeom prst="rect">
+            <a:avLst/>
+          </a:prstGeom>
+          <a:noFill/>
+        </p:spPr>
+        <p:txBody>
+          <a:bodyPr wrap="square" lIns="0" rIns="0" tIns="0" bIns="0">
+            <a:spAutoFit/>
+          </a:bodyPr>
+          <a:lstStyle/>
+          <a:p>
+            <a:pPr algn="l">
+              <a:lnSpc>
+                <a:spcPct val="100000"/>
+              </a:lnSpc>
+            </a:pPr>
+            <a:r>
+              <a:rPr sz="1200" b="1">
+                <a:solidFill>
+                  <a:srgbClr val="0F172A"/>
+                </a:solidFill>
+                <a:latin typeface="Segoe UI"/>
+              </a:rPr>
+              <a:t>Bedrock</a:t>
+            </a:r>
+          </a:p>
+        </p:txBody>
+      </p:sp>
+      <p:sp>
+        <p:nvSpPr>
+          <p:cNvPr id="69" name="TextBox 68"/>
+          <p:cNvSpPr txBox="1"/>
+          <p:nvPr/>
+        </p:nvSpPr>
+        <p:spPr>
+          <a:xfrm>
+            <a:off x="9491472" y="5248656"/>
+            <a:ext cx="2103120" cy="457200"/>
+          </a:xfrm>
+          <a:prstGeom prst="rect">
+            <a:avLst/>
+          </a:prstGeom>
+          <a:noFill/>
+        </p:spPr>
+        <p:txBody>
+          <a:bodyPr wrap="square" lIns="0" rIns="0" tIns="0" bIns="0">
+            <a:spAutoFit/>
+          </a:bodyPr>
+          <a:lstStyle/>
+          <a:p>
+            <a:pPr algn="l">
+              <a:lnSpc>
+                <a:spcPct val="105000"/>
+              </a:lnSpc>
+            </a:pPr>
+            <a:r>
+              <a:rPr sz="950" b="0">
+                <a:solidFill>
+                  <a:srgbClr val="475569"/>
+                </a:solidFill>
+                <a:latin typeface="Segoe UI"/>
+              </a:rPr>
+              <a:t>embed + adjudicate</a:t>
             </a:r>
           </a:p>
         </p:txBody>
@@ -10098,7 +10960,7 @@
                 </a:solidFill>
                 <a:latin typeface="Segoe UI"/>
               </a:rPr>
-              <a:t>SECOND DECISION</a:t>
+              <a:t>THE KEY DECISION</a:t>
             </a:r>
           </a:p>
         </p:txBody>
@@ -10137,7 +10999,7 @@
                 </a:solidFill>
                 <a:latin typeface="Segoe UI"/>
               </a:rPr>
-              <a:t>Caller identity — an invariant that is currently broken</a:t>
+              <a:t>The sandbox, and why it is shaped this way</a:t>
             </a:r>
           </a:p>
         </p:txBody>
@@ -10188,56 +11050,14 @@
       </p:sp>
       <p:sp>
         <p:nvSpPr>
-          <p:cNvPr id="5" name="Rounded Rectangle 4"/>
-          <p:cNvSpPr/>
+          <p:cNvPr id="5" name="TextBox 4"/>
+          <p:cNvSpPr txBox="1"/>
           <p:nvPr/>
         </p:nvSpPr>
         <p:spPr>
           <a:xfrm>
             <a:off x="777240" y="1783080"/>
-            <a:ext cx="10515600" cy="1138428"/>
-          </a:xfrm>
-          <a:prstGeom prst="roundRect">
-            <a:avLst/>
-          </a:prstGeom>
-          <a:solidFill>
-            <a:srgbClr val="1E293B"/>
-          </a:solidFill>
-          <a:ln>
-            <a:noFill/>
-          </a:ln>
-          <a:effectLst/>
-        </p:spPr>
-        <p:style>
-          <a:lnRef idx="1">
-            <a:schemeClr val="accent1"/>
-          </a:lnRef>
-          <a:fillRef idx="3">
-            <a:schemeClr val="accent1"/>
-          </a:fillRef>
-          <a:effectRef idx="2">
-            <a:schemeClr val="accent1"/>
-          </a:effectRef>
-          <a:fontRef idx="minor">
-            <a:schemeClr val="lt1"/>
-          </a:fontRef>
-        </p:style>
-        <p:txBody>
-          <a:bodyPr rtlCol="0" anchor="ctr"/>
-          <a:lstStyle/>
-          <a:p/>
-        </p:txBody>
-      </p:sp>
-      <p:sp>
-        <p:nvSpPr>
-          <p:cNvPr id="6" name="TextBox 5"/>
-          <p:cNvSpPr txBox="1"/>
-          <p:nvPr/>
-        </p:nvSpPr>
-        <p:spPr>
-          <a:xfrm>
-            <a:off x="978408" y="1920240"/>
-            <a:ext cx="10149840" cy="219456"/>
+            <a:ext cx="10424160" cy="457200"/>
           </a:xfrm>
           <a:prstGeom prst="rect">
             <a:avLst/>
@@ -10256,107 +11076,27 @@
               </a:lnSpc>
             </a:pPr>
             <a:r>
-              <a:rPr sz="950" b="1">
-                <a:solidFill>
-                  <a:srgbClr val="94A3B8"/>
-                </a:solidFill>
-                <a:latin typeface="Segoe UI"/>
-              </a:rPr>
-              <a:t>THE HOLE</a:t>
-            </a:r>
-          </a:p>
-        </p:txBody>
-      </p:sp>
-      <p:sp>
-        <p:nvSpPr>
-          <p:cNvPr id="7" name="TextBox 6"/>
+              <a:rPr sz="1500" b="0">
+                <a:solidFill>
+                  <a:srgbClr val="475569"/>
+                </a:solidFill>
+                <a:latin typeface="Segoe UI"/>
+              </a:rPr>
+              <a:t>This is the hardest thing in Phase 1 and the one worth getting right first.</a:t>
+            </a:r>
+          </a:p>
+        </p:txBody>
+      </p:sp>
+      <p:sp>
+        <p:nvSpPr>
+          <p:cNvPr id="6" name="TextBox 5"/>
           <p:cNvSpPr txBox="1"/>
           <p:nvPr/>
         </p:nvSpPr>
         <p:spPr>
           <a:xfrm>
-            <a:off x="978408" y="2194560"/>
-            <a:ext cx="10149840" cy="864108"/>
-          </a:xfrm>
-          <a:prstGeom prst="rect">
-            <a:avLst/>
-          </a:prstGeom>
-          <a:noFill/>
-        </p:spPr>
-        <p:txBody>
-          <a:bodyPr wrap="square" lIns="0" rIns="0" tIns="0" bIns="0">
-            <a:spAutoFit/>
-          </a:bodyPr>
-          <a:lstStyle/>
-          <a:p>
-            <a:pPr>
-              <a:lnSpc>
-                <a:spcPct val="100000"/>
-              </a:lnSpc>
-              <a:spcAft>
-                <a:spcPts val="200"/>
-              </a:spcAft>
-            </a:pPr>
-            <a:r>
-              <a:rPr sz="1150">
-                <a:solidFill>
-                  <a:srgbClr val="E2E8F0"/>
-                </a:solidFill>
-                <a:latin typeface="Consolas"/>
-              </a:rPr>
-              <a:t>// today, search-fn trusts what the caller claims about itself</a:t>
-            </a:r>
-          </a:p>
-          <a:p>
-            <a:pPr>
-              <a:lnSpc>
-                <a:spcPct val="100000"/>
-              </a:lnSpc>
-              <a:spcAft>
-                <a:spcPts val="200"/>
-              </a:spcAft>
-            </a:pPr>
-            <a:r>
-              <a:rPr sz="1150">
-                <a:solidFill>
-                  <a:srgbClr val="E2E8F0"/>
-                </a:solidFill>
-                <a:latin typeface="Consolas"/>
-              </a:rPr>
-              <a:t>{ "query": "...", "actor": { "agent_id": "anything-i-like",</a:t>
-            </a:r>
-          </a:p>
-          <a:p>
-            <a:pPr>
-              <a:lnSpc>
-                <a:spcPct val="100000"/>
-              </a:lnSpc>
-              <a:spcAft>
-                <a:spcPts val="200"/>
-              </a:spcAft>
-            </a:pPr>
-            <a:r>
-              <a:rPr sz="1150">
-                <a:solidFill>
-                  <a:srgbClr val="E2E8F0"/>
-                </a:solidFill>
-                <a:latin typeface="Consolas"/>
-              </a:rPr>
-              <a:t>                             "session_id": "also-anything" } }</a:t>
-            </a:r>
-          </a:p>
-        </p:txBody>
-      </p:sp>
-      <p:sp>
-        <p:nvSpPr>
-          <p:cNvPr id="8" name="TextBox 7"/>
-          <p:cNvSpPr txBox="1"/>
-          <p:nvPr/>
-        </p:nvSpPr>
-        <p:spPr>
-          <a:xfrm>
-            <a:off x="777240" y="2834639"/>
-            <a:ext cx="10515600" cy="2926080"/>
+            <a:off x="777240" y="2350008"/>
+            <a:ext cx="10515600" cy="2377440"/>
           </a:xfrm>
           <a:prstGeom prst="rect">
             <a:avLst/>
@@ -10384,7 +11124,7 @@
                 </a:solidFill>
                 <a:latin typeface="Segoe UI"/>
               </a:rPr>
-              <a:t>CLAUDE.md invariant #4.</a:t>
+              <a:t>A tool never opens a network connection.</a:t>
             </a:r>
             <a:r>
               <a:rPr sz="1400">
@@ -10393,7 +11133,7 @@
                 </a:solidFill>
                 <a:latin typeface="Segoe UI"/>
               </a:rPr>
-              <a:t>  A gap record must carry which agent and session produced it, "so manufactured demand can be traced".</a:t>
+              <a:t>  It declares the endpoint it needs. The platform fetches that endpoint against a per-tool allowlist and hands back the response. The tool only transforms data.</a:t>
             </a:r>
           </a:p>
           <a:p>
@@ -10412,7 +11152,7 @@
                 </a:solidFill>
                 <a:latin typeface="Segoe UI"/>
               </a:rPr>
-              <a:t>It cannot be traced today.</a:t>
+              <a:t>So the sandbox has nothing to contain.</a:t>
             </a:r>
             <a:r>
               <a:rPr sz="1400">
@@ -10421,7 +11161,7 @@
                 </a:solidFill>
                 <a:latin typeface="Segoe UI"/>
               </a:rPr>
-              <a:t>  The actor is self-asserted in the request body. Anyone can log a thousand gaps as a thousand different agents and manufacture a trend on the gaps board.</a:t>
+              <a:t>  No network, no IAM role, no disk. An escape reaches an empty room — there is no credential to steal and nowhere to send it.</a:t>
             </a:r>
           </a:p>
           <a:p>
@@ -10440,7 +11180,7 @@
                 </a:solidFill>
                 <a:latin typeface="Segoe UI"/>
               </a:rPr>
-              <a:t>This did not matter in Phase 0.</a:t>
+              <a:t>The alternative was containing arbitrary code WITH internet access.</a:t>
             </a:r>
             <a:r>
               <a:rPr sz="1400">
@@ -10449,35 +11189,129 @@
                 </a:solidFill>
                 <a:latin typeface="Segoe UI"/>
               </a:rPr>
-              <a:t>  The only caller was the eval harness. It matters the moment the gaps board is public and there is a reason to game it.</a:t>
-            </a:r>
-          </a:p>
-          <a:p>
-            <a:pPr>
+              <a:t>  That is an open-ended problem. Egress filtering, DNS rebinding, exfiltration through a permitted host. This design removes the category instead of defending it.</a:t>
+            </a:r>
+          </a:p>
+        </p:txBody>
+      </p:sp>
+      <p:sp>
+        <p:nvSpPr>
+          <p:cNvPr id="7" name="Rounded Rectangle 6"/>
+          <p:cNvSpPr/>
+          <p:nvPr/>
+        </p:nvSpPr>
+        <p:spPr>
+          <a:xfrm>
+            <a:off x="777240" y="4864608"/>
+            <a:ext cx="10515600" cy="1005840"/>
+          </a:xfrm>
+          <a:prstGeom prst="roundRect">
+            <a:avLst/>
+          </a:prstGeom>
+          <a:solidFill>
+            <a:srgbClr val="FEF2F2"/>
+          </a:solidFill>
+          <a:ln w="15875">
+            <a:solidFill>
+              <a:srgbClr val="DD344C"/>
+            </a:solidFill>
+          </a:ln>
+          <a:effectLst/>
+        </p:spPr>
+        <p:style>
+          <a:lnRef idx="1">
+            <a:schemeClr val="accent1"/>
+          </a:lnRef>
+          <a:fillRef idx="3">
+            <a:schemeClr val="accent1"/>
+          </a:fillRef>
+          <a:effectRef idx="2">
+            <a:schemeClr val="accent1"/>
+          </a:effectRef>
+          <a:fontRef idx="minor">
+            <a:schemeClr val="lt1"/>
+          </a:fontRef>
+        </p:style>
+        <p:txBody>
+          <a:bodyPr rtlCol="0" anchor="ctr"/>
+          <a:lstStyle/>
+          <a:p/>
+        </p:txBody>
+      </p:sp>
+      <p:sp>
+        <p:nvSpPr>
+          <p:cNvPr id="8" name="TextBox 7"/>
+          <p:cNvSpPr txBox="1"/>
+          <p:nvPr/>
+        </p:nvSpPr>
+        <p:spPr>
+          <a:xfrm>
+            <a:off x="1051560" y="5047488"/>
+            <a:ext cx="9966960" cy="731520"/>
+          </a:xfrm>
+          <a:prstGeom prst="rect">
+            <a:avLst/>
+          </a:prstGeom>
+          <a:noFill/>
+        </p:spPr>
+        <p:txBody>
+          <a:bodyPr wrap="square" lIns="0" rIns="0" tIns="0" bIns="0">
+            <a:spAutoFit/>
+          </a:bodyPr>
+          <a:lstStyle/>
+          <a:p>
+            <a:pPr algn="l">
               <a:lnSpc>
                 <a:spcPct val="115000"/>
               </a:lnSpc>
-              <a:spcAft>
-                <a:spcPts val="1000"/>
-              </a:spcAft>
             </a:pPr>
             <a:r>
-              <a:rPr sz="1400" b="1">
-                <a:solidFill>
-                  <a:srgbClr val="0F172A"/>
-                </a:solidFill>
-                <a:latin typeface="Segoe UI"/>
-              </a:rPr>
-              <a:t>The fix.</a:t>
-            </a:r>
-            <a:r>
-              <a:rPr sz="1400">
+              <a:rPr sz="1350" b="1">
+                <a:solidFill>
+                  <a:srgbClr val="991B1B"/>
+                </a:solidFill>
+                <a:latin typeface="Segoe UI"/>
+              </a:rPr>
+              <a:t>The cost is real and should be stated up front: a tool needing several chained calls, or an endpoint not known until runtime, does not fit. That limit is the price of a sandbox whose safety can actually be argued about rather than hoped for.</a:t>
+            </a:r>
+          </a:p>
+        </p:txBody>
+      </p:sp>
+      <p:sp>
+        <p:nvSpPr>
+          <p:cNvPr id="9" name="TextBox 8"/>
+          <p:cNvSpPr txBox="1"/>
+          <p:nvPr/>
+        </p:nvSpPr>
+        <p:spPr>
+          <a:xfrm>
+            <a:off x="777240" y="6007608"/>
+            <a:ext cx="10515600" cy="457200"/>
+          </a:xfrm>
+          <a:prstGeom prst="rect">
+            <a:avLst/>
+          </a:prstGeom>
+          <a:noFill/>
+        </p:spPr>
+        <p:txBody>
+          <a:bodyPr wrap="square" lIns="0" rIns="0" tIns="0" bIns="0">
+            <a:spAutoFit/>
+          </a:bodyPr>
+          <a:lstStyle/>
+          <a:p>
+            <a:pPr algn="l">
+              <a:lnSpc>
+                <a:spcPct val="100000"/>
+              </a:lnSpc>
+            </a:pPr>
+            <a:r>
+              <a:rPr sz="1350" b="0">
                 <a:solidFill>
                   <a:srgbClr val="475569"/>
                 </a:solidFill>
                 <a:latin typeface="Segoe UI"/>
               </a:rPr>
-              <a:t>  Hashed API keys per caller, verified at the edge. Events record the verified caller id and ignore anything the body claims. Gap clustering then counts DISTINCT VERIFIED callers, which is what makes a cluster evidence.</a:t>
+              <a:t>Two ways to run it: Fargate tasks, or Lambda in a VPC with no NAT gateway. Both give no egress; the Lambda route stays inside the free tier.</a:t>
             </a:r>
           </a:p>
         </p:txBody>
@@ -10542,6 +11376,450 @@
                 </a:solidFill>
                 <a:latin typeface="Segoe UI"/>
               </a:rPr>
+              <a:t>SECOND DECISION</a:t>
+            </a:r>
+          </a:p>
+        </p:txBody>
+      </p:sp>
+      <p:sp>
+        <p:nvSpPr>
+          <p:cNvPr id="3" name="TextBox 2"/>
+          <p:cNvSpPr txBox="1"/>
+          <p:nvPr/>
+        </p:nvSpPr>
+        <p:spPr>
+          <a:xfrm>
+            <a:off x="777240" y="841248"/>
+            <a:ext cx="10607040" cy="640080"/>
+          </a:xfrm>
+          <a:prstGeom prst="rect">
+            <a:avLst/>
+          </a:prstGeom>
+          <a:noFill/>
+        </p:spPr>
+        <p:txBody>
+          <a:bodyPr wrap="square" lIns="0" rIns="0" tIns="0" bIns="0">
+            <a:spAutoFit/>
+          </a:bodyPr>
+          <a:lstStyle/>
+          <a:p>
+            <a:pPr algn="l">
+              <a:lnSpc>
+                <a:spcPct val="100000"/>
+              </a:lnSpc>
+            </a:pPr>
+            <a:r>
+              <a:rPr sz="3100" b="1">
+                <a:solidFill>
+                  <a:srgbClr val="0F172A"/>
+                </a:solidFill>
+                <a:latin typeface="Segoe UI"/>
+              </a:rPr>
+              <a:t>Caller identity — an invariant that is currently broken</a:t>
+            </a:r>
+          </a:p>
+        </p:txBody>
+      </p:sp>
+      <p:sp>
+        <p:nvSpPr>
+          <p:cNvPr id="4" name="Rectangle 3"/>
+          <p:cNvSpPr/>
+          <p:nvPr/>
+        </p:nvSpPr>
+        <p:spPr>
+          <a:xfrm>
+            <a:off x="777240" y="1572768"/>
+            <a:ext cx="1005840" cy="41148"/>
+          </a:xfrm>
+          <a:prstGeom prst="rect">
+            <a:avLst/>
+          </a:prstGeom>
+          <a:solidFill>
+            <a:srgbClr val="ED7100"/>
+          </a:solidFill>
+          <a:ln>
+            <a:noFill/>
+          </a:ln>
+          <a:effectLst/>
+        </p:spPr>
+        <p:style>
+          <a:lnRef idx="1">
+            <a:schemeClr val="accent1"/>
+          </a:lnRef>
+          <a:fillRef idx="3">
+            <a:schemeClr val="accent1"/>
+          </a:fillRef>
+          <a:effectRef idx="2">
+            <a:schemeClr val="accent1"/>
+          </a:effectRef>
+          <a:fontRef idx="minor">
+            <a:schemeClr val="lt1"/>
+          </a:fontRef>
+        </p:style>
+        <p:txBody>
+          <a:bodyPr rtlCol="0" anchor="ctr"/>
+          <a:lstStyle/>
+          <a:p>
+            <a:pPr algn="ctr"/>
+          </a:p>
+        </p:txBody>
+      </p:sp>
+      <p:sp>
+        <p:nvSpPr>
+          <p:cNvPr id="5" name="Rounded Rectangle 4"/>
+          <p:cNvSpPr/>
+          <p:nvPr/>
+        </p:nvSpPr>
+        <p:spPr>
+          <a:xfrm>
+            <a:off x="777240" y="1783080"/>
+            <a:ext cx="10515600" cy="1138428"/>
+          </a:xfrm>
+          <a:prstGeom prst="roundRect">
+            <a:avLst/>
+          </a:prstGeom>
+          <a:solidFill>
+            <a:srgbClr val="1E293B"/>
+          </a:solidFill>
+          <a:ln>
+            <a:noFill/>
+          </a:ln>
+          <a:effectLst/>
+        </p:spPr>
+        <p:style>
+          <a:lnRef idx="1">
+            <a:schemeClr val="accent1"/>
+          </a:lnRef>
+          <a:fillRef idx="3">
+            <a:schemeClr val="accent1"/>
+          </a:fillRef>
+          <a:effectRef idx="2">
+            <a:schemeClr val="accent1"/>
+          </a:effectRef>
+          <a:fontRef idx="minor">
+            <a:schemeClr val="lt1"/>
+          </a:fontRef>
+        </p:style>
+        <p:txBody>
+          <a:bodyPr rtlCol="0" anchor="ctr"/>
+          <a:lstStyle/>
+          <a:p/>
+        </p:txBody>
+      </p:sp>
+      <p:sp>
+        <p:nvSpPr>
+          <p:cNvPr id="6" name="TextBox 5"/>
+          <p:cNvSpPr txBox="1"/>
+          <p:nvPr/>
+        </p:nvSpPr>
+        <p:spPr>
+          <a:xfrm>
+            <a:off x="978408" y="1920240"/>
+            <a:ext cx="10149840" cy="219456"/>
+          </a:xfrm>
+          <a:prstGeom prst="rect">
+            <a:avLst/>
+          </a:prstGeom>
+          <a:noFill/>
+        </p:spPr>
+        <p:txBody>
+          <a:bodyPr wrap="square" lIns="0" rIns="0" tIns="0" bIns="0">
+            <a:spAutoFit/>
+          </a:bodyPr>
+          <a:lstStyle/>
+          <a:p>
+            <a:pPr algn="l">
+              <a:lnSpc>
+                <a:spcPct val="100000"/>
+              </a:lnSpc>
+            </a:pPr>
+            <a:r>
+              <a:rPr sz="950" b="1">
+                <a:solidFill>
+                  <a:srgbClr val="94A3B8"/>
+                </a:solidFill>
+                <a:latin typeface="Segoe UI"/>
+              </a:rPr>
+              <a:t>THE HOLE</a:t>
+            </a:r>
+          </a:p>
+        </p:txBody>
+      </p:sp>
+      <p:sp>
+        <p:nvSpPr>
+          <p:cNvPr id="7" name="TextBox 6"/>
+          <p:cNvSpPr txBox="1"/>
+          <p:nvPr/>
+        </p:nvSpPr>
+        <p:spPr>
+          <a:xfrm>
+            <a:off x="978408" y="2194560"/>
+            <a:ext cx="10149840" cy="864108"/>
+          </a:xfrm>
+          <a:prstGeom prst="rect">
+            <a:avLst/>
+          </a:prstGeom>
+          <a:noFill/>
+        </p:spPr>
+        <p:txBody>
+          <a:bodyPr wrap="square" lIns="0" rIns="0" tIns="0" bIns="0">
+            <a:spAutoFit/>
+          </a:bodyPr>
+          <a:lstStyle/>
+          <a:p>
+            <a:pPr>
+              <a:lnSpc>
+                <a:spcPct val="100000"/>
+              </a:lnSpc>
+              <a:spcAft>
+                <a:spcPts val="200"/>
+              </a:spcAft>
+            </a:pPr>
+            <a:r>
+              <a:rPr sz="1150">
+                <a:solidFill>
+                  <a:srgbClr val="E2E8F0"/>
+                </a:solidFill>
+                <a:latin typeface="Consolas"/>
+              </a:rPr>
+              <a:t>// today, search-fn trusts what the caller claims about itself</a:t>
+            </a:r>
+          </a:p>
+          <a:p>
+            <a:pPr>
+              <a:lnSpc>
+                <a:spcPct val="100000"/>
+              </a:lnSpc>
+              <a:spcAft>
+                <a:spcPts val="200"/>
+              </a:spcAft>
+            </a:pPr>
+            <a:r>
+              <a:rPr sz="1150">
+                <a:solidFill>
+                  <a:srgbClr val="E2E8F0"/>
+                </a:solidFill>
+                <a:latin typeface="Consolas"/>
+              </a:rPr>
+              <a:t>{ "query": "...", "actor": { "agent_id": "anything-i-like",</a:t>
+            </a:r>
+          </a:p>
+          <a:p>
+            <a:pPr>
+              <a:lnSpc>
+                <a:spcPct val="100000"/>
+              </a:lnSpc>
+              <a:spcAft>
+                <a:spcPts val="200"/>
+              </a:spcAft>
+            </a:pPr>
+            <a:r>
+              <a:rPr sz="1150">
+                <a:solidFill>
+                  <a:srgbClr val="E2E8F0"/>
+                </a:solidFill>
+                <a:latin typeface="Consolas"/>
+              </a:rPr>
+              <a:t>                             "session_id": "also-anything" } }</a:t>
+            </a:r>
+          </a:p>
+        </p:txBody>
+      </p:sp>
+      <p:sp>
+        <p:nvSpPr>
+          <p:cNvPr id="8" name="TextBox 7"/>
+          <p:cNvSpPr txBox="1"/>
+          <p:nvPr/>
+        </p:nvSpPr>
+        <p:spPr>
+          <a:xfrm>
+            <a:off x="777240" y="2834639"/>
+            <a:ext cx="10515600" cy="2926080"/>
+          </a:xfrm>
+          <a:prstGeom prst="rect">
+            <a:avLst/>
+          </a:prstGeom>
+          <a:noFill/>
+        </p:spPr>
+        <p:txBody>
+          <a:bodyPr wrap="square" lIns="0" rIns="0" tIns="0" bIns="0">
+            <a:spAutoFit/>
+          </a:bodyPr>
+          <a:lstStyle/>
+          <a:p>
+            <a:pPr>
+              <a:lnSpc>
+                <a:spcPct val="115000"/>
+              </a:lnSpc>
+              <a:spcAft>
+                <a:spcPts val="1000"/>
+              </a:spcAft>
+            </a:pPr>
+            <a:r>
+              <a:rPr sz="1400" b="1">
+                <a:solidFill>
+                  <a:srgbClr val="0F172A"/>
+                </a:solidFill>
+                <a:latin typeface="Segoe UI"/>
+              </a:rPr>
+              <a:t>CLAUDE.md invariant #4.</a:t>
+            </a:r>
+            <a:r>
+              <a:rPr sz="1400">
+                <a:solidFill>
+                  <a:srgbClr val="475569"/>
+                </a:solidFill>
+                <a:latin typeface="Segoe UI"/>
+              </a:rPr>
+              <a:t>  A gap record must carry which agent and session produced it, "so manufactured demand can be traced".</a:t>
+            </a:r>
+          </a:p>
+          <a:p>
+            <a:pPr>
+              <a:lnSpc>
+                <a:spcPct val="115000"/>
+              </a:lnSpc>
+              <a:spcAft>
+                <a:spcPts val="1000"/>
+              </a:spcAft>
+            </a:pPr>
+            <a:r>
+              <a:rPr sz="1400" b="1">
+                <a:solidFill>
+                  <a:srgbClr val="0F172A"/>
+                </a:solidFill>
+                <a:latin typeface="Segoe UI"/>
+              </a:rPr>
+              <a:t>It cannot be traced today.</a:t>
+            </a:r>
+            <a:r>
+              <a:rPr sz="1400">
+                <a:solidFill>
+                  <a:srgbClr val="475569"/>
+                </a:solidFill>
+                <a:latin typeface="Segoe UI"/>
+              </a:rPr>
+              <a:t>  The actor is self-asserted in the request body. Anyone can log a thousand gaps as a thousand different agents and manufacture a trend on the gaps board.</a:t>
+            </a:r>
+          </a:p>
+          <a:p>
+            <a:pPr>
+              <a:lnSpc>
+                <a:spcPct val="115000"/>
+              </a:lnSpc>
+              <a:spcAft>
+                <a:spcPts val="1000"/>
+              </a:spcAft>
+            </a:pPr>
+            <a:r>
+              <a:rPr sz="1400" b="1">
+                <a:solidFill>
+                  <a:srgbClr val="0F172A"/>
+                </a:solidFill>
+                <a:latin typeface="Segoe UI"/>
+              </a:rPr>
+              <a:t>This did not matter in Phase 0.</a:t>
+            </a:r>
+            <a:r>
+              <a:rPr sz="1400">
+                <a:solidFill>
+                  <a:srgbClr val="475569"/>
+                </a:solidFill>
+                <a:latin typeface="Segoe UI"/>
+              </a:rPr>
+              <a:t>  The only caller was the eval harness. It matters the moment the gaps board is public and there is a reason to game it.</a:t>
+            </a:r>
+          </a:p>
+          <a:p>
+            <a:pPr>
+              <a:lnSpc>
+                <a:spcPct val="115000"/>
+              </a:lnSpc>
+              <a:spcAft>
+                <a:spcPts val="1000"/>
+              </a:spcAft>
+            </a:pPr>
+            <a:r>
+              <a:rPr sz="1400" b="1">
+                <a:solidFill>
+                  <a:srgbClr val="0F172A"/>
+                </a:solidFill>
+                <a:latin typeface="Segoe UI"/>
+              </a:rPr>
+              <a:t>The fix.</a:t>
+            </a:r>
+            <a:r>
+              <a:rPr sz="1400">
+                <a:solidFill>
+                  <a:srgbClr val="475569"/>
+                </a:solidFill>
+                <a:latin typeface="Segoe UI"/>
+              </a:rPr>
+              <a:t>  Hashed API keys per caller, verified at the edge. Events record the verified caller id and ignore anything the body claims. Gap clustering then counts DISTINCT VERIFIED callers, which is what makes a cluster evidence.</a:t>
+            </a:r>
+          </a:p>
+        </p:txBody>
+      </p:sp>
+    </p:spTree>
+  </p:cSld>
+  <p:clrMapOvr>
+    <a:masterClrMapping/>
+  </p:clrMapOvr>
+</p:sld>
+</file>
+
+<file path=ppt/slides/slide8.xml><?xml version="1.0" encoding="utf-8"?>
+<p:sld xmlns:a="http://schemas.openxmlformats.org/drawingml/2006/main" xmlns:p="http://schemas.openxmlformats.org/presentationml/2006/main" xmlns:r="http://schemas.openxmlformats.org/officeDocument/2006/relationships">
+  <p:cSld>
+    <p:bg>
+      <p:bgPr>
+        <a:solidFill>
+          <a:srgbClr val="FFFFFF"/>
+        </a:solidFill>
+        <a:effectLst/>
+      </p:bgPr>
+    </p:bg>
+    <p:spTree>
+      <p:nvGrpSpPr>
+        <p:cNvPr id="1" name=""/>
+        <p:cNvGrpSpPr/>
+        <p:nvPr/>
+      </p:nvGrpSpPr>
+      <p:grpSpPr/>
+      <p:sp>
+        <p:nvSpPr>
+          <p:cNvPr id="2" name="TextBox 1"/>
+          <p:cNvSpPr txBox="1"/>
+          <p:nvPr/>
+        </p:nvSpPr>
+        <p:spPr>
+          <a:xfrm>
+            <a:off x="777240" y="502920"/>
+            <a:ext cx="10607040" cy="274320"/>
+          </a:xfrm>
+          <a:prstGeom prst="rect">
+            <a:avLst/>
+          </a:prstGeom>
+          <a:noFill/>
+        </p:spPr>
+        <p:txBody>
+          <a:bodyPr wrap="square" lIns="0" rIns="0" tIns="0" bIns="0">
+            <a:spAutoFit/>
+          </a:bodyPr>
+          <a:lstStyle/>
+          <a:p>
+            <a:pPr algn="l">
+              <a:lnSpc>
+                <a:spcPct val="100000"/>
+              </a:lnSpc>
+            </a:pPr>
+            <a:r>
+              <a:rPr sz="1100" b="1">
+                <a:solidFill>
+                  <a:srgbClr val="94A3B8"/>
+                </a:solidFill>
+                <a:latin typeface="Segoe UI"/>
+              </a:rPr>
               <a:t>THIRD DECISION</a:t>
             </a:r>
           </a:p>
@@ -10895,7 +12173,7 @@
 </p:sld>
 </file>
 
-<file path=ppt/slides/slide8.xml><?xml version="1.0" encoding="utf-8"?>
+<file path=ppt/slides/slide9.xml><?xml version="1.0" encoding="utf-8"?>
 <p:sld xmlns:a="http://schemas.openxmlformats.org/drawingml/2006/main" xmlns:p="http://schemas.openxmlformats.org/presentationml/2006/main" xmlns:r="http://schemas.openxmlformats.org/officeDocument/2006/relationships">
   <p:cSld>
     <p:bg>
@@ -12370,827 +13648,6 @@
 </p:sld>
 </file>
 
-<file path=ppt/slides/slide9.xml><?xml version="1.0" encoding="utf-8"?>
-<p:sld xmlns:a="http://schemas.openxmlformats.org/drawingml/2006/main" xmlns:p="http://schemas.openxmlformats.org/presentationml/2006/main" xmlns:r="http://schemas.openxmlformats.org/officeDocument/2006/relationships">
-  <p:cSld>
-    <p:bg>
-      <p:bgPr>
-        <a:solidFill>
-          <a:srgbClr val="FFFFFF"/>
-        </a:solidFill>
-        <a:effectLst/>
-      </p:bgPr>
-    </p:bg>
-    <p:spTree>
-      <p:nvGrpSpPr>
-        <p:cNvPr id="1" name=""/>
-        <p:cNvGrpSpPr/>
-        <p:nvPr/>
-      </p:nvGrpSpPr>
-      <p:grpSpPr/>
-      <p:sp>
-        <p:nvSpPr>
-          <p:cNvPr id="2" name="TextBox 1"/>
-          <p:cNvSpPr txBox="1"/>
-          <p:nvPr/>
-        </p:nvSpPr>
-        <p:spPr>
-          <a:xfrm>
-            <a:off x="777240" y="502920"/>
-            <a:ext cx="10607040" cy="274320"/>
-          </a:xfrm>
-          <a:prstGeom prst="rect">
-            <a:avLst/>
-          </a:prstGeom>
-          <a:noFill/>
-        </p:spPr>
-        <p:txBody>
-          <a:bodyPr wrap="square" lIns="0" rIns="0" tIns="0" bIns="0">
-            <a:spAutoFit/>
-          </a:bodyPr>
-          <a:lstStyle/>
-          <a:p>
-            <a:pPr algn="l">
-              <a:lnSpc>
-                <a:spcPct val="100000"/>
-              </a:lnSpc>
-            </a:pPr>
-            <a:r>
-              <a:rPr sz="1100" b="1">
-                <a:solidFill>
-                  <a:srgbClr val="94A3B8"/>
-                </a:solidFill>
-                <a:latin typeface="Segoe UI"/>
-              </a:rPr>
-              <a:t>SEQUENCING</a:t>
-            </a:r>
-          </a:p>
-        </p:txBody>
-      </p:sp>
-      <p:sp>
-        <p:nvSpPr>
-          <p:cNvPr id="3" name="TextBox 2"/>
-          <p:cNvSpPr txBox="1"/>
-          <p:nvPr/>
-        </p:nvSpPr>
-        <p:spPr>
-          <a:xfrm>
-            <a:off x="777240" y="841248"/>
-            <a:ext cx="10607040" cy="640080"/>
-          </a:xfrm>
-          <a:prstGeom prst="rect">
-            <a:avLst/>
-          </a:prstGeom>
-          <a:noFill/>
-        </p:spPr>
-        <p:txBody>
-          <a:bodyPr wrap="square" lIns="0" rIns="0" tIns="0" bIns="0">
-            <a:spAutoFit/>
-          </a:bodyPr>
-          <a:lstStyle/>
-          <a:p>
-            <a:pPr algn="l">
-              <a:lnSpc>
-                <a:spcPct val="100000"/>
-              </a:lnSpc>
-            </a:pPr>
-            <a:r>
-              <a:rPr sz="3100" b="1">
-                <a:solidFill>
-                  <a:srgbClr val="0F172A"/>
-                </a:solidFill>
-                <a:latin typeface="Segoe UI"/>
-              </a:rPr>
-              <a:t>What blocks what</a:t>
-            </a:r>
-          </a:p>
-        </p:txBody>
-      </p:sp>
-      <p:sp>
-        <p:nvSpPr>
-          <p:cNvPr id="4" name="Rectangle 3"/>
-          <p:cNvSpPr/>
-          <p:nvPr/>
-        </p:nvSpPr>
-        <p:spPr>
-          <a:xfrm>
-            <a:off x="777240" y="1572768"/>
-            <a:ext cx="1005840" cy="41148"/>
-          </a:xfrm>
-          <a:prstGeom prst="rect">
-            <a:avLst/>
-          </a:prstGeom>
-          <a:solidFill>
-            <a:srgbClr val="ED7100"/>
-          </a:solidFill>
-          <a:ln>
-            <a:noFill/>
-          </a:ln>
-          <a:effectLst/>
-        </p:spPr>
-        <p:style>
-          <a:lnRef idx="1">
-            <a:schemeClr val="accent1"/>
-          </a:lnRef>
-          <a:fillRef idx="3">
-            <a:schemeClr val="accent1"/>
-          </a:fillRef>
-          <a:effectRef idx="2">
-            <a:schemeClr val="accent1"/>
-          </a:effectRef>
-          <a:fontRef idx="minor">
-            <a:schemeClr val="lt1"/>
-          </a:fontRef>
-        </p:style>
-        <p:txBody>
-          <a:bodyPr rtlCol="0" anchor="ctr"/>
-          <a:lstStyle/>
-          <a:p>
-            <a:pPr algn="ctr"/>
-          </a:p>
-        </p:txBody>
-      </p:sp>
-      <p:sp>
-        <p:nvSpPr>
-          <p:cNvPr id="5" name="Rounded Rectangle 4"/>
-          <p:cNvSpPr/>
-          <p:nvPr/>
-        </p:nvSpPr>
-        <p:spPr>
-          <a:xfrm>
-            <a:off x="777240" y="1783080"/>
-            <a:ext cx="1481328" cy="640080"/>
-          </a:xfrm>
-          <a:prstGeom prst="roundRect">
-            <a:avLst/>
-          </a:prstGeom>
-          <a:solidFill>
-            <a:srgbClr val="0F172A"/>
-          </a:solidFill>
-          <a:ln>
-            <a:noFill/>
-          </a:ln>
-          <a:effectLst/>
-        </p:spPr>
-        <p:style>
-          <a:lnRef idx="1">
-            <a:schemeClr val="accent1"/>
-          </a:lnRef>
-          <a:fillRef idx="3">
-            <a:schemeClr val="accent1"/>
-          </a:fillRef>
-          <a:effectRef idx="2">
-            <a:schemeClr val="accent1"/>
-          </a:effectRef>
-          <a:fontRef idx="minor">
-            <a:schemeClr val="lt1"/>
-          </a:fontRef>
-        </p:style>
-        <p:txBody>
-          <a:bodyPr rtlCol="0" anchor="ctr"/>
-          <a:lstStyle/>
-          <a:p>
-            <a:pPr algn="ctr"/>
-            <a:r>
-              <a:rPr sz="1100" b="1">
-                <a:solidFill>
-                  <a:srgbClr val="FFFFFF"/>
-                </a:solidFill>
-                <a:latin typeface="Segoe UI"/>
-              </a:rPr>
-              <a:t>#1 Identity</a:t>
-            </a:r>
-          </a:p>
-        </p:txBody>
-      </p:sp>
-      <p:sp>
-        <p:nvSpPr>
-          <p:cNvPr id="6" name="Right Arrow 5"/>
-          <p:cNvSpPr/>
-          <p:nvPr/>
-        </p:nvSpPr>
-        <p:spPr>
-          <a:xfrm>
-            <a:off x="2295144" y="1993392"/>
-            <a:ext cx="219456" cy="219456"/>
-          </a:xfrm>
-          <a:prstGeom prst="rightArrow">
-            <a:avLst/>
-          </a:prstGeom>
-          <a:solidFill>
-            <a:srgbClr val="94A3B8"/>
-          </a:solidFill>
-          <a:ln>
-            <a:noFill/>
-          </a:ln>
-          <a:effectLst/>
-        </p:spPr>
-        <p:style>
-          <a:lnRef idx="1">
-            <a:schemeClr val="accent1"/>
-          </a:lnRef>
-          <a:fillRef idx="3">
-            <a:schemeClr val="accent1"/>
-          </a:fillRef>
-          <a:effectRef idx="2">
-            <a:schemeClr val="accent1"/>
-          </a:effectRef>
-          <a:fontRef idx="minor">
-            <a:schemeClr val="lt1"/>
-          </a:fontRef>
-        </p:style>
-        <p:txBody>
-          <a:bodyPr rtlCol="0" anchor="ctr"/>
-          <a:lstStyle/>
-          <a:p>
-            <a:pPr algn="ctr"/>
-          </a:p>
-        </p:txBody>
-      </p:sp>
-      <p:sp>
-        <p:nvSpPr>
-          <p:cNvPr id="7" name="Rounded Rectangle 6"/>
-          <p:cNvSpPr/>
-          <p:nvPr/>
-        </p:nvSpPr>
-        <p:spPr>
-          <a:xfrm>
-            <a:off x="2551176" y="1783080"/>
-            <a:ext cx="1481328" cy="640080"/>
-          </a:xfrm>
-          <a:prstGeom prst="roundRect">
-            <a:avLst/>
-          </a:prstGeom>
-          <a:solidFill>
-            <a:srgbClr val="0F172A"/>
-          </a:solidFill>
-          <a:ln>
-            <a:noFill/>
-          </a:ln>
-          <a:effectLst/>
-        </p:spPr>
-        <p:style>
-          <a:lnRef idx="1">
-            <a:schemeClr val="accent1"/>
-          </a:lnRef>
-          <a:fillRef idx="3">
-            <a:schemeClr val="accent1"/>
-          </a:fillRef>
-          <a:effectRef idx="2">
-            <a:schemeClr val="accent1"/>
-          </a:effectRef>
-          <a:fontRef idx="minor">
-            <a:schemeClr val="lt1"/>
-          </a:fontRef>
-        </p:style>
-        <p:txBody>
-          <a:bodyPr rtlCol="0" anchor="ctr"/>
-          <a:lstStyle/>
-          <a:p>
-            <a:pPr algn="ctr"/>
-            <a:r>
-              <a:rPr sz="1100" b="1">
-                <a:solidFill>
-                  <a:srgbClr val="FFFFFF"/>
-                </a:solidFill>
-                <a:latin typeface="Segoe UI"/>
-              </a:rPr>
-              <a:t>#2 Package</a:t>
-            </a:r>
-          </a:p>
-        </p:txBody>
-      </p:sp>
-      <p:sp>
-        <p:nvSpPr>
-          <p:cNvPr id="8" name="Right Arrow 7"/>
-          <p:cNvSpPr/>
-          <p:nvPr/>
-        </p:nvSpPr>
-        <p:spPr>
-          <a:xfrm>
-            <a:off x="4069080" y="1993392"/>
-            <a:ext cx="219456" cy="219456"/>
-          </a:xfrm>
-          <a:prstGeom prst="rightArrow">
-            <a:avLst/>
-          </a:prstGeom>
-          <a:solidFill>
-            <a:srgbClr val="94A3B8"/>
-          </a:solidFill>
-          <a:ln>
-            <a:noFill/>
-          </a:ln>
-          <a:effectLst/>
-        </p:spPr>
-        <p:style>
-          <a:lnRef idx="1">
-            <a:schemeClr val="accent1"/>
-          </a:lnRef>
-          <a:fillRef idx="3">
-            <a:schemeClr val="accent1"/>
-          </a:fillRef>
-          <a:effectRef idx="2">
-            <a:schemeClr val="accent1"/>
-          </a:effectRef>
-          <a:fontRef idx="minor">
-            <a:schemeClr val="lt1"/>
-          </a:fontRef>
-        </p:style>
-        <p:txBody>
-          <a:bodyPr rtlCol="0" anchor="ctr"/>
-          <a:lstStyle/>
-          <a:p>
-            <a:pPr algn="ctr"/>
-          </a:p>
-        </p:txBody>
-      </p:sp>
-      <p:sp>
-        <p:nvSpPr>
-          <p:cNvPr id="9" name="Rounded Rectangle 8"/>
-          <p:cNvSpPr/>
-          <p:nvPr/>
-        </p:nvSpPr>
-        <p:spPr>
-          <a:xfrm>
-            <a:off x="4325112" y="1783080"/>
-            <a:ext cx="1481328" cy="640080"/>
-          </a:xfrm>
-          <a:prstGeom prst="roundRect">
-            <a:avLst/>
-          </a:prstGeom>
-          <a:solidFill>
-            <a:srgbClr val="0F172A"/>
-          </a:solidFill>
-          <a:ln>
-            <a:noFill/>
-          </a:ln>
-          <a:effectLst/>
-        </p:spPr>
-        <p:style>
-          <a:lnRef idx="1">
-            <a:schemeClr val="accent1"/>
-          </a:lnRef>
-          <a:fillRef idx="3">
-            <a:schemeClr val="accent1"/>
-          </a:fillRef>
-          <a:effectRef idx="2">
-            <a:schemeClr val="accent1"/>
-          </a:effectRef>
-          <a:fontRef idx="minor">
-            <a:schemeClr val="lt1"/>
-          </a:fontRef>
-        </p:style>
-        <p:txBody>
-          <a:bodyPr rtlCol="0" anchor="ctr"/>
-          <a:lstStyle/>
-          <a:p>
-            <a:pPr algn="ctr"/>
-            <a:r>
-              <a:rPr sz="1100" b="1">
-                <a:solidFill>
-                  <a:srgbClr val="FFFFFF"/>
-                </a:solidFill>
-                <a:latin typeface="Segoe UI"/>
-              </a:rPr>
-              <a:t>#3 Sandbox</a:t>
-            </a:r>
-          </a:p>
-        </p:txBody>
-      </p:sp>
-      <p:sp>
-        <p:nvSpPr>
-          <p:cNvPr id="10" name="Right Arrow 9"/>
-          <p:cNvSpPr/>
-          <p:nvPr/>
-        </p:nvSpPr>
-        <p:spPr>
-          <a:xfrm>
-            <a:off x="5843016" y="1993392"/>
-            <a:ext cx="219456" cy="219456"/>
-          </a:xfrm>
-          <a:prstGeom prst="rightArrow">
-            <a:avLst/>
-          </a:prstGeom>
-          <a:solidFill>
-            <a:srgbClr val="94A3B8"/>
-          </a:solidFill>
-          <a:ln>
-            <a:noFill/>
-          </a:ln>
-          <a:effectLst/>
-        </p:spPr>
-        <p:style>
-          <a:lnRef idx="1">
-            <a:schemeClr val="accent1"/>
-          </a:lnRef>
-          <a:fillRef idx="3">
-            <a:schemeClr val="accent1"/>
-          </a:fillRef>
-          <a:effectRef idx="2">
-            <a:schemeClr val="accent1"/>
-          </a:effectRef>
-          <a:fontRef idx="minor">
-            <a:schemeClr val="lt1"/>
-          </a:fontRef>
-        </p:style>
-        <p:txBody>
-          <a:bodyPr rtlCol="0" anchor="ctr"/>
-          <a:lstStyle/>
-          <a:p>
-            <a:pPr algn="ctr"/>
-          </a:p>
-        </p:txBody>
-      </p:sp>
-      <p:sp>
-        <p:nvSpPr>
-          <p:cNvPr id="11" name="Rounded Rectangle 10"/>
-          <p:cNvSpPr/>
-          <p:nvPr/>
-        </p:nvSpPr>
-        <p:spPr>
-          <a:xfrm>
-            <a:off x="6099048" y="1783080"/>
-            <a:ext cx="1481328" cy="640080"/>
-          </a:xfrm>
-          <a:prstGeom prst="roundRect">
-            <a:avLst/>
-          </a:prstGeom>
-          <a:solidFill>
-            <a:srgbClr val="0F172A"/>
-          </a:solidFill>
-          <a:ln>
-            <a:noFill/>
-          </a:ln>
-          <a:effectLst/>
-        </p:spPr>
-        <p:style>
-          <a:lnRef idx="1">
-            <a:schemeClr val="accent1"/>
-          </a:lnRef>
-          <a:fillRef idx="3">
-            <a:schemeClr val="accent1"/>
-          </a:fillRef>
-          <a:effectRef idx="2">
-            <a:schemeClr val="accent1"/>
-          </a:effectRef>
-          <a:fontRef idx="minor">
-            <a:schemeClr val="lt1"/>
-          </a:fontRef>
-        </p:style>
-        <p:txBody>
-          <a:bodyPr rtlCol="0" anchor="ctr"/>
-          <a:lstStyle/>
-          <a:p>
-            <a:pPr algn="ctr"/>
-            <a:r>
-              <a:rPr sz="1100" b="1">
-                <a:solidFill>
-                  <a:srgbClr val="FFFFFF"/>
-                </a:solidFill>
-                <a:latin typeface="Segoe UI"/>
-              </a:rPr>
-              <a:t>#4 Fetcher</a:t>
-            </a:r>
-          </a:p>
-        </p:txBody>
-      </p:sp>
-      <p:sp>
-        <p:nvSpPr>
-          <p:cNvPr id="12" name="Right Arrow 11"/>
-          <p:cNvSpPr/>
-          <p:nvPr/>
-        </p:nvSpPr>
-        <p:spPr>
-          <a:xfrm>
-            <a:off x="7616952" y="1993392"/>
-            <a:ext cx="219456" cy="219456"/>
-          </a:xfrm>
-          <a:prstGeom prst="rightArrow">
-            <a:avLst/>
-          </a:prstGeom>
-          <a:solidFill>
-            <a:srgbClr val="94A3B8"/>
-          </a:solidFill>
-          <a:ln>
-            <a:noFill/>
-          </a:ln>
-          <a:effectLst/>
-        </p:spPr>
-        <p:style>
-          <a:lnRef idx="1">
-            <a:schemeClr val="accent1"/>
-          </a:lnRef>
-          <a:fillRef idx="3">
-            <a:schemeClr val="accent1"/>
-          </a:fillRef>
-          <a:effectRef idx="2">
-            <a:schemeClr val="accent1"/>
-          </a:effectRef>
-          <a:fontRef idx="minor">
-            <a:schemeClr val="lt1"/>
-          </a:fontRef>
-        </p:style>
-        <p:txBody>
-          <a:bodyPr rtlCol="0" anchor="ctr"/>
-          <a:lstStyle/>
-          <a:p>
-            <a:pPr algn="ctr"/>
-          </a:p>
-        </p:txBody>
-      </p:sp>
-      <p:sp>
-        <p:nvSpPr>
-          <p:cNvPr id="13" name="Rounded Rectangle 12"/>
-          <p:cNvSpPr/>
-          <p:nvPr/>
-        </p:nvSpPr>
-        <p:spPr>
-          <a:xfrm>
-            <a:off x="7872984" y="1783080"/>
-            <a:ext cx="1481328" cy="640080"/>
-          </a:xfrm>
-          <a:prstGeom prst="roundRect">
-            <a:avLst/>
-          </a:prstGeom>
-          <a:solidFill>
-            <a:srgbClr val="0F172A"/>
-          </a:solidFill>
-          <a:ln>
-            <a:noFill/>
-          </a:ln>
-          <a:effectLst/>
-        </p:spPr>
-        <p:style>
-          <a:lnRef idx="1">
-            <a:schemeClr val="accent1"/>
-          </a:lnRef>
-          <a:fillRef idx="3">
-            <a:schemeClr val="accent1"/>
-          </a:fillRef>
-          <a:effectRef idx="2">
-            <a:schemeClr val="accent1"/>
-          </a:effectRef>
-          <a:fontRef idx="minor">
-            <a:schemeClr val="lt1"/>
-          </a:fontRef>
-        </p:style>
-        <p:txBody>
-          <a:bodyPr rtlCol="0" anchor="ctr"/>
-          <a:lstStyle/>
-          <a:p>
-            <a:pPr algn="ctr"/>
-            <a:r>
-              <a:rPr sz="1100" b="1">
-                <a:solidFill>
-                  <a:srgbClr val="FFFFFF"/>
-                </a:solidFill>
-                <a:latin typeface="Segoe UI"/>
-              </a:rPr>
-              <a:t>#5 Escape tests</a:t>
-            </a:r>
-          </a:p>
-        </p:txBody>
-      </p:sp>
-      <p:sp>
-        <p:nvSpPr>
-          <p:cNvPr id="14" name="Right Arrow 13"/>
-          <p:cNvSpPr/>
-          <p:nvPr/>
-        </p:nvSpPr>
-        <p:spPr>
-          <a:xfrm>
-            <a:off x="9390888" y="1993392"/>
-            <a:ext cx="219456" cy="219456"/>
-          </a:xfrm>
-          <a:prstGeom prst="rightArrow">
-            <a:avLst/>
-          </a:prstGeom>
-          <a:solidFill>
-            <a:srgbClr val="94A3B8"/>
-          </a:solidFill>
-          <a:ln>
-            <a:noFill/>
-          </a:ln>
-          <a:effectLst/>
-        </p:spPr>
-        <p:style>
-          <a:lnRef idx="1">
-            <a:schemeClr val="accent1"/>
-          </a:lnRef>
-          <a:fillRef idx="3">
-            <a:schemeClr val="accent1"/>
-          </a:fillRef>
-          <a:effectRef idx="2">
-            <a:schemeClr val="accent1"/>
-          </a:effectRef>
-          <a:fontRef idx="minor">
-            <a:schemeClr val="lt1"/>
-          </a:fontRef>
-        </p:style>
-        <p:txBody>
-          <a:bodyPr rtlCol="0" anchor="ctr"/>
-          <a:lstStyle/>
-          <a:p>
-            <a:pPr algn="ctr"/>
-          </a:p>
-        </p:txBody>
-      </p:sp>
-      <p:sp>
-        <p:nvSpPr>
-          <p:cNvPr id="15" name="Rounded Rectangle 14"/>
-          <p:cNvSpPr/>
-          <p:nvPr/>
-        </p:nvSpPr>
-        <p:spPr>
-          <a:xfrm>
-            <a:off x="9646920" y="1783080"/>
-            <a:ext cx="1481328" cy="640080"/>
-          </a:xfrm>
-          <a:prstGeom prst="roundRect">
-            <a:avLst/>
-          </a:prstGeom>
-          <a:solidFill>
-            <a:srgbClr val="0F172A"/>
-          </a:solidFill>
-          <a:ln>
-            <a:noFill/>
-          </a:ln>
-          <a:effectLst/>
-        </p:spPr>
-        <p:style>
-          <a:lnRef idx="1">
-            <a:schemeClr val="accent1"/>
-          </a:lnRef>
-          <a:fillRef idx="3">
-            <a:schemeClr val="accent1"/>
-          </a:fillRef>
-          <a:effectRef idx="2">
-            <a:schemeClr val="accent1"/>
-          </a:effectRef>
-          <a:fontRef idx="minor">
-            <a:schemeClr val="lt1"/>
-          </a:fontRef>
-        </p:style>
-        <p:txBody>
-          <a:bodyPr rtlCol="0" anchor="ctr"/>
-          <a:lstStyle/>
-          <a:p>
-            <a:pPr algn="ctr"/>
-            <a:r>
-              <a:rPr sz="1100" b="1">
-                <a:solidFill>
-                  <a:srgbClr val="FFFFFF"/>
-                </a:solidFill>
-                <a:latin typeface="Segoe UI"/>
-              </a:rPr>
-              <a:t>#6 exec-fn</a:t>
-            </a:r>
-          </a:p>
-        </p:txBody>
-      </p:sp>
-      <p:sp>
-        <p:nvSpPr>
-          <p:cNvPr id="16" name="TextBox 15"/>
-          <p:cNvSpPr txBox="1"/>
-          <p:nvPr/>
-        </p:nvSpPr>
-        <p:spPr>
-          <a:xfrm>
-            <a:off x="777240" y="2743200"/>
-            <a:ext cx="10515600" cy="3108960"/>
-          </a:xfrm>
-          <a:prstGeom prst="rect">
-            <a:avLst/>
-          </a:prstGeom>
-          <a:noFill/>
-        </p:spPr>
-        <p:txBody>
-          <a:bodyPr wrap="square" lIns="0" rIns="0" tIns="0" bIns="0">
-            <a:spAutoFit/>
-          </a:bodyPr>
-          <a:lstStyle/>
-          <a:p>
-            <a:pPr>
-              <a:lnSpc>
-                <a:spcPct val="115000"/>
-              </a:lnSpc>
-              <a:spcAft>
-                <a:spcPts val="1000"/>
-              </a:spcAft>
-            </a:pPr>
-            <a:r>
-              <a:rPr sz="1400" b="1">
-                <a:solidFill>
-                  <a:srgbClr val="0F172A"/>
-                </a:solidFill>
-                <a:latin typeface="Segoe UI"/>
-              </a:rPr>
-              <a:t>#5 is a gate, not a task.</a:t>
-            </a:r>
-            <a:r>
-              <a:rPr sz="1400">
-                <a:solidFill>
-                  <a:srgbClr val="475569"/>
-                </a:solidFill>
-                <a:latin typeface="Segoe UI"/>
-              </a:rPr>
-              <a:t>  No third-party code runs until the escape tests pass. CLAUDE.md is explicit that sandboxing is not a later phase — it gates everything.</a:t>
-            </a:r>
-          </a:p>
-          <a:p>
-            <a:pPr>
-              <a:lnSpc>
-                <a:spcPct val="115000"/>
-              </a:lnSpc>
-              <a:spcAft>
-                <a:spcPts val="1000"/>
-              </a:spcAft>
-            </a:pPr>
-            <a:r>
-              <a:rPr sz="1400" b="1">
-                <a:solidFill>
-                  <a:srgbClr val="0F172A"/>
-                </a:solidFill>
-                <a:latin typeface="Segoe UI"/>
-              </a:rPr>
-              <a:t>#1 comes first because two things depend on it.</a:t>
-            </a:r>
-            <a:r>
-              <a:rPr sz="1400">
-                <a:solidFill>
-                  <a:srgbClr val="475569"/>
-                </a:solidFill>
-                <a:latin typeface="Segoe UI"/>
-              </a:rPr>
-              <a:t>  Clustering counts distinct verified callers, and the review gate needs to know who submitted. Retro-fitting identity after the gap log has data means the early data cannot be trusted.</a:t>
-            </a:r>
-          </a:p>
-          <a:p>
-            <a:pPr>
-              <a:lnSpc>
-                <a:spcPct val="115000"/>
-              </a:lnSpc>
-              <a:spcAft>
-                <a:spcPts val="1000"/>
-              </a:spcAft>
-            </a:pPr>
-            <a:r>
-              <a:rPr sz="1400" b="1">
-                <a:solidFill>
-                  <a:srgbClr val="0F172A"/>
-                </a:solidFill>
-                <a:latin typeface="Segoe UI"/>
-              </a:rPr>
-              <a:t>#12 is the cold-start move, and it can start early.</a:t>
-            </a:r>
-            <a:r>
-              <a:rPr sz="1400">
-                <a:solidFill>
-                  <a:srgbClr val="475569"/>
-                </a:solidFill>
-                <a:latin typeface="Segoe UI"/>
-              </a:rPr>
-              <a:t>  PROJECT.md calls the gaps board a standalone product useful before the ecosystem exists. It only needs #9, so it can run in parallel with the sandbox work.</a:t>
-            </a:r>
-          </a:p>
-          <a:p>
-            <a:pPr>
-              <a:lnSpc>
-                <a:spcPct val="115000"/>
-              </a:lnSpc>
-              <a:spcAft>
-                <a:spcPts val="1000"/>
-              </a:spcAft>
-            </a:pPr>
-            <a:r>
-              <a:rPr sz="1400" b="1">
-                <a:solidFill>
-                  <a:srgbClr val="0F172A"/>
-                </a:solidFill>
-                <a:latin typeface="Segoe UI"/>
-              </a:rPr>
-              <a:t>#13 is the exit, as in Phase 0.</a:t>
-            </a:r>
-            <a:r>
-              <a:rPr sz="1400">
-                <a:solidFill>
-                  <a:srgbClr val="475569"/>
-                </a:solidFill>
-                <a:latin typeface="Segoe UI"/>
-              </a:rPr>
-              <a:t>  The gate clears, or a written finding says why not.</a:t>
-            </a:r>
-          </a:p>
-        </p:txBody>
-      </p:sp>
-    </p:spTree>
-  </p:cSld>
-  <p:clrMapOvr>
-    <a:masterClrMapping/>
-  </p:clrMapOvr>
-</p:sld>
-</file>
-
 <file path=ppt/theme/theme1.xml><?xml version="1.0" encoding="utf-8"?>
 <a:theme xmlns:a="http://schemas.openxmlformats.org/drawingml/2006/main" name="Office Theme">
   <a:themeElements>
